--- a/release/slides.pptx
+++ b/release/slides.pptx
@@ -3967,6 +3967,137 @@
               </a:rPr>
               <a:t>30/09</a:t>
             </a:r>
+            <a:r>
+              <a:rPr sz="1300" b="0">
+                <a:solidFill>
+                  <a:srgbClr val="1A1D21"/>
+                </a:solidFill>
+                <a:latin typeface="Calibri"/>
+              </a:rPr>
+              <a:t> — và đây lại là phần </a:t>
+            </a:r>
+            <a:r>
+              <a:rPr sz="1300" b="1">
+                <a:solidFill>
+                  <a:srgbClr val="1A1D21"/>
+                </a:solidFill>
+                <a:latin typeface="Calibri"/>
+              </a:rPr>
+              <a:t>dễ hơn</a:t>
+            </a:r>
+            <a:r>
+              <a:rPr sz="1300" b="0">
+                <a:solidFill>
+                  <a:srgbClr val="1A1D21"/>
+                </a:solidFill>
+                <a:latin typeface="Calibri"/>
+              </a:rPr>
+              <a:t> của năm: chấm Jan–Sep 2017 cho</a:t>
+            </a:r>
+          </a:p>
+          <a:p>
+            <a:pPr>
+              <a:spcAft>
+                <a:spcPts val="500"/>
+              </a:spcAft>
+            </a:pPr>
+            <a:r>
+              <a:rPr sz="1300" b="0">
+                <a:solidFill>
+                  <a:srgbClr val="1A1D21"/>
+                </a:solidFill>
+                <a:latin typeface="Calibri"/>
+              </a:rPr>
+              <a:t>MAE </a:t>
+            </a:r>
+            <a:r>
+              <a:rPr sz="1300" b="1">
+                <a:solidFill>
+                  <a:srgbClr val="1A1D21"/>
+                </a:solidFill>
+                <a:latin typeface="Calibri"/>
+              </a:rPr>
+              <a:t>250,96</a:t>
+            </a:r>
+            <a:r>
+              <a:rPr sz="1300" b="0">
+                <a:solidFill>
+                  <a:srgbClr val="1A1D21"/>
+                </a:solidFill>
+                <a:latin typeface="Calibri"/>
+              </a:rPr>
+              <a:t> so với </a:t>
+            </a:r>
+            <a:r>
+              <a:rPr sz="1300" b="1">
+                <a:solidFill>
+                  <a:srgbClr val="1A1D21"/>
+                </a:solidFill>
+                <a:latin typeface="Calibri"/>
+              </a:rPr>
+              <a:t>272,12</a:t>
+            </a:r>
+            <a:r>
+              <a:rPr sz="1300" b="0">
+                <a:solidFill>
+                  <a:srgbClr val="1A1D21"/>
+                </a:solidFill>
+                <a:latin typeface="Calibri"/>
+              </a:rPr>
+              <a:t> cả năm (chênh </a:t>
+            </a:r>
+            <a:r>
+              <a:rPr sz="1300" b="1">
+                <a:solidFill>
+                  <a:srgbClr val="1A1D21"/>
+                </a:solidFill>
+                <a:latin typeface="Calibri"/>
+              </a:rPr>
+              <a:t>−21,16</a:t>
+            </a:r>
+            <a:r>
+              <a:rPr sz="1300" b="0">
+                <a:solidFill>
+                  <a:srgbClr val="1A1D21"/>
+                </a:solidFill>
+                <a:latin typeface="Calibri"/>
+              </a:rPr>
+              <a:t>). Tháng 11–12 là hai tháng tệ nhất.</a:t>
+            </a:r>
+          </a:p>
+          <a:p>
+            <a:pPr>
+              <a:spcAft>
+                <a:spcPts val="500"/>
+              </a:spcAft>
+            </a:pPr>
+            <a:r>
+              <a:rPr sz="1300" b="0">
+                <a:solidFill>
+                  <a:srgbClr val="1A1D21"/>
+                </a:solidFill>
+                <a:latin typeface="Calibri"/>
+              </a:rPr>
+              <a:t>Ngày lễ chỉ </a:t>
+            </a:r>
+            <a:r>
+              <a:rPr sz="1300" b="1">
+                <a:solidFill>
+                  <a:srgbClr val="1A1D21"/>
+                </a:solidFill>
+                <a:latin typeface="Calibri"/>
+              </a:rPr>
+              <a:t>7 ngày lịch</a:t>
+            </a:r>
+            <a:r>
+              <a:rPr sz="1300" b="0">
+                <a:solidFill>
+                  <a:srgbClr val="1A1D21"/>
+                </a:solidFill>
+                <a:latin typeface="Calibri"/>
+              </a:rPr>
+              <a:t> (167 giờ), MAE từng ngày lệch nhau gần 3 lần (518 → 1.509)</a:t>
+            </a:r>
           </a:p>
           <a:p>
             <a:pPr>
@@ -4075,6 +4206,74 @@
                 <a:latin typeface="Consolas"/>
               </a:rPr>
               <a:t>max(0, ·)</a:t>
+            </a:r>
+          </a:p>
+          <a:p>
+            <a:pPr>
+              <a:spcAft>
+                <a:spcPts val="500"/>
+              </a:spcAft>
+            </a:pPr>
+            <a:r>
+              <a:rPr sz="1300" b="0">
+                <a:solidFill>
+                  <a:srgbClr val="1A1D21"/>
+                </a:solidFill>
+                <a:latin typeface="Calibri"/>
+              </a:rPr>
+              <a:t>Mô hình ≈ OLS: </a:t>
+            </a:r>
+            <a:r>
+              <a:rPr sz="1200" b="0">
+                <a:solidFill>
+                  <a:srgbClr val="33373C"/>
+                </a:solidFill>
+                <a:latin typeface="Consolas"/>
+              </a:rPr>
+              <a:t>alpha ∈ [0; 0,01]</a:t>
+            </a:r>
+            <a:r>
+              <a:rPr sz="1300" b="0">
+                <a:solidFill>
+                  <a:srgbClr val="1A1D21"/>
+                </a:solidFill>
+                <a:latin typeface="Calibri"/>
+              </a:rPr>
+              <a:t> chỉ chênh 0,09 MAE trên validation</a:t>
+            </a:r>
+          </a:p>
+          <a:p>
+            <a:pPr>
+              <a:spcAft>
+                <a:spcPts val="500"/>
+              </a:spcAft>
+            </a:pPr>
+            <a:r>
+              <a:rPr sz="1300" b="0">
+                <a:solidFill>
+                  <a:srgbClr val="1A1D21"/>
+                </a:solidFill>
+                <a:latin typeface="Calibri"/>
+              </a:rPr>
+              <a:t>Ridge </a:t>
+            </a:r>
+            <a:r>
+              <a:rPr sz="1300" b="1">
+                <a:solidFill>
+                  <a:srgbClr val="1A1D21"/>
+                </a:solidFill>
+                <a:latin typeface="Calibri"/>
+              </a:rPr>
+              <a:t>thua</a:t>
+            </a:r>
+            <a:r>
+              <a:rPr sz="1300" b="0">
+                <a:solidFill>
+                  <a:srgbClr val="1A1D21"/>
+                </a:solidFill>
+                <a:latin typeface="Calibri"/>
+              </a:rPr>
+              <a:t> baseline ở 3/4 cửa sổ dev 2012–2017</a:t>
             </a:r>
           </a:p>
           <a:p>
@@ -4245,57 +4444,134 @@
                 </a:solidFill>
                 <a:latin typeface="Calibri"/>
               </a:rPr>
-              <a:t>Mô hình vượt baseline</a:t>
-            </a:r>
-            <a:r>
-              <a:rPr sz="1300" b="0">
-                <a:solidFill>
-                  <a:srgbClr val="1A1D21"/>
-                </a:solidFill>
-                <a:latin typeface="Calibri"/>
-              </a:rPr>
-              <a:t> trên cùng tập test: MAE 259,73 so với 272,90 (−4,8 %)</a:t>
-            </a:r>
-          </a:p>
-          <a:p>
-            <a:pPr>
-              <a:spcAft>
-                <a:spcPts val="500"/>
-              </a:spcAft>
-            </a:pPr>
-            <a:r>
-              <a:rPr sz="1300" b="1">
-                <a:solidFill>
-                  <a:srgbClr val="1A1D21"/>
-                </a:solidFill>
-                <a:latin typeface="Calibri"/>
-              </a:rPr>
-              <a:t>Cách chia tập quan trọng ngang chọn mô hình</a:t>
-            </a:r>
-            <a:r>
-              <a:rPr sz="1300" b="0">
-                <a:solidFill>
-                  <a:srgbClr val="1A1D21"/>
-                </a:solidFill>
-                <a:latin typeface="Calibri"/>
-              </a:rPr>
-              <a:t> — chỉ riêng việc chia tập đã làm MAE chênh</a:t>
-            </a:r>
-          </a:p>
-          <a:p>
-            <a:pPr>
-              <a:spcAft>
-                <a:spcPts val="500"/>
-              </a:spcAft>
-            </a:pPr>
-            <a:r>
-              <a:rPr sz="1300" b="0">
-                <a:solidFill>
-                  <a:srgbClr val="1A1D21"/>
-                </a:solidFill>
-                <a:latin typeface="Calibri"/>
-              </a:rPr>
-              <a:t>7,55 điểm (§Slide 7), gần bằng cả cải thiện của mô hình (13,17)</a:t>
+              <a:t>Mô hình nhỉnh hơn baseline trên 2018</a:t>
+            </a:r>
+            <a:r>
+              <a:rPr sz="1300" b="0">
+                <a:solidFill>
+                  <a:srgbClr val="1A1D21"/>
+                </a:solidFill>
+                <a:latin typeface="Calibri"/>
+              </a:rPr>
+              <a:t> — có điều kiện: MAE 259,73 so với 272,90,</a:t>
+            </a:r>
+          </a:p>
+          <a:p>
+            <a:pPr>
+              <a:spcAft>
+                <a:spcPts val="500"/>
+              </a:spcAft>
+            </a:pPr>
+            <a:r>
+              <a:rPr sz="1300" b="0">
+                <a:solidFill>
+                  <a:srgbClr val="1A1D21"/>
+                </a:solidFill>
+                <a:latin typeface="Calibri"/>
+              </a:rPr>
+              <a:t>CI 95 % của hiệu MAE [+3,80; +22,00], thắng 8/9 tháng; </a:t>
+            </a:r>
+            <a:r>
+              <a:rPr sz="1300" b="1">
+                <a:solidFill>
+                  <a:srgbClr val="1A1D21"/>
+                </a:solidFill>
+                <a:latin typeface="Calibri"/>
+              </a:rPr>
+              <a:t>nhưng</a:t>
+            </a:r>
+            <a:r>
+              <a:rPr sz="1300" b="0">
+                <a:solidFill>
+                  <a:srgbClr val="1A1D21"/>
+                </a:solidFill>
+                <a:latin typeface="Calibri"/>
+              </a:rPr>
+              <a:t> ở 3/4 cửa sổ</a:t>
+            </a:r>
+          </a:p>
+          <a:p>
+            <a:pPr>
+              <a:spcAft>
+                <a:spcPts val="500"/>
+              </a:spcAft>
+            </a:pPr>
+            <a:r>
+              <a:rPr sz="1300" b="0">
+                <a:solidFill>
+                  <a:srgbClr val="1A1D21"/>
+                </a:solidFill>
+                <a:latin typeface="Calibri"/>
+              </a:rPr>
+              <a:t>dev 2012–2017 thì ngược lại</a:t>
+            </a:r>
+          </a:p>
+          <a:p>
+            <a:pPr>
+              <a:spcAft>
+                <a:spcPts val="500"/>
+              </a:spcAft>
+            </a:pPr>
+            <a:r>
+              <a:rPr sz="1300" b="1">
+                <a:solidFill>
+                  <a:srgbClr val="1A1D21"/>
+                </a:solidFill>
+                <a:latin typeface="Calibri"/>
+              </a:rPr>
+              <a:t>Cách đánh giá cũng làm lệch kết luận</a:t>
+            </a:r>
+            <a:r>
+              <a:rPr sz="1300" b="0">
+                <a:solidFill>
+                  <a:srgbClr val="1A1D21"/>
+                </a:solidFill>
+                <a:latin typeface="Calibri"/>
+              </a:rPr>
+              <a:t>: random split lạc quan </a:t>
+            </a:r>
+            <a:r>
+              <a:rPr sz="1300" b="1">
+                <a:solidFill>
+                  <a:srgbClr val="1A1D21"/>
+                </a:solidFill>
+                <a:latin typeface="Calibri"/>
+              </a:rPr>
+              <a:t>5,43 ± 0,81 MAE</a:t>
+            </a:r>
+            <a:r>
+              <a:rPr sz="1300" b="0">
+                <a:solidFill>
+                  <a:srgbClr val="1A1D21"/>
+                </a:solidFill>
+                <a:latin typeface="Calibri"/>
+              </a:rPr>
+              <a:t> trên cùng</a:t>
+            </a:r>
+          </a:p>
+          <a:p>
+            <a:pPr>
+              <a:spcAft>
+                <a:spcPts val="500"/>
+              </a:spcAft>
+            </a:pPr>
+            <a:r>
+              <a:rPr sz="1300" b="0">
+                <a:solidFill>
+                  <a:srgbClr val="1A1D21"/>
+                </a:solidFill>
+                <a:latin typeface="Calibri"/>
+              </a:rPr>
+              <a:t>tập dòng đánh giá (§Slide 7); khoảng cách thời gian thêm </a:t>
+            </a:r>
+            <a:r>
+              <a:rPr sz="1300" b="1">
+                <a:solidFill>
+                  <a:srgbClr val="1A1D21"/>
+                </a:solidFill>
+                <a:latin typeface="Calibri"/>
+              </a:rPr>
+              <a:t>4,15 MAE</a:t>
             </a:r>
           </a:p>
           <a:p>
@@ -4336,6 +4612,47 @@
                 </a:solidFill>
                 <a:latin typeface="Calibri"/>
               </a:rPr>
+              <a:t>Nói trung thực, kể cả khi bất tiện</a:t>
+            </a:r>
+            <a:r>
+              <a:rPr sz="1300" b="0">
+                <a:solidFill>
+                  <a:srgbClr val="1A1D21"/>
+                </a:solidFill>
+                <a:latin typeface="Calibri"/>
+              </a:rPr>
+              <a:t>: không gán cơ chế cho một con số khi chưa tách được</a:t>
+            </a:r>
+          </a:p>
+          <a:p>
+            <a:pPr>
+              <a:spcAft>
+                <a:spcPts val="500"/>
+              </a:spcAft>
+            </a:pPr>
+            <a:r>
+              <a:rPr sz="1300" b="0">
+                <a:solidFill>
+                  <a:srgbClr val="1A1D21"/>
+                </a:solidFill>
+                <a:latin typeface="Calibri"/>
+              </a:rPr>
+              <a:t>các yếu tố — bản đầu của báo cáo đã từng kết luận sai, và nhóm đã sửa</a:t>
+            </a:r>
+          </a:p>
+          <a:p>
+            <a:pPr>
+              <a:spcAft>
+                <a:spcPts val="500"/>
+              </a:spcAft>
+            </a:pPr>
+            <a:r>
+              <a:rPr sz="1300" b="1">
+                <a:solidFill>
+                  <a:srgbClr val="1A1D21"/>
+                </a:solidFill>
+                <a:latin typeface="Calibri"/>
+              </a:rPr>
               <a:t>Minh bạch</a:t>
             </a:r>
             <a:r>
@@ -4345,7 +4662,7 @@
                 </a:solidFill>
                 <a:latin typeface="Calibri"/>
               </a:rPr>
-              <a:t>: 317 test pass, 0 fail; web/API chạy thật, chỉ nạp artifact</a:t>
+              <a:t>: 366 test pass, 0 fail; web/API chạy thật, chỉ nạp artifact</a:t>
             </a:r>
           </a:p>
           <a:p>
@@ -5199,7 +5516,7 @@
                 </a:solidFill>
                 <a:latin typeface="Calibri"/>
               </a:rPr>
-              <a:t>3. Ba quy tắc chống rò rễ đã chốt TRƯỚC khi động vào dữ liệu</a:t>
+              <a:t>3. Ba quy tắc chống rò rỉ đã chốt TRƯỚC khi động vào dữ liệu</a:t>
             </a:r>
           </a:p>
         </p:txBody>
@@ -6352,7 +6669,233 @@
                 </a:solidFill>
                 <a:latin typeface="Calibri"/>
               </a:rPr>
+              <a:t>• </a:t>
+            </a:r>
+            <a:r>
+              <a:rPr sz="1300" b="1">
+                <a:solidFill>
+                  <a:srgbClr val="1A1D21"/>
+                </a:solidFill>
+                <a:latin typeface="Calibri"/>
+              </a:rPr>
+              <a:t>Kèm điều kiện:</a:t>
+            </a:r>
+            <a:r>
+              <a:rPr sz="1300" b="0">
+                <a:solidFill>
+                  <a:srgbClr val="1A1D21"/>
+                </a:solidFill>
+                <a:latin typeface="Calibri"/>
+              </a:rPr>
+              <a:t> block bootstrap theo ngày lịch → hiệu MAE </a:t>
+            </a:r>
+            <a:r>
+              <a:rPr sz="1300" b="1">
+                <a:solidFill>
+                  <a:srgbClr val="1A1D21"/>
+                </a:solidFill>
+                <a:latin typeface="Calibri"/>
+              </a:rPr>
+              <a:t>+13,16</a:t>
+            </a:r>
+            <a:r>
+              <a:rPr sz="1300" b="0">
+                <a:solidFill>
+                  <a:srgbClr val="1A1D21"/>
+                </a:solidFill>
+                <a:latin typeface="Calibri"/>
+              </a:rPr>
+              <a:t>,</a:t>
+            </a:r>
+          </a:p>
+          <a:p>
+            <a:pPr>
+              <a:spcAft>
+                <a:spcPts val="500"/>
+              </a:spcAft>
+            </a:pPr>
+            <a:r>
+              <a:rPr sz="1300" b="0">
+                <a:solidFill>
+                  <a:srgbClr val="1A1D21"/>
+                </a:solidFill>
+                <a:latin typeface="Calibri"/>
+              </a:rPr>
+              <a:t>CI 95 % </a:t>
+            </a:r>
+            <a:r>
+              <a:rPr sz="1300" b="1">
+                <a:solidFill>
+                  <a:srgbClr val="1A1D21"/>
+                </a:solidFill>
+                <a:latin typeface="Calibri"/>
+              </a:rPr>
+              <a:t>[+3,80; +22,00]</a:t>
+            </a:r>
+            <a:r>
+              <a:rPr sz="1300" b="0">
+                <a:solidFill>
+                  <a:srgbClr val="1A1D21"/>
+                </a:solidFill>
+                <a:latin typeface="Calibri"/>
+              </a:rPr>
+              <a:t> (không chứa 0), Ridge thắng </a:t>
+            </a:r>
+            <a:r>
+              <a:rPr sz="1300" b="1">
+                <a:solidFill>
+                  <a:srgbClr val="1A1D21"/>
+                </a:solidFill>
+                <a:latin typeface="Calibri"/>
+              </a:rPr>
+              <a:t>8/9 tháng</a:t>
+            </a:r>
+          </a:p>
+          <a:p>
+            <a:pPr>
+              <a:spcAft>
+                <a:spcPts val="500"/>
+              </a:spcAft>
+            </a:pPr>
+            <a:r>
+              <a:rPr sz="1300" b="0">
+                <a:solidFill>
+                  <a:srgbClr val="1A1D21"/>
+                </a:solidFill>
+                <a:latin typeface="Calibri"/>
+              </a:rPr>
+              <a:t>• </a:t>
+            </a:r>
+            <a:r>
+              <a:rPr sz="1300" b="1">
+                <a:solidFill>
+                  <a:srgbClr val="1A1D21"/>
+                </a:solidFill>
+                <a:latin typeface="Calibri"/>
+              </a:rPr>
+              <a:t>Nhưng</a:t>
+            </a:r>
+            <a:r>
+              <a:rPr sz="1300" b="0">
+                <a:solidFill>
+                  <a:srgbClr val="1A1D21"/>
+                </a:solidFill>
+                <a:latin typeface="Calibri"/>
+              </a:rPr>
+              <a:t> ở 3/4 cửa sổ dev 2012–2017 thì Ridge </a:t>
+            </a:r>
+            <a:r>
+              <a:rPr sz="1300" b="1">
+                <a:solidFill>
+                  <a:srgbClr val="1A1D21"/>
+                </a:solidFill>
+                <a:latin typeface="Calibri"/>
+              </a:rPr>
+              <a:t>thua</a:t>
+            </a:r>
+            <a:r>
+              <a:rPr sz="1300" b="0">
+                <a:solidFill>
+                  <a:srgbClr val="1A1D21"/>
+                </a:solidFill>
+                <a:latin typeface="Calibri"/>
+              </a:rPr>
+              <a:t> baseline → không nói</a:t>
+            </a:r>
+          </a:p>
+          <a:p>
+            <a:pPr>
+              <a:spcAft>
+                <a:spcPts val="500"/>
+              </a:spcAft>
+            </a:pPr>
+            <a:r>
+              <a:rPr sz="1300" b="0">
+                <a:solidFill>
+                  <a:srgbClr val="1A1D21"/>
+                </a:solidFill>
+                <a:latin typeface="Calibri"/>
+              </a:rPr>
+              <a:t>chung "mô hình luôn hơn baseline"</a:t>
+            </a:r>
+          </a:p>
+          <a:p>
+            <a:pPr>
+              <a:spcAft>
+                <a:spcPts val="500"/>
+              </a:spcAft>
+            </a:pPr>
+            <a:r>
+              <a:rPr sz="1300" b="0">
+                <a:solidFill>
+                  <a:srgbClr val="1A1D21"/>
+                </a:solidFill>
+                <a:latin typeface="Calibri"/>
+              </a:rPr>
               <a:t>---</a:t>
+            </a:r>
+          </a:p>
+        </p:txBody>
+      </p:sp>
+      <p:pic>
+        <p:nvPicPr>
+          <p:cNvPr id="5" name="Picture 4" descr="uncertainty_bootstrap.png"/>
+          <p:cNvPicPr>
+            <a:picLocks noChangeAspect="1"/>
+          </p:cNvPicPr>
+          <p:nvPr/>
+        </p:nvPicPr>
+        <p:blipFill>
+          <a:blip r:embed="rId2"/>
+          <a:stretch>
+            <a:fillRect/>
+          </a:stretch>
+        </p:blipFill>
+        <p:spPr>
+          <a:xfrm>
+            <a:off x="7132320" y="1325880"/>
+            <a:ext cx="4572000" cy="1547446"/>
+          </a:xfrm>
+          <a:prstGeom prst="rect">
+            <a:avLst/>
+          </a:prstGeom>
+        </p:spPr>
+      </p:pic>
+      <p:sp>
+        <p:nvSpPr>
+          <p:cNvPr id="6" name="TextBox 5"/>
+          <p:cNvSpPr txBox="1"/>
+          <p:nvPr/>
+        </p:nvSpPr>
+        <p:spPr>
+          <a:xfrm>
+            <a:off x="7132320" y="4983480"/>
+            <a:ext cx="4572000" cy="457200"/>
+          </a:xfrm>
+          <a:prstGeom prst="rect">
+            <a:avLst/>
+          </a:prstGeom>
+          <a:noFill/>
+        </p:spPr>
+        <p:txBody>
+          <a:bodyPr wrap="square">
+            <a:spAutoFit/>
+          </a:bodyPr>
+          <a:lstStyle/>
+          <a:p>
+            <a:pPr>
+              <a:spcAft>
+                <a:spcPts val="0"/>
+              </a:spcAft>
+            </a:pPr>
+            <a:r>
+              <a:rPr sz="900" b="0">
+                <a:solidFill>
+                  <a:srgbClr val="767D87"/>
+                </a:solidFill>
+                <a:latin typeface="Calibri"/>
+              </a:rPr>
+              <a:t>uncertainty_bootstrap.png</a:t>
             </a:r>
           </a:p>
         </p:txBody>
@@ -6452,7 +6995,7 @@
                 </a:solidFill>
                 <a:latin typeface="Calibri"/>
               </a:rPr>
-              <a:t>7. Thí nghiệm 1b: bằng chứng rò rỉ (điểm hay nhất của bài)</a:t>
+              <a:t>7. Thí nghiệm 1b/1c: đo cái đo được, không đoán cơ chế</a:t>
             </a:r>
           </a:p>
         </p:txBody>
@@ -6507,7 +7050,7 @@
                 </a:solidFill>
                 <a:latin typeface="Calibri"/>
               </a:rPr>
-              <a:t>Ba arm dùng </a:t>
+              <a:t>Bốn arm dùng </a:t>
             </a:r>
             <a:r>
               <a:rPr sz="1300" b="1">
@@ -6525,75 +7068,118 @@
                 </a:solidFill>
                 <a:latin typeface="Calibri"/>
               </a:rPr>
-              <a:t> (2017, n = 4.357), chỉ khác khoảng thời gian huấn luyện:</a:t>
-            </a:r>
-          </a:p>
-          <a:p>
-            <a:pPr>
-              <a:spcAft>
-                <a:spcPts val="500"/>
-              </a:spcAft>
-            </a:pPr>
-            <a:r>
-              <a:rPr sz="1300" b="0">
-                <a:solidFill>
-                  <a:srgbClr val="1A1D21"/>
-                </a:solidFill>
-                <a:latin typeface="Calibri"/>
-              </a:rPr>
-              <a:t>→ Càng đưa dữ liệu sát thời điểm dự báo vào train, MAE càng giảm — nhưng </a:t>
-            </a:r>
-            <a:r>
-              <a:rPr sz="1300" b="1">
-                <a:solidFill>
-                  <a:srgbClr val="1A1D21"/>
-                </a:solidFill>
-                <a:latin typeface="Calibri"/>
-              </a:rPr>
-              <a:t>không</a:t>
-            </a:r>
-            <a:r>
-              <a:rPr sz="1300" b="0">
-                <a:solidFill>
-                  <a:srgbClr val="1A1D21"/>
-                </a:solidFill>
-                <a:latin typeface="Calibri"/>
-              </a:rPr>
-              <a:t> phải vì mô hình</a:t>
-            </a:r>
-          </a:p>
-          <a:p>
-            <a:pPr>
-              <a:spcAft>
-                <a:spcPts val="500"/>
-              </a:spcAft>
-            </a:pPr>
-            <a:r>
-              <a:rPr sz="1300" b="0">
-                <a:solidFill>
-                  <a:srgbClr val="1A1D21"/>
-                </a:solidFill>
-                <a:latin typeface="Calibri"/>
-              </a:rPr>
-              <a:t>khôn hơn, mà vì mô hình đã </a:t>
-            </a:r>
-            <a:r>
-              <a:rPr sz="1300" b="1">
-                <a:solidFill>
-                  <a:srgbClr val="1A1D21"/>
-                </a:solidFill>
-                <a:latin typeface="Calibri"/>
-              </a:rPr>
-              <a:t>nhìn thấy hàng xóm của chính dòng cần dự báo</a:t>
-            </a:r>
-            <a:r>
-              <a:rPr sz="1300" b="0">
-                <a:solidFill>
-                  <a:srgbClr val="1A1D21"/>
-                </a:solidFill>
-                <a:latin typeface="Calibri"/>
-              </a:rPr>
-              <a:t>.</a:t>
+              <a:t> (nửa 2017, n = 4.357), lặp trên 5 seed cố định:</a:t>
+            </a:r>
+          </a:p>
+          <a:p>
+            <a:pPr>
+              <a:spcAft>
+                <a:spcPts val="500"/>
+              </a:spcAft>
+            </a:pPr>
+            <a:r>
+              <a:rPr sz="1300" b="0">
+                <a:solidFill>
+                  <a:srgbClr val="1A1D21"/>
+                </a:solidFill>
+                <a:latin typeface="Calibri"/>
+              </a:rPr>
+              <a:t>• ΔMAE (C − B) = </a:t>
+            </a:r>
+            <a:r>
+              <a:rPr sz="1300" b="1">
+                <a:solidFill>
+                  <a:srgbClr val="1A1D21"/>
+                </a:solidFill>
+                <a:latin typeface="Calibri"/>
+              </a:rPr>
+              <a:t>−6,55 ± 0,37</a:t>
+            </a:r>
+            <a:r>
+              <a:rPr sz="1300" b="0">
+                <a:solidFill>
+                  <a:srgbClr val="1A1D21"/>
+                </a:solidFill>
+                <a:latin typeface="Calibri"/>
+              </a:rPr>
+              <a:t> · ΔMAE (D − B) = </a:t>
+            </a:r>
+            <a:r>
+              <a:rPr sz="1300" b="1">
+                <a:solidFill>
+                  <a:srgbClr val="1A1D21"/>
+                </a:solidFill>
+                <a:latin typeface="Calibri"/>
+              </a:rPr>
+              <a:t>−6,76 ± 0,39</a:t>
+            </a:r>
+            <a:r>
+              <a:rPr sz="1300" b="0">
+                <a:solidFill>
+                  <a:srgbClr val="1A1D21"/>
+                </a:solidFill>
+                <a:latin typeface="Calibri"/>
+              </a:rPr>
+              <a:t> → chênh </a:t>
+            </a:r>
+            <a:r>
+              <a:rPr sz="1300" b="1">
+                <a:solidFill>
+                  <a:srgbClr val="1A1D21"/>
+                </a:solidFill>
+                <a:latin typeface="Calibri"/>
+              </a:rPr>
+              <a:t>+0,21</a:t>
+            </a:r>
+          </a:p>
+          <a:p>
+            <a:pPr>
+              <a:spcAft>
+                <a:spcPts val="500"/>
+              </a:spcAft>
+            </a:pPr>
+            <a:r>
+              <a:rPr sz="1300" b="0">
+                <a:solidFill>
+                  <a:srgbClr val="1A1D21"/>
+                </a:solidFill>
+                <a:latin typeface="Calibri"/>
+              </a:rPr>
+              <a:t>• Thí nghiệm 1c (tháng chẵn → train, tháng lẻ → test): ΔMAE = </a:t>
+            </a:r>
+            <a:r>
+              <a:rPr sz="1300" b="1">
+                <a:solidFill>
+                  <a:srgbClr val="1A1D21"/>
+                </a:solidFill>
+                <a:latin typeface="Calibri"/>
+              </a:rPr>
+              <a:t>−2,40</a:t>
+            </a:r>
+          </a:p>
+          <a:p>
+            <a:pPr>
+              <a:spcAft>
+                <a:spcPts val="500"/>
+              </a:spcAft>
+            </a:pPr>
+            <a:r>
+              <a:rPr sz="1300" b="0">
+                <a:solidFill>
+                  <a:srgbClr val="1A1D21"/>
+                </a:solidFill>
+                <a:latin typeface="Calibri"/>
+              </a:rPr>
+              <a:t>→ chênh giữa "2017 rải rác toàn năm" và "2017 chỉ ở tháng khác" là </a:t>
+            </a:r>
+            <a:r>
+              <a:rPr sz="1300" b="1">
+                <a:solidFill>
+                  <a:srgbClr val="1A1D21"/>
+                </a:solidFill>
+                <a:latin typeface="Calibri"/>
+              </a:rPr>
+              <a:t>4,15 MAE</a:t>
             </a:r>
           </a:p>
           <a:p>
@@ -6887,6 +7473,165 @@
                 <a:latin typeface="Calibri"/>
               </a:rPr>
               <a:t> báo số 0</a:t>
+            </a:r>
+          </a:p>
+          <a:p>
+            <a:pPr>
+              <a:spcAft>
+                <a:spcPts val="500"/>
+              </a:spcAft>
+            </a:pPr>
+            <a:r>
+              <a:rPr sz="1300" b="0">
+                <a:solidFill>
+                  <a:srgbClr val="1A1D21"/>
+                </a:solidFill>
+                <a:latin typeface="Calibri"/>
+              </a:rPr>
+              <a:t>Và quan trọng: nhóm em </a:t>
+            </a:r>
+            <a:r>
+              <a:rPr sz="1300" b="1">
+                <a:solidFill>
+                  <a:srgbClr val="1A1D21"/>
+                </a:solidFill>
+                <a:latin typeface="Calibri"/>
+              </a:rPr>
+              <a:t>đã kiểm chứng lại trên dữ liệu 2012–2017</a:t>
+            </a:r>
+            <a:r>
+              <a:rPr sz="1300" b="0">
+                <a:solidFill>
+                  <a:srgbClr val="1A1D21"/>
+                </a:solidFill>
+                <a:latin typeface="Calibri"/>
+              </a:rPr>
+              <a:t>, không chỉ nhìn 2018 —</a:t>
+            </a:r>
+          </a:p>
+          <a:p>
+            <a:pPr>
+              <a:spcAft>
+                <a:spcPts val="500"/>
+              </a:spcAft>
+            </a:pPr>
+            <a:r>
+              <a:rPr sz="1300" b="0">
+                <a:solidFill>
+                  <a:srgbClr val="1A1D21"/>
+                </a:solidFill>
+                <a:latin typeface="Calibri"/>
+              </a:rPr>
+              <a:t>Ridge kém ở </a:t>
+            </a:r>
+            <a:r>
+              <a:rPr sz="1300" b="1">
+                <a:solidFill>
+                  <a:srgbClr val="1A1D21"/>
+                </a:solidFill>
+                <a:latin typeface="Calibri"/>
+              </a:rPr>
+              <a:t>toàn bộ 5 giờ đêm trong cả 3/3 cửa sổ</a:t>
+            </a:r>
+            <a:r>
+              <a:rPr sz="1300" b="0">
+                <a:solidFill>
+                  <a:srgbClr val="1A1D21"/>
+                </a:solidFill>
+                <a:latin typeface="Calibri"/>
+              </a:rPr>
+              <a:t>. Nên đây là </a:t>
+            </a:r>
+            <a:r>
+              <a:rPr sz="1300" b="1">
+                <a:solidFill>
+                  <a:srgbClr val="1A1D21"/>
+                </a:solidFill>
+                <a:latin typeface="Calibri"/>
+              </a:rPr>
+              <a:t>đặc tính của mô hình</a:t>
+            </a:r>
+            <a:r>
+              <a:rPr sz="1300" b="0">
+                <a:solidFill>
+                  <a:srgbClr val="1A1D21"/>
+                </a:solidFill>
+                <a:latin typeface="Calibri"/>
+              </a:rPr>
+              <a:t>, không</a:t>
+            </a:r>
+          </a:p>
+          <a:p>
+            <a:pPr>
+              <a:spcAft>
+                <a:spcPts val="500"/>
+              </a:spcAft>
+            </a:pPr>
+            <a:r>
+              <a:rPr sz="1300" b="0">
+                <a:solidFill>
+                  <a:srgbClr val="1A1D21"/>
+                </a:solidFill>
+                <a:latin typeface="Calibri"/>
+              </a:rPr>
+              <a:t>phải đặc điểm của năm 2018. Giả thuyết: mô hình cộng tuyến tính nên hiệu ứng thời tiết cộng</a:t>
+            </a:r>
+          </a:p>
+          <a:p>
+            <a:pPr>
+              <a:spcAft>
+                <a:spcPts val="500"/>
+              </a:spcAft>
+            </a:pPr>
+            <a:r>
+              <a:rPr sz="1300" b="0">
+                <a:solidFill>
+                  <a:srgbClr val="1A1D21"/>
+                </a:solidFill>
+                <a:latin typeface="Calibri"/>
+              </a:rPr>
+              <a:t>một lượng *tuyệt đối* giống nhau ở mọi giờ, trong khi thực tế nó *tương đối* theo lưu lượng.</a:t>
+            </a:r>
+          </a:p>
+          <a:p>
+            <a:pPr>
+              <a:spcAft>
+                <a:spcPts val="500"/>
+              </a:spcAft>
+            </a:pPr>
+            <a:r>
+              <a:rPr sz="1300" b="0">
+                <a:solidFill>
+                  <a:srgbClr val="1A1D21"/>
+                </a:solidFill>
+                <a:latin typeface="Calibri"/>
+              </a:rPr>
+              <a:t>Nhóm thử log-target: MAE giờ đêm giảm gần một nửa, nhưng MAE tổng lại xấu hơn — và nhóm </a:t>
+            </a:r>
+            <a:r>
+              <a:rPr sz="1300" b="1">
+                <a:solidFill>
+                  <a:srgbClr val="1A1D21"/>
+                </a:solidFill>
+                <a:latin typeface="Calibri"/>
+              </a:rPr>
+              <a:t>không</a:t>
+            </a:r>
+          </a:p>
+          <a:p>
+            <a:pPr>
+              <a:spcAft>
+                <a:spcPts val="500"/>
+              </a:spcAft>
+            </a:pPr>
+            <a:r>
+              <a:rPr sz="1300" b="0">
+                <a:solidFill>
+                  <a:srgbClr val="1A1D21"/>
+                </a:solidFill>
+                <a:latin typeface="Calibri"/>
+              </a:rPr>
+              <a:t>thay mô hình, vì giả thuyết này nêu ra sau khi đã nhìn 2018."</a:t>
             </a:r>
           </a:p>
           <a:p>

--- a/release/slides.pptx
+++ b/release/slides.pptx
@@ -4662,7 +4662,7 @@
                 </a:solidFill>
                 <a:latin typeface="Calibri"/>
               </a:rPr>
-              <a:t>: 366 test pass, 0 fail; web/API chạy thật, chỉ nạp artifact</a:t>
+              <a:t>: 385 test pass, 0 fail; web/API chạy thật, chỉ nạp artifact</a:t>
             </a:r>
           </a:p>
           <a:p>

--- a/release/slides.pptx
+++ b/release/slides.pptx
@@ -16,7 +16,6 @@
     <p:sldId id="264" r:id="rId15"/>
     <p:sldId id="265" r:id="rId16"/>
     <p:sldId id="266" r:id="rId17"/>
-    <p:sldId id="267" r:id="rId18"/>
   </p:sldIdLst>
   <p:sldSz cx="12191695" cy="6858000" type="screen4x3"/>
   <p:notesSz cx="6858000" cy="9144000"/>
@@ -3250,7 +3249,7 @@
                 </a:solidFill>
                 <a:latin typeface="Calibri"/>
               </a:rPr>
-              <a:t>9. Ứng dụng Web / API: chỉ nạp artifact, không train lại</a:t>
+              <a:t>9. Model Card (tóm tắt) &amp; Hạn chế</a:t>
             </a:r>
           </a:p>
         </p:txBody>
@@ -3299,31 +3298,326 @@
               </a:spcAft>
             </a:pPr>
             <a:r>
-              <a:rPr sz="1300" b="0">
-                <a:solidFill>
-                  <a:srgbClr val="1A1D21"/>
-                </a:solidFill>
-                <a:latin typeface="Calibri"/>
-              </a:rPr>
-              <a:t>• 3 màn hình: </a:t>
-            </a:r>
-            <a:r>
-              <a:rPr sz="1300" b="1">
-                <a:solidFill>
-                  <a:srgbClr val="1A1D21"/>
-                </a:solidFill>
-                <a:latin typeface="Calibri"/>
-              </a:rPr>
-              <a:t>Giới thiệu</a:t>
-            </a:r>
-            <a:r>
-              <a:rPr sz="1300" b="0">
-                <a:solidFill>
-                  <a:srgbClr val="1A1D21"/>
-                </a:solidFill>
-                <a:latin typeface="Calibri"/>
-              </a:rPr>
-              <a:t> (</a:t>
+              <a:rPr sz="1300" b="1">
+                <a:solidFill>
+                  <a:srgbClr val="1A1D21"/>
+                </a:solidFill>
+                <a:latin typeface="Calibri"/>
+              </a:rPr>
+              <a:t>Hạn chế (nói thẳng):</a:t>
+            </a:r>
+          </a:p>
+          <a:p>
+            <a:pPr>
+              <a:spcAft>
+                <a:spcPts val="500"/>
+              </a:spcAft>
+            </a:pPr>
+            <a:r>
+              <a:rPr sz="1300" b="0">
+                <a:solidFill>
+                  <a:srgbClr val="1A1D21"/>
+                </a:solidFill>
+                <a:latin typeface="Calibri"/>
+              </a:rPr>
+              <a:t>Một trạm I-94 westbound — </a:t>
+            </a:r>
+            <a:r>
+              <a:rPr sz="1300" b="1">
+                <a:solidFill>
+                  <a:srgbClr val="1A1D21"/>
+                </a:solidFill>
+                <a:latin typeface="Calibri"/>
+              </a:rPr>
+              <a:t>không đại diện toàn thành phố</a:t>
+            </a:r>
+          </a:p>
+          <a:p>
+            <a:pPr>
+              <a:spcAft>
+                <a:spcPts val="500"/>
+              </a:spcAft>
+            </a:pPr>
+            <a:r>
+              <a:rPr sz="1300" b="0">
+                <a:solidFill>
+                  <a:srgbClr val="1A1D21"/>
+                </a:solidFill>
+                <a:latin typeface="Calibri"/>
+              </a:rPr>
+              <a:t>Ngày lễ: MAE gấp 4,3 lần</a:t>
+            </a:r>
+          </a:p>
+          <a:p>
+            <a:pPr>
+              <a:spcAft>
+                <a:spcPts val="500"/>
+              </a:spcAft>
+            </a:pPr>
+            <a:r>
+              <a:rPr sz="1300" b="0">
+                <a:solidFill>
+                  <a:srgbClr val="1A1D21"/>
+                </a:solidFill>
+                <a:latin typeface="Calibri"/>
+              </a:rPr>
+              <a:t>Thời tiết cực đoan: MAE gấp 1,84 lần</a:t>
+            </a:r>
+          </a:p>
+          <a:p>
+            <a:pPr>
+              <a:spcAft>
+                <a:spcPts val="500"/>
+              </a:spcAft>
+            </a:pPr>
+            <a:r>
+              <a:rPr sz="1300" b="0">
+                <a:solidFill>
+                  <a:srgbClr val="1A1D21"/>
+                </a:solidFill>
+                <a:latin typeface="Calibri"/>
+              </a:rPr>
+              <a:t>Test 2018 chỉ tới </a:t>
+            </a:r>
+            <a:r>
+              <a:rPr sz="1300" b="1">
+                <a:solidFill>
+                  <a:srgbClr val="1A1D21"/>
+                </a:solidFill>
+                <a:latin typeface="Calibri"/>
+              </a:rPr>
+              <a:t>30/09</a:t>
+            </a:r>
+            <a:r>
+              <a:rPr sz="1300" b="0">
+                <a:solidFill>
+                  <a:srgbClr val="1A1D21"/>
+                </a:solidFill>
+                <a:latin typeface="Calibri"/>
+              </a:rPr>
+              <a:t> — và đây lại là phần </a:t>
+            </a:r>
+            <a:r>
+              <a:rPr sz="1300" b="1">
+                <a:solidFill>
+                  <a:srgbClr val="1A1D21"/>
+                </a:solidFill>
+                <a:latin typeface="Calibri"/>
+              </a:rPr>
+              <a:t>dễ hơn</a:t>
+            </a:r>
+            <a:r>
+              <a:rPr sz="1300" b="0">
+                <a:solidFill>
+                  <a:srgbClr val="1A1D21"/>
+                </a:solidFill>
+                <a:latin typeface="Calibri"/>
+              </a:rPr>
+              <a:t> của năm: chấm Jan–Sep 2017 cho</a:t>
+            </a:r>
+          </a:p>
+          <a:p>
+            <a:pPr>
+              <a:spcAft>
+                <a:spcPts val="500"/>
+              </a:spcAft>
+            </a:pPr>
+            <a:r>
+              <a:rPr sz="1300" b="0">
+                <a:solidFill>
+                  <a:srgbClr val="1A1D21"/>
+                </a:solidFill>
+                <a:latin typeface="Calibri"/>
+              </a:rPr>
+              <a:t>MAE </a:t>
+            </a:r>
+            <a:r>
+              <a:rPr sz="1300" b="1">
+                <a:solidFill>
+                  <a:srgbClr val="1A1D21"/>
+                </a:solidFill>
+                <a:latin typeface="Calibri"/>
+              </a:rPr>
+              <a:t>250,96</a:t>
+            </a:r>
+            <a:r>
+              <a:rPr sz="1300" b="0">
+                <a:solidFill>
+                  <a:srgbClr val="1A1D21"/>
+                </a:solidFill>
+                <a:latin typeface="Calibri"/>
+              </a:rPr>
+              <a:t> so với </a:t>
+            </a:r>
+            <a:r>
+              <a:rPr sz="1300" b="1">
+                <a:solidFill>
+                  <a:srgbClr val="1A1D21"/>
+                </a:solidFill>
+                <a:latin typeface="Calibri"/>
+              </a:rPr>
+              <a:t>272,12</a:t>
+            </a:r>
+            <a:r>
+              <a:rPr sz="1300" b="0">
+                <a:solidFill>
+                  <a:srgbClr val="1A1D21"/>
+                </a:solidFill>
+                <a:latin typeface="Calibri"/>
+              </a:rPr>
+              <a:t> cả năm (chênh </a:t>
+            </a:r>
+            <a:r>
+              <a:rPr sz="1300" b="1">
+                <a:solidFill>
+                  <a:srgbClr val="1A1D21"/>
+                </a:solidFill>
+                <a:latin typeface="Calibri"/>
+              </a:rPr>
+              <a:t>−21,16</a:t>
+            </a:r>
+            <a:r>
+              <a:rPr sz="1300" b="0">
+                <a:solidFill>
+                  <a:srgbClr val="1A1D21"/>
+                </a:solidFill>
+                <a:latin typeface="Calibri"/>
+              </a:rPr>
+              <a:t>). Tháng 11–12 là hai tháng tệ nhất.</a:t>
+            </a:r>
+          </a:p>
+          <a:p>
+            <a:pPr>
+              <a:spcAft>
+                <a:spcPts val="500"/>
+              </a:spcAft>
+            </a:pPr>
+            <a:r>
+              <a:rPr sz="1300" b="0">
+                <a:solidFill>
+                  <a:srgbClr val="1A1D21"/>
+                </a:solidFill>
+                <a:latin typeface="Calibri"/>
+              </a:rPr>
+              <a:t>Ngày lễ chỉ </a:t>
+            </a:r>
+            <a:r>
+              <a:rPr sz="1300" b="1">
+                <a:solidFill>
+                  <a:srgbClr val="1A1D21"/>
+                </a:solidFill>
+                <a:latin typeface="Calibri"/>
+              </a:rPr>
+              <a:t>7 ngày lịch</a:t>
+            </a:r>
+            <a:r>
+              <a:rPr sz="1300" b="0">
+                <a:solidFill>
+                  <a:srgbClr val="1A1D21"/>
+                </a:solidFill>
+                <a:latin typeface="Calibri"/>
+              </a:rPr>
+              <a:t> (167 giờ), MAE từng ngày lệch nhau gần 3 lần (518 → 1.509)</a:t>
+            </a:r>
+          </a:p>
+          <a:p>
+            <a:pPr>
+              <a:spcAft>
+                <a:spcPts val="500"/>
+              </a:spcAft>
+            </a:pPr>
+            <a:r>
+              <a:rPr sz="1300" b="0">
+                <a:solidFill>
+                  <a:srgbClr val="1A1D21"/>
+                </a:solidFill>
+                <a:latin typeface="Calibri"/>
+              </a:rPr>
+              <a:t>Dữ liệu lịch sử </a:t>
+            </a:r>
+            <a:r>
+              <a:rPr sz="1300" b="1">
+                <a:solidFill>
+                  <a:srgbClr val="1A1D21"/>
+                </a:solidFill>
+                <a:latin typeface="Calibri"/>
+              </a:rPr>
+              <a:t>2012–2018</a:t>
+            </a:r>
+          </a:p>
+          <a:p>
+            <a:pPr>
+              <a:spcAft>
+                <a:spcPts val="500"/>
+              </a:spcAft>
+            </a:pPr>
+            <a:r>
+              <a:rPr sz="1300" b="0">
+                <a:solidFill>
+                  <a:srgbClr val="1A1D21"/>
+                </a:solidFill>
+                <a:latin typeface="Calibri"/>
+              </a:rPr>
+              <a:t>Lịch State Fair chỉ có </a:t>
+            </a:r>
+            <a:r>
+              <a:rPr sz="1300" b="1">
+                <a:solidFill>
+                  <a:srgbClr val="1A1D21"/>
+                </a:solidFill>
+                <a:latin typeface="Calibri"/>
+              </a:rPr>
+              <a:t>2012–2020</a:t>
+            </a:r>
+            <a:r>
+              <a:rPr sz="1300" b="0">
+                <a:solidFill>
+                  <a:srgbClr val="1A1D21"/>
+                </a:solidFill>
+                <a:latin typeface="Calibri"/>
+              </a:rPr>
+              <a:t>; ngoài phạm vi hệ thống </a:t>
+            </a:r>
+            <a:r>
+              <a:rPr sz="1300" b="1">
+                <a:solidFill>
+                  <a:srgbClr val="1A1D21"/>
+                </a:solidFill>
+                <a:latin typeface="Calibri"/>
+              </a:rPr>
+              <a:t>báo rõ, không tự đoán</a:t>
+            </a:r>
+          </a:p>
+          <a:p>
+            <a:pPr>
+              <a:spcAft>
+                <a:spcPts val="500"/>
+              </a:spcAft>
+            </a:pPr>
+            <a:r>
+              <a:rPr sz="1300" b="1">
+                <a:solidFill>
+                  <a:srgbClr val="1A1D21"/>
+                </a:solidFill>
+                <a:latin typeface="Calibri"/>
+              </a:rPr>
+              <a:t>Không dùng cho mục đích safety-critical</a:t>
+            </a:r>
+          </a:p>
+          <a:p>
+            <a:pPr>
+              <a:spcAft>
+                <a:spcPts val="500"/>
+              </a:spcAft>
+            </a:pPr>
+            <a:r>
+              <a:rPr sz="1300" b="0">
+                <a:solidFill>
+                  <a:srgbClr val="1A1D21"/>
+                </a:solidFill>
+                <a:latin typeface="Calibri"/>
+              </a:rPr>
+              <a:t>Dự báo thô âm ở 34/6.533 dòng → API chặn về 0 theo policy </a:t>
             </a:r>
             <a:r>
               <a:rPr sz="1200" b="0">
@@ -3332,34 +3626,23 @@
                 </a:solidFill>
                 <a:latin typeface="Consolas"/>
               </a:rPr>
-              <a:t>/</a:t>
-            </a:r>
-            <a:r>
-              <a:rPr sz="1300" b="0">
-                <a:solidFill>
-                  <a:srgbClr val="1A1D21"/>
-                </a:solidFill>
-                <a:latin typeface="Calibri"/>
-              </a:rPr>
-              <a:t>) · </a:t>
-            </a:r>
-            <a:r>
-              <a:rPr sz="1300" b="1">
-                <a:solidFill>
-                  <a:srgbClr val="1A1D21"/>
-                </a:solidFill>
-                <a:latin typeface="Calibri"/>
-              </a:rPr>
-              <a:t>Dự báo</a:t>
-            </a:r>
-            <a:r>
-              <a:rPr sz="1300" b="0">
-                <a:solidFill>
-                  <a:srgbClr val="1A1D21"/>
-                </a:solidFill>
-                <a:latin typeface="Calibri"/>
-              </a:rPr>
-              <a:t> (</a:t>
+              <a:t>max(0, ·)</a:t>
+            </a:r>
+          </a:p>
+          <a:p>
+            <a:pPr>
+              <a:spcAft>
+                <a:spcPts val="500"/>
+              </a:spcAft>
+            </a:pPr>
+            <a:r>
+              <a:rPr sz="1300" b="0">
+                <a:solidFill>
+                  <a:srgbClr val="1A1D21"/>
+                </a:solidFill>
+                <a:latin typeface="Calibri"/>
+              </a:rPr>
+              <a:t>Mô hình ≈ OLS: </a:t>
             </a:r>
             <a:r>
               <a:rPr sz="1200" b="0">
@@ -3368,351 +3651,50 @@
                 </a:solidFill>
                 <a:latin typeface="Consolas"/>
               </a:rPr>
-              <a:t>/du-bao</a:t>
-            </a:r>
-            <a:r>
-              <a:rPr sz="1300" b="0">
-                <a:solidFill>
-                  <a:srgbClr val="1A1D21"/>
-                </a:solidFill>
-                <a:latin typeface="Calibri"/>
-              </a:rPr>
-              <a:t>, gọi </a:t>
-            </a:r>
-            <a:r>
-              <a:rPr sz="1200" b="0">
-                <a:solidFill>
-                  <a:srgbClr val="33373C"/>
-                </a:solidFill>
-                <a:latin typeface="Consolas"/>
-              </a:rPr>
-              <a:t>POST /api/traffic-forecast</a:t>
-            </a:r>
-            <a:r>
-              <a:rPr sz="1300" b="0">
-                <a:solidFill>
-                  <a:srgbClr val="1A1D21"/>
-                </a:solidFill>
-                <a:latin typeface="Calibri"/>
-              </a:rPr>
-              <a:t> thật) ·</a:t>
-            </a:r>
-          </a:p>
-          <a:p>
-            <a:pPr>
-              <a:spcAft>
-                <a:spcPts val="500"/>
-              </a:spcAft>
-            </a:pPr>
-            <a:r>
-              <a:rPr sz="1300" b="1">
-                <a:solidFill>
-                  <a:srgbClr val="1A1D21"/>
-                </a:solidFill>
-                <a:latin typeface="Calibri"/>
-              </a:rPr>
-              <a:t>Dashboard &amp; Model Card</a:t>
-            </a:r>
-            <a:r>
-              <a:rPr sz="1300" b="0">
-                <a:solidFill>
-                  <a:srgbClr val="1A1D21"/>
-                </a:solidFill>
-                <a:latin typeface="Calibri"/>
-              </a:rPr>
-              <a:t> (</a:t>
-            </a:r>
-            <a:r>
-              <a:rPr sz="1200" b="0">
-                <a:solidFill>
-                  <a:srgbClr val="33373C"/>
-                </a:solidFill>
-                <a:latin typeface="Consolas"/>
-              </a:rPr>
-              <a:t>/dashboard</a:t>
-            </a:r>
-            <a:r>
-              <a:rPr sz="1300" b="0">
-                <a:solidFill>
-                  <a:srgbClr val="1A1D21"/>
-                </a:solidFill>
-                <a:latin typeface="Calibri"/>
-              </a:rPr>
-              <a:t>)</a:t>
-            </a:r>
-          </a:p>
-          <a:p>
-            <a:pPr>
-              <a:spcAft>
-                <a:spcPts val="500"/>
-              </a:spcAft>
-            </a:pPr>
-            <a:r>
-              <a:rPr sz="1300" b="0">
-                <a:solidFill>
-                  <a:srgbClr val="1A1D21"/>
-                </a:solidFill>
-                <a:latin typeface="Calibri"/>
-              </a:rPr>
-              <a:t>• 4 endpoint: </a:t>
-            </a:r>
-            <a:r>
-              <a:rPr sz="1200" b="0">
-                <a:solidFill>
-                  <a:srgbClr val="33373C"/>
-                </a:solidFill>
-                <a:latin typeface="Consolas"/>
-              </a:rPr>
-              <a:t>GET /health</a:t>
-            </a:r>
-            <a:r>
-              <a:rPr sz="1300" b="0">
-                <a:solidFill>
-                  <a:srgbClr val="1A1D21"/>
-                </a:solidFill>
-                <a:latin typeface="Calibri"/>
-              </a:rPr>
-              <a:t> · </a:t>
-            </a:r>
-            <a:r>
-              <a:rPr sz="1200" b="0">
-                <a:solidFill>
-                  <a:srgbClr val="33373C"/>
-                </a:solidFill>
-                <a:latin typeface="Consolas"/>
-              </a:rPr>
-              <a:t>GET /api/model-info</a:t>
-            </a:r>
-            <a:r>
-              <a:rPr sz="1300" b="0">
-                <a:solidFill>
-                  <a:srgbClr val="1A1D21"/>
-                </a:solidFill>
-                <a:latin typeface="Calibri"/>
-              </a:rPr>
-              <a:t> · </a:t>
-            </a:r>
-            <a:r>
-              <a:rPr sz="1200" b="0">
-                <a:solidFill>
-                  <a:srgbClr val="33373C"/>
-                </a:solidFill>
-                <a:latin typeface="Consolas"/>
-              </a:rPr>
-              <a:t>POST /api/traffic-forecast</a:t>
-            </a:r>
-            <a:r>
-              <a:rPr sz="1300" b="0">
-                <a:solidFill>
-                  <a:srgbClr val="1A1D21"/>
-                </a:solidFill>
-                <a:latin typeface="Calibri"/>
-              </a:rPr>
-              <a:t> ·</a:t>
-            </a:r>
-          </a:p>
-          <a:p>
-            <a:pPr>
-              <a:spcAft>
-                <a:spcPts val="500"/>
-              </a:spcAft>
-            </a:pPr>
-            <a:r>
-              <a:rPr sz="1200" b="0">
-                <a:solidFill>
-                  <a:srgbClr val="33373C"/>
-                </a:solidFill>
-                <a:latin typeface="Consolas"/>
-              </a:rPr>
-              <a:t>GET /api/dashboard-metrics</a:t>
-            </a:r>
-          </a:p>
-          <a:p>
-            <a:pPr>
-              <a:spcAft>
-                <a:spcPts val="500"/>
-              </a:spcAft>
-            </a:pPr>
-            <a:r>
-              <a:rPr sz="1300" b="0">
-                <a:solidFill>
-                  <a:srgbClr val="1A1D21"/>
-                </a:solidFill>
-                <a:latin typeface="Calibri"/>
-              </a:rPr>
-              <a:t>• </a:t>
-            </a:r>
-            <a:r>
-              <a:rPr sz="1300" b="1">
-                <a:solidFill>
-                  <a:srgbClr val="1A1D21"/>
-                </a:solidFill>
-                <a:latin typeface="Calibri"/>
-              </a:rPr>
-              <a:t>Không</a:t>
-            </a:r>
-            <a:r>
-              <a:rPr sz="1300" b="0">
-                <a:solidFill>
-                  <a:srgbClr val="1A1D21"/>
-                </a:solidFill>
-                <a:latin typeface="Calibri"/>
-              </a:rPr>
-              <a:t> train, </a:t>
-            </a:r>
-            <a:r>
-              <a:rPr sz="1300" b="1">
-                <a:solidFill>
-                  <a:srgbClr val="1A1D21"/>
-                </a:solidFill>
-                <a:latin typeface="Calibri"/>
-              </a:rPr>
-              <a:t>không</a:t>
-            </a:r>
-            <a:r>
-              <a:rPr sz="1300" b="0">
-                <a:solidFill>
-                  <a:srgbClr val="1A1D21"/>
-                </a:solidFill>
-                <a:latin typeface="Calibri"/>
-              </a:rPr>
-              <a:t> tune alpha, </a:t>
-            </a:r>
-            <a:r>
-              <a:rPr sz="1300" b="1">
-                <a:solidFill>
-                  <a:srgbClr val="1A1D21"/>
-                </a:solidFill>
-                <a:latin typeface="Calibri"/>
-              </a:rPr>
-              <a:t>không</a:t>
-            </a:r>
-            <a:r>
-              <a:rPr sz="1300" b="0">
-                <a:solidFill>
-                  <a:srgbClr val="1A1D21"/>
-                </a:solidFill>
-                <a:latin typeface="Calibri"/>
-              </a:rPr>
-              <a:t> fit lại encoder/imputer/scaler,</a:t>
-            </a:r>
-          </a:p>
-          <a:p>
-            <a:pPr>
-              <a:spcAft>
-                <a:spcPts val="500"/>
-              </a:spcAft>
-            </a:pPr>
-            <a:r>
-              <a:rPr sz="1300" b="1">
-                <a:solidFill>
-                  <a:srgbClr val="1A1D21"/>
-                </a:solidFill>
-                <a:latin typeface="Calibri"/>
-              </a:rPr>
-              <a:t>không</a:t>
-            </a:r>
-            <a:r>
-              <a:rPr sz="1300" b="0">
-                <a:solidFill>
-                  <a:srgbClr val="1A1D21"/>
-                </a:solidFill>
-                <a:latin typeface="Calibri"/>
-              </a:rPr>
-              <a:t> đọc target từ dataset</a:t>
-            </a:r>
-          </a:p>
-          <a:p>
-            <a:pPr>
-              <a:spcAft>
-                <a:spcPts val="500"/>
-              </a:spcAft>
-            </a:pPr>
-            <a:r>
-              <a:rPr sz="1300" b="0">
-                <a:solidFill>
-                  <a:srgbClr val="1A1D21"/>
-                </a:solidFill>
-                <a:latin typeface="Calibri"/>
-              </a:rPr>
-              <a:t>• Mọi feature sinh bằng </a:t>
-            </a:r>
-            <a:r>
-              <a:rPr sz="1300" b="1">
-                <a:solidFill>
-                  <a:srgbClr val="1A1D21"/>
-                </a:solidFill>
-                <a:latin typeface="Calibri"/>
-              </a:rPr>
-              <a:t>CHUNG hàm src.features.build_features</a:t>
-            </a:r>
-            <a:r>
-              <a:rPr sz="1300" b="0">
-                <a:solidFill>
-                  <a:srgbClr val="1A1D21"/>
-                </a:solidFill>
-                <a:latin typeface="Calibri"/>
-              </a:rPr>
-              <a:t> với lúc huấn luyện</a:t>
-            </a:r>
-          </a:p>
-          <a:p>
-            <a:pPr>
-              <a:spcAft>
-                <a:spcPts val="500"/>
-              </a:spcAft>
-            </a:pPr>
-            <a:r>
-              <a:rPr sz="1300" b="0">
-                <a:solidFill>
-                  <a:srgbClr val="1A1D21"/>
-                </a:solidFill>
-                <a:latin typeface="Calibri"/>
-              </a:rPr>
-              <a:t>→ </a:t>
-            </a:r>
-            <a:r>
-              <a:rPr sz="1300" b="1">
-                <a:solidFill>
-                  <a:srgbClr val="1A1D21"/>
-                </a:solidFill>
-                <a:latin typeface="Calibri"/>
-              </a:rPr>
-              <a:t>không có train-serving skew</a:t>
-            </a:r>
-          </a:p>
-          <a:p>
-            <a:pPr>
-              <a:spcAft>
-                <a:spcPts val="500"/>
-              </a:spcAft>
-            </a:pPr>
-            <a:r>
-              <a:rPr sz="1300" b="0">
-                <a:solidFill>
-                  <a:srgbClr val="1A1D21"/>
-                </a:solidFill>
-                <a:latin typeface="Calibri"/>
-              </a:rPr>
-              <a:t>• Số liệu dashboard </a:t>
-            </a:r>
-            <a:r>
-              <a:rPr sz="1300" b="1">
-                <a:solidFill>
-                  <a:srgbClr val="1A1D21"/>
-                </a:solidFill>
-                <a:latin typeface="Calibri"/>
-              </a:rPr>
-              <a:t>đọc từ artifact</a:t>
-            </a:r>
-            <a:r>
-              <a:rPr sz="1300" b="0">
-                <a:solidFill>
-                  <a:srgbClr val="1A1D21"/>
-                </a:solidFill>
-                <a:latin typeface="Calibri"/>
-              </a:rPr>
-              <a:t>, không hard-code trong HTML/JS</a:t>
+              <a:t>alpha ∈ [0; 0,01]</a:t>
+            </a:r>
+            <a:r>
+              <a:rPr sz="1300" b="0">
+                <a:solidFill>
+                  <a:srgbClr val="1A1D21"/>
+                </a:solidFill>
+                <a:latin typeface="Calibri"/>
+              </a:rPr>
+              <a:t> chỉ chênh 0,09 MAE trên validation</a:t>
+            </a:r>
+          </a:p>
+          <a:p>
+            <a:pPr>
+              <a:spcAft>
+                <a:spcPts val="500"/>
+              </a:spcAft>
+            </a:pPr>
+            <a:r>
+              <a:rPr sz="1300" b="0">
+                <a:solidFill>
+                  <a:srgbClr val="1A1D21"/>
+                </a:solidFill>
+                <a:latin typeface="Calibri"/>
+              </a:rPr>
+              <a:t>Ridge </a:t>
+            </a:r>
+            <a:r>
+              <a:rPr sz="1300" b="1">
+                <a:solidFill>
+                  <a:srgbClr val="1A1D21"/>
+                </a:solidFill>
+                <a:latin typeface="Calibri"/>
+              </a:rPr>
+              <a:t>thua</a:t>
+            </a:r>
+            <a:r>
+              <a:rPr sz="1300" b="0">
+                <a:solidFill>
+                  <a:srgbClr val="1A1D21"/>
+                </a:solidFill>
+                <a:latin typeface="Calibri"/>
+              </a:rPr>
+              <a:t> baseline ở 3/4 cửa sổ dev 2012–2017</a:t>
             </a:r>
           </a:p>
           <a:p>
@@ -3828,7 +3810,7 @@
                 </a:solidFill>
                 <a:latin typeface="Calibri"/>
               </a:rPr>
-              <a:t>10. Model Card (tóm tắt) &amp; Hạn chế</a:t>
+              <a:t>10. Kết luận</a:t>
             </a:r>
           </a:p>
         </p:txBody>
@@ -3883,397 +3865,225 @@
                 </a:solidFill>
                 <a:latin typeface="Calibri"/>
               </a:rPr>
-              <a:t>Hạn chế (nói thẳng):</a:t>
-            </a:r>
-          </a:p>
-          <a:p>
-            <a:pPr>
-              <a:spcAft>
-                <a:spcPts val="500"/>
-              </a:spcAft>
-            </a:pPr>
-            <a:r>
-              <a:rPr sz="1300" b="0">
-                <a:solidFill>
-                  <a:srgbClr val="1A1D21"/>
-                </a:solidFill>
-                <a:latin typeface="Calibri"/>
-              </a:rPr>
-              <a:t>Một trạm I-94 westbound — </a:t>
-            </a:r>
-            <a:r>
-              <a:rPr sz="1300" b="1">
-                <a:solidFill>
-                  <a:srgbClr val="1A1D21"/>
-                </a:solidFill>
-                <a:latin typeface="Calibri"/>
-              </a:rPr>
-              <a:t>không đại diện toàn thành phố</a:t>
-            </a:r>
-          </a:p>
-          <a:p>
-            <a:pPr>
-              <a:spcAft>
-                <a:spcPts val="500"/>
-              </a:spcAft>
-            </a:pPr>
-            <a:r>
-              <a:rPr sz="1300" b="0">
-                <a:solidFill>
-                  <a:srgbClr val="1A1D21"/>
-                </a:solidFill>
-                <a:latin typeface="Calibri"/>
-              </a:rPr>
-              <a:t>Ngày lễ: MAE gấp 4,3 lần</a:t>
-            </a:r>
-          </a:p>
-          <a:p>
-            <a:pPr>
-              <a:spcAft>
-                <a:spcPts val="500"/>
-              </a:spcAft>
-            </a:pPr>
-            <a:r>
-              <a:rPr sz="1300" b="0">
-                <a:solidFill>
-                  <a:srgbClr val="1A1D21"/>
-                </a:solidFill>
-                <a:latin typeface="Calibri"/>
-              </a:rPr>
-              <a:t>Thời tiết cực đoan: MAE gấp 1,84 lần</a:t>
-            </a:r>
-          </a:p>
-          <a:p>
-            <a:pPr>
-              <a:spcAft>
-                <a:spcPts val="500"/>
-              </a:spcAft>
-            </a:pPr>
-            <a:r>
-              <a:rPr sz="1300" b="0">
-                <a:solidFill>
-                  <a:srgbClr val="1A1D21"/>
-                </a:solidFill>
-                <a:latin typeface="Calibri"/>
-              </a:rPr>
-              <a:t>Test 2018 chỉ tới </a:t>
-            </a:r>
-            <a:r>
-              <a:rPr sz="1300" b="1">
-                <a:solidFill>
-                  <a:srgbClr val="1A1D21"/>
-                </a:solidFill>
-                <a:latin typeface="Calibri"/>
-              </a:rPr>
-              <a:t>30/09</a:t>
-            </a:r>
-            <a:r>
-              <a:rPr sz="1300" b="0">
-                <a:solidFill>
-                  <a:srgbClr val="1A1D21"/>
-                </a:solidFill>
-                <a:latin typeface="Calibri"/>
-              </a:rPr>
-              <a:t> — và đây lại là phần </a:t>
-            </a:r>
-            <a:r>
-              <a:rPr sz="1300" b="1">
-                <a:solidFill>
-                  <a:srgbClr val="1A1D21"/>
-                </a:solidFill>
-                <a:latin typeface="Calibri"/>
-              </a:rPr>
-              <a:t>dễ hơn</a:t>
-            </a:r>
-            <a:r>
-              <a:rPr sz="1300" b="0">
-                <a:solidFill>
-                  <a:srgbClr val="1A1D21"/>
-                </a:solidFill>
-                <a:latin typeface="Calibri"/>
-              </a:rPr>
-              <a:t> của năm: chấm Jan–Sep 2017 cho</a:t>
-            </a:r>
-          </a:p>
-          <a:p>
-            <a:pPr>
-              <a:spcAft>
-                <a:spcPts val="500"/>
-              </a:spcAft>
-            </a:pPr>
-            <a:r>
-              <a:rPr sz="1300" b="0">
-                <a:solidFill>
-                  <a:srgbClr val="1A1D21"/>
-                </a:solidFill>
-                <a:latin typeface="Calibri"/>
-              </a:rPr>
-              <a:t>MAE </a:t>
-            </a:r>
-            <a:r>
-              <a:rPr sz="1300" b="1">
-                <a:solidFill>
-                  <a:srgbClr val="1A1D21"/>
-                </a:solidFill>
-                <a:latin typeface="Calibri"/>
-              </a:rPr>
-              <a:t>250,96</a:t>
-            </a:r>
-            <a:r>
-              <a:rPr sz="1300" b="0">
-                <a:solidFill>
-                  <a:srgbClr val="1A1D21"/>
-                </a:solidFill>
-                <a:latin typeface="Calibri"/>
-              </a:rPr>
-              <a:t> so với </a:t>
-            </a:r>
-            <a:r>
-              <a:rPr sz="1300" b="1">
-                <a:solidFill>
-                  <a:srgbClr val="1A1D21"/>
-                </a:solidFill>
-                <a:latin typeface="Calibri"/>
-              </a:rPr>
-              <a:t>272,12</a:t>
-            </a:r>
-            <a:r>
-              <a:rPr sz="1300" b="0">
-                <a:solidFill>
-                  <a:srgbClr val="1A1D21"/>
-                </a:solidFill>
-                <a:latin typeface="Calibri"/>
-              </a:rPr>
-              <a:t> cả năm (chênh </a:t>
-            </a:r>
-            <a:r>
-              <a:rPr sz="1300" b="1">
-                <a:solidFill>
-                  <a:srgbClr val="1A1D21"/>
-                </a:solidFill>
-                <a:latin typeface="Calibri"/>
-              </a:rPr>
-              <a:t>−21,16</a:t>
-            </a:r>
-            <a:r>
-              <a:rPr sz="1300" b="0">
-                <a:solidFill>
-                  <a:srgbClr val="1A1D21"/>
-                </a:solidFill>
-                <a:latin typeface="Calibri"/>
-              </a:rPr>
-              <a:t>). Tháng 11–12 là hai tháng tệ nhất.</a:t>
-            </a:r>
-          </a:p>
-          <a:p>
-            <a:pPr>
-              <a:spcAft>
-                <a:spcPts val="500"/>
-              </a:spcAft>
-            </a:pPr>
-            <a:r>
-              <a:rPr sz="1300" b="0">
-                <a:solidFill>
-                  <a:srgbClr val="1A1D21"/>
-                </a:solidFill>
-                <a:latin typeface="Calibri"/>
-              </a:rPr>
-              <a:t>Ngày lễ chỉ </a:t>
-            </a:r>
-            <a:r>
-              <a:rPr sz="1300" b="1">
-                <a:solidFill>
-                  <a:srgbClr val="1A1D21"/>
-                </a:solidFill>
-                <a:latin typeface="Calibri"/>
-              </a:rPr>
-              <a:t>7 ngày lịch</a:t>
-            </a:r>
-            <a:r>
-              <a:rPr sz="1300" b="0">
-                <a:solidFill>
-                  <a:srgbClr val="1A1D21"/>
-                </a:solidFill>
-                <a:latin typeface="Calibri"/>
-              </a:rPr>
-              <a:t> (167 giờ), MAE từng ngày lệch nhau gần 3 lần (518 → 1.509)</a:t>
-            </a:r>
-          </a:p>
-          <a:p>
-            <a:pPr>
-              <a:spcAft>
-                <a:spcPts val="500"/>
-              </a:spcAft>
-            </a:pPr>
-            <a:r>
-              <a:rPr sz="1300" b="0">
-                <a:solidFill>
-                  <a:srgbClr val="1A1D21"/>
-                </a:solidFill>
-                <a:latin typeface="Calibri"/>
-              </a:rPr>
-              <a:t>Dữ liệu lịch sử </a:t>
-            </a:r>
-            <a:r>
-              <a:rPr sz="1300" b="1">
-                <a:solidFill>
-                  <a:srgbClr val="1A1D21"/>
-                </a:solidFill>
-                <a:latin typeface="Calibri"/>
-              </a:rPr>
-              <a:t>2012–2018</a:t>
-            </a:r>
-          </a:p>
-          <a:p>
-            <a:pPr>
-              <a:spcAft>
-                <a:spcPts val="500"/>
-              </a:spcAft>
-            </a:pPr>
-            <a:r>
-              <a:rPr sz="1300" b="0">
-                <a:solidFill>
-                  <a:srgbClr val="1A1D21"/>
-                </a:solidFill>
-                <a:latin typeface="Calibri"/>
-              </a:rPr>
-              <a:t>Lịch State Fair chỉ có </a:t>
-            </a:r>
-            <a:r>
-              <a:rPr sz="1300" b="1">
-                <a:solidFill>
-                  <a:srgbClr val="1A1D21"/>
-                </a:solidFill>
-                <a:latin typeface="Calibri"/>
-              </a:rPr>
-              <a:t>2012–2020</a:t>
-            </a:r>
-            <a:r>
-              <a:rPr sz="1300" b="0">
-                <a:solidFill>
-                  <a:srgbClr val="1A1D21"/>
-                </a:solidFill>
-                <a:latin typeface="Calibri"/>
-              </a:rPr>
-              <a:t>; ngoài phạm vi hệ thống </a:t>
-            </a:r>
-            <a:r>
-              <a:rPr sz="1300" b="1">
-                <a:solidFill>
-                  <a:srgbClr val="1A1D21"/>
-                </a:solidFill>
-                <a:latin typeface="Calibri"/>
-              </a:rPr>
-              <a:t>báo rõ, không tự đoán</a:t>
-            </a:r>
-          </a:p>
-          <a:p>
-            <a:pPr>
-              <a:spcAft>
-                <a:spcPts val="500"/>
-              </a:spcAft>
-            </a:pPr>
-            <a:r>
-              <a:rPr sz="1300" b="1">
-                <a:solidFill>
-                  <a:srgbClr val="1A1D21"/>
-                </a:solidFill>
-                <a:latin typeface="Calibri"/>
-              </a:rPr>
-              <a:t>Không dùng cho mục đích safety-critical</a:t>
-            </a:r>
-          </a:p>
-          <a:p>
-            <a:pPr>
-              <a:spcAft>
-                <a:spcPts val="500"/>
-              </a:spcAft>
-            </a:pPr>
-            <a:r>
-              <a:rPr sz="1300" b="0">
-                <a:solidFill>
-                  <a:srgbClr val="1A1D21"/>
-                </a:solidFill>
-                <a:latin typeface="Calibri"/>
-              </a:rPr>
-              <a:t>Dự báo thô âm ở 34/6.533 dòng → API chặn về 0 theo policy </a:t>
-            </a:r>
-            <a:r>
-              <a:rPr sz="1200" b="0">
-                <a:solidFill>
-                  <a:srgbClr val="33373C"/>
-                </a:solidFill>
-                <a:latin typeface="Consolas"/>
-              </a:rPr>
-              <a:t>max(0, ·)</a:t>
-            </a:r>
-          </a:p>
-          <a:p>
-            <a:pPr>
-              <a:spcAft>
-                <a:spcPts val="500"/>
-              </a:spcAft>
-            </a:pPr>
-            <a:r>
-              <a:rPr sz="1300" b="0">
-                <a:solidFill>
-                  <a:srgbClr val="1A1D21"/>
-                </a:solidFill>
-                <a:latin typeface="Calibri"/>
-              </a:rPr>
-              <a:t>Mô hình ≈ OLS: </a:t>
-            </a:r>
-            <a:r>
-              <a:rPr sz="1200" b="0">
-                <a:solidFill>
-                  <a:srgbClr val="33373C"/>
-                </a:solidFill>
-                <a:latin typeface="Consolas"/>
-              </a:rPr>
-              <a:t>alpha ∈ [0; 0,01]</a:t>
-            </a:r>
-            <a:r>
-              <a:rPr sz="1300" b="0">
-                <a:solidFill>
-                  <a:srgbClr val="1A1D21"/>
-                </a:solidFill>
-                <a:latin typeface="Calibri"/>
-              </a:rPr>
-              <a:t> chỉ chênh 0,09 MAE trên validation</a:t>
-            </a:r>
-          </a:p>
-          <a:p>
-            <a:pPr>
-              <a:spcAft>
-                <a:spcPts val="500"/>
-              </a:spcAft>
-            </a:pPr>
-            <a:r>
-              <a:rPr sz="1300" b="0">
-                <a:solidFill>
-                  <a:srgbClr val="1A1D21"/>
-                </a:solidFill>
-                <a:latin typeface="Calibri"/>
-              </a:rPr>
-              <a:t>Ridge </a:t>
-            </a:r>
-            <a:r>
-              <a:rPr sz="1300" b="1">
-                <a:solidFill>
-                  <a:srgbClr val="1A1D21"/>
-                </a:solidFill>
-                <a:latin typeface="Calibri"/>
-              </a:rPr>
-              <a:t>thua</a:t>
-            </a:r>
-            <a:r>
-              <a:rPr sz="1300" b="0">
-                <a:solidFill>
-                  <a:srgbClr val="1A1D21"/>
-                </a:solidFill>
-                <a:latin typeface="Calibri"/>
-              </a:rPr>
-              <a:t> baseline ở 3/4 cửa sổ dev 2012–2017</a:t>
+              <a:t>Mô hình nhỉnh hơn baseline trên 2018</a:t>
+            </a:r>
+            <a:r>
+              <a:rPr sz="1300" b="0">
+                <a:solidFill>
+                  <a:srgbClr val="1A1D21"/>
+                </a:solidFill>
+                <a:latin typeface="Calibri"/>
+              </a:rPr>
+              <a:t> — có điều kiện: MAE 259,73 so với 272,90,</a:t>
+            </a:r>
+          </a:p>
+          <a:p>
+            <a:pPr>
+              <a:spcAft>
+                <a:spcPts val="500"/>
+              </a:spcAft>
+            </a:pPr>
+            <a:r>
+              <a:rPr sz="1300" b="0">
+                <a:solidFill>
+                  <a:srgbClr val="1A1D21"/>
+                </a:solidFill>
+                <a:latin typeface="Calibri"/>
+              </a:rPr>
+              <a:t>CI 95 % của hiệu MAE [+3,80; +22,00], thắng 8/9 tháng; </a:t>
+            </a:r>
+            <a:r>
+              <a:rPr sz="1300" b="1">
+                <a:solidFill>
+                  <a:srgbClr val="1A1D21"/>
+                </a:solidFill>
+                <a:latin typeface="Calibri"/>
+              </a:rPr>
+              <a:t>nhưng</a:t>
+            </a:r>
+            <a:r>
+              <a:rPr sz="1300" b="0">
+                <a:solidFill>
+                  <a:srgbClr val="1A1D21"/>
+                </a:solidFill>
+                <a:latin typeface="Calibri"/>
+              </a:rPr>
+              <a:t> ở 3/4 cửa sổ</a:t>
+            </a:r>
+          </a:p>
+          <a:p>
+            <a:pPr>
+              <a:spcAft>
+                <a:spcPts val="500"/>
+              </a:spcAft>
+            </a:pPr>
+            <a:r>
+              <a:rPr sz="1300" b="0">
+                <a:solidFill>
+                  <a:srgbClr val="1A1D21"/>
+                </a:solidFill>
+                <a:latin typeface="Calibri"/>
+              </a:rPr>
+              <a:t>dev 2012–2017 thì ngược lại</a:t>
+            </a:r>
+          </a:p>
+          <a:p>
+            <a:pPr>
+              <a:spcAft>
+                <a:spcPts val="500"/>
+              </a:spcAft>
+            </a:pPr>
+            <a:r>
+              <a:rPr sz="1300" b="1">
+                <a:solidFill>
+                  <a:srgbClr val="1A1D21"/>
+                </a:solidFill>
+                <a:latin typeface="Calibri"/>
+              </a:rPr>
+              <a:t>Cách đánh giá cũng làm lệch kết luận</a:t>
+            </a:r>
+            <a:r>
+              <a:rPr sz="1300" b="0">
+                <a:solidFill>
+                  <a:srgbClr val="1A1D21"/>
+                </a:solidFill>
+                <a:latin typeface="Calibri"/>
+              </a:rPr>
+              <a:t>: random split lạc quan </a:t>
+            </a:r>
+            <a:r>
+              <a:rPr sz="1300" b="1">
+                <a:solidFill>
+                  <a:srgbClr val="1A1D21"/>
+                </a:solidFill>
+                <a:latin typeface="Calibri"/>
+              </a:rPr>
+              <a:t>5,43 ± 0,81 MAE</a:t>
+            </a:r>
+            <a:r>
+              <a:rPr sz="1300" b="0">
+                <a:solidFill>
+                  <a:srgbClr val="1A1D21"/>
+                </a:solidFill>
+                <a:latin typeface="Calibri"/>
+              </a:rPr>
+              <a:t> trên cùng</a:t>
+            </a:r>
+          </a:p>
+          <a:p>
+            <a:pPr>
+              <a:spcAft>
+                <a:spcPts val="500"/>
+              </a:spcAft>
+            </a:pPr>
+            <a:r>
+              <a:rPr sz="1300" b="0">
+                <a:solidFill>
+                  <a:srgbClr val="1A1D21"/>
+                </a:solidFill>
+                <a:latin typeface="Calibri"/>
+              </a:rPr>
+              <a:t>tập dòng đánh giá (§Slide 7); khoảng cách thời gian thêm </a:t>
+            </a:r>
+            <a:r>
+              <a:rPr sz="1300" b="1">
+                <a:solidFill>
+                  <a:srgbClr val="1A1D21"/>
+                </a:solidFill>
+                <a:latin typeface="Calibri"/>
+              </a:rPr>
+              <a:t>4,15 MAE</a:t>
+            </a:r>
+          </a:p>
+          <a:p>
+            <a:pPr>
+              <a:spcAft>
+                <a:spcPts val="500"/>
+              </a:spcAft>
+            </a:pPr>
+            <a:r>
+              <a:rPr sz="1300" b="1">
+                <a:solidFill>
+                  <a:srgbClr val="1A1D21"/>
+                </a:solidFill>
+                <a:latin typeface="Calibri"/>
+              </a:rPr>
+              <a:t>Biết mô hình hỏng ở đâu</a:t>
+            </a:r>
+            <a:r>
+              <a:rPr sz="1300" b="0">
+                <a:solidFill>
+                  <a:srgbClr val="1A1D21"/>
+                </a:solidFill>
+                <a:latin typeface="Calibri"/>
+              </a:rPr>
+              <a:t> cũng là kết quả: ngày lễ, tuyết, sương mù, giờ đêm</a:t>
+            </a:r>
+          </a:p>
+          <a:p>
+            <a:pPr>
+              <a:spcAft>
+                <a:spcPts val="500"/>
+              </a:spcAft>
+            </a:pPr>
+            <a:r>
+              <a:rPr sz="1300" b="1">
+                <a:solidFill>
+                  <a:srgbClr val="1A1D21"/>
+                </a:solidFill>
+                <a:latin typeface="Calibri"/>
+              </a:rPr>
+              <a:t>Nói trung thực, kể cả khi bất tiện</a:t>
+            </a:r>
+            <a:r>
+              <a:rPr sz="1300" b="0">
+                <a:solidFill>
+                  <a:srgbClr val="1A1D21"/>
+                </a:solidFill>
+                <a:latin typeface="Calibri"/>
+              </a:rPr>
+              <a:t>: không gán cơ chế cho một con số khi chưa tách được</a:t>
+            </a:r>
+          </a:p>
+          <a:p>
+            <a:pPr>
+              <a:spcAft>
+                <a:spcPts val="500"/>
+              </a:spcAft>
+            </a:pPr>
+            <a:r>
+              <a:rPr sz="1300" b="0">
+                <a:solidFill>
+                  <a:srgbClr val="1A1D21"/>
+                </a:solidFill>
+                <a:latin typeface="Calibri"/>
+              </a:rPr>
+              <a:t>các yếu tố — bản đầu của báo cáo đã từng kết luận sai, và nhóm đã sửa</a:t>
+            </a:r>
+          </a:p>
+          <a:p>
+            <a:pPr>
+              <a:spcAft>
+                <a:spcPts val="500"/>
+              </a:spcAft>
+            </a:pPr>
+            <a:r>
+              <a:rPr sz="1300" b="1">
+                <a:solidFill>
+                  <a:srgbClr val="1A1D21"/>
+                </a:solidFill>
+                <a:latin typeface="Calibri"/>
+              </a:rPr>
+              <a:t>Minh bạch</a:t>
+            </a:r>
+            <a:r>
+              <a:rPr sz="1300" b="0">
+                <a:solidFill>
+                  <a:srgbClr val="1A1D21"/>
+                </a:solidFill>
+                <a:latin typeface="Calibri"/>
+              </a:rPr>
+              <a:t>: 392 test pass, 0 fail; web/API chạy thật, chỉ nạp artifact</a:t>
             </a:r>
           </a:p>
           <a:p>
@@ -4302,7 +4112,7 @@
 </p:sld>
 </file>
 
-<file path=ppt/slides/slide12.xml><?xml version="1.0" encoding="utf-8"?>
+<file path=ppt/slides/slide2.xml><?xml version="1.0" encoding="utf-8"?>
 <p:sld xmlns:a="http://schemas.openxmlformats.org/drawingml/2006/main" xmlns:p="http://schemas.openxmlformats.org/presentationml/2006/main" xmlns:r="http://schemas.openxmlformats.org/officeDocument/2006/relationships">
   <p:cSld>
     <p:spTree>
@@ -4389,7 +4199,7 @@
                 </a:solidFill>
                 <a:latin typeface="Calibri"/>
               </a:rPr>
-              <a:t>11. Kết luận</a:t>
+              <a:t>1. Bài toán &amp; dữ liệu</a:t>
             </a:r>
           </a:p>
         </p:txBody>
@@ -4438,231 +4248,298 @@
               </a:spcAft>
             </a:pPr>
             <a:r>
-              <a:rPr sz="1300" b="1">
-                <a:solidFill>
-                  <a:srgbClr val="1A1D21"/>
-                </a:solidFill>
-                <a:latin typeface="Calibri"/>
-              </a:rPr>
-              <a:t>Mô hình nhỉnh hơn baseline trên 2018</a:t>
-            </a:r>
-            <a:r>
-              <a:rPr sz="1300" b="0">
-                <a:solidFill>
-                  <a:srgbClr val="1A1D21"/>
-                </a:solidFill>
-                <a:latin typeface="Calibri"/>
-              </a:rPr>
-              <a:t> — có điều kiện: MAE 259,73 so với 272,90,</a:t>
-            </a:r>
-          </a:p>
-          <a:p>
-            <a:pPr>
-              <a:spcAft>
-                <a:spcPts val="500"/>
-              </a:spcAft>
-            </a:pPr>
-            <a:r>
-              <a:rPr sz="1300" b="0">
-                <a:solidFill>
-                  <a:srgbClr val="1A1D21"/>
-                </a:solidFill>
-                <a:latin typeface="Calibri"/>
-              </a:rPr>
-              <a:t>CI 95 % của hiệu MAE [+3,80; +22,00], thắng 8/9 tháng; </a:t>
-            </a:r>
-            <a:r>
-              <a:rPr sz="1300" b="1">
-                <a:solidFill>
-                  <a:srgbClr val="1A1D21"/>
-                </a:solidFill>
-                <a:latin typeface="Calibri"/>
-              </a:rPr>
-              <a:t>nhưng</a:t>
-            </a:r>
-            <a:r>
-              <a:rPr sz="1300" b="0">
-                <a:solidFill>
-                  <a:srgbClr val="1A1D21"/>
-                </a:solidFill>
-                <a:latin typeface="Calibri"/>
-              </a:rPr>
-              <a:t> ở 3/4 cửa sổ</a:t>
-            </a:r>
-          </a:p>
-          <a:p>
-            <a:pPr>
-              <a:spcAft>
-                <a:spcPts val="500"/>
-              </a:spcAft>
-            </a:pPr>
-            <a:r>
-              <a:rPr sz="1300" b="0">
-                <a:solidFill>
-                  <a:srgbClr val="1A1D21"/>
-                </a:solidFill>
-                <a:latin typeface="Calibri"/>
-              </a:rPr>
-              <a:t>dev 2012–2017 thì ngược lại</a:t>
-            </a:r>
-          </a:p>
-          <a:p>
-            <a:pPr>
-              <a:spcAft>
-                <a:spcPts val="500"/>
-              </a:spcAft>
-            </a:pPr>
-            <a:r>
-              <a:rPr sz="1300" b="1">
-                <a:solidFill>
-                  <a:srgbClr val="1A1D21"/>
-                </a:solidFill>
-                <a:latin typeface="Calibri"/>
-              </a:rPr>
-              <a:t>Cách đánh giá cũng làm lệch kết luận</a:t>
-            </a:r>
-            <a:r>
-              <a:rPr sz="1300" b="0">
-                <a:solidFill>
-                  <a:srgbClr val="1A1D21"/>
-                </a:solidFill>
-                <a:latin typeface="Calibri"/>
-              </a:rPr>
-              <a:t>: random split lạc quan </a:t>
-            </a:r>
-            <a:r>
-              <a:rPr sz="1300" b="1">
-                <a:solidFill>
-                  <a:srgbClr val="1A1D21"/>
-                </a:solidFill>
-                <a:latin typeface="Calibri"/>
-              </a:rPr>
-              <a:t>5,43 ± 0,81 MAE</a:t>
-            </a:r>
-            <a:r>
-              <a:rPr sz="1300" b="0">
-                <a:solidFill>
-                  <a:srgbClr val="1A1D21"/>
-                </a:solidFill>
-                <a:latin typeface="Calibri"/>
-              </a:rPr>
-              <a:t> trên cùng</a:t>
-            </a:r>
-          </a:p>
-          <a:p>
-            <a:pPr>
-              <a:spcAft>
-                <a:spcPts val="500"/>
-              </a:spcAft>
-            </a:pPr>
-            <a:r>
-              <a:rPr sz="1300" b="0">
-                <a:solidFill>
-                  <a:srgbClr val="1A1D21"/>
-                </a:solidFill>
-                <a:latin typeface="Calibri"/>
-              </a:rPr>
-              <a:t>tập dòng đánh giá (§Slide 7); khoảng cách thời gian thêm </a:t>
-            </a:r>
-            <a:r>
-              <a:rPr sz="1300" b="1">
-                <a:solidFill>
-                  <a:srgbClr val="1A1D21"/>
-                </a:solidFill>
-                <a:latin typeface="Calibri"/>
-              </a:rPr>
-              <a:t>4,15 MAE</a:t>
-            </a:r>
-          </a:p>
-          <a:p>
-            <a:pPr>
-              <a:spcAft>
-                <a:spcPts val="500"/>
-              </a:spcAft>
-            </a:pPr>
-            <a:r>
-              <a:rPr sz="1300" b="1">
-                <a:solidFill>
-                  <a:srgbClr val="1A1D21"/>
-                </a:solidFill>
-                <a:latin typeface="Calibri"/>
-              </a:rPr>
-              <a:t>Biết mô hình hỏng ở đâu</a:t>
-            </a:r>
-            <a:r>
-              <a:rPr sz="1300" b="0">
-                <a:solidFill>
-                  <a:srgbClr val="1A1D21"/>
-                </a:solidFill>
-                <a:latin typeface="Calibri"/>
-              </a:rPr>
-              <a:t> cũng là kết quả: ngày lễ, tuyết, sương mù, giờ đêm</a:t>
-            </a:r>
-          </a:p>
-          <a:p>
-            <a:pPr>
-              <a:spcAft>
-                <a:spcPts val="500"/>
-              </a:spcAft>
-            </a:pPr>
-            <a:r>
-              <a:rPr sz="1300" b="1">
-                <a:solidFill>
-                  <a:srgbClr val="1A1D21"/>
-                </a:solidFill>
-                <a:latin typeface="Calibri"/>
-              </a:rPr>
-              <a:t>Nói trung thực, kể cả khi bất tiện</a:t>
-            </a:r>
-            <a:r>
-              <a:rPr sz="1300" b="0">
-                <a:solidFill>
-                  <a:srgbClr val="1A1D21"/>
-                </a:solidFill>
-                <a:latin typeface="Calibri"/>
-              </a:rPr>
-              <a:t>: không gán cơ chế cho một con số khi chưa tách được</a:t>
-            </a:r>
-          </a:p>
-          <a:p>
-            <a:pPr>
-              <a:spcAft>
-                <a:spcPts val="500"/>
-              </a:spcAft>
-            </a:pPr>
-            <a:r>
-              <a:rPr sz="1300" b="0">
-                <a:solidFill>
-                  <a:srgbClr val="1A1D21"/>
-                </a:solidFill>
-                <a:latin typeface="Calibri"/>
-              </a:rPr>
-              <a:t>các yếu tố — bản đầu của báo cáo đã từng kết luận sai, và nhóm đã sửa</a:t>
-            </a:r>
-          </a:p>
-          <a:p>
-            <a:pPr>
-              <a:spcAft>
-                <a:spcPts val="500"/>
-              </a:spcAft>
-            </a:pPr>
-            <a:r>
-              <a:rPr sz="1300" b="1">
-                <a:solidFill>
-                  <a:srgbClr val="1A1D21"/>
-                </a:solidFill>
-                <a:latin typeface="Calibri"/>
-              </a:rPr>
-              <a:t>Minh bạch</a:t>
-            </a:r>
-            <a:r>
-              <a:rPr sz="1300" b="0">
-                <a:solidFill>
-                  <a:srgbClr val="1A1D21"/>
-                </a:solidFill>
-                <a:latin typeface="Calibri"/>
-              </a:rPr>
-              <a:t>: 385 test pass, 0 fail; web/API chạy thật, chỉ nạp artifact</a:t>
+              <a:rPr sz="1300" b="0">
+                <a:solidFill>
+                  <a:srgbClr val="1A1D21"/>
+                </a:solidFill>
+                <a:latin typeface="Calibri"/>
+              </a:rPr>
+              <a:t>• Đơn vị quan sát: </a:t>
+            </a:r>
+            <a:r>
+              <a:rPr sz="1300" b="1">
+                <a:solidFill>
+                  <a:srgbClr val="1A1D21"/>
+                </a:solidFill>
+                <a:latin typeface="Calibri"/>
+              </a:rPr>
+              <a:t>1 giờ tại một trạm đo</a:t>
+            </a:r>
+            <a:r>
+              <a:rPr sz="1300" b="0">
+                <a:solidFill>
+                  <a:srgbClr val="1A1D21"/>
+                </a:solidFill>
+                <a:latin typeface="Calibri"/>
+              </a:rPr>
+              <a:t>; biến mục tiêu </a:t>
+            </a:r>
+            <a:r>
+              <a:rPr sz="1200" b="0">
+                <a:solidFill>
+                  <a:srgbClr val="33373C"/>
+                </a:solidFill>
+                <a:latin typeface="Consolas"/>
+              </a:rPr>
+              <a:t>traffic_volume</a:t>
+            </a:r>
+            <a:r>
+              <a:rPr sz="1300" b="0">
+                <a:solidFill>
+                  <a:srgbClr val="1A1D21"/>
+                </a:solidFill>
+                <a:latin typeface="Calibri"/>
+              </a:rPr>
+              <a:t> — </a:t>
+            </a:r>
+            <a:r>
+              <a:rPr sz="1300" b="1">
+                <a:solidFill>
+                  <a:srgbClr val="1A1D21"/>
+                </a:solidFill>
+                <a:latin typeface="Calibri"/>
+              </a:rPr>
+              <a:t>lưu lượng, xe/giờ</a:t>
+            </a:r>
+          </a:p>
+          <a:p>
+            <a:pPr>
+              <a:spcAft>
+                <a:spcPts val="500"/>
+              </a:spcAft>
+            </a:pPr>
+            <a:r>
+              <a:rPr sz="1300" b="0">
+                <a:solidFill>
+                  <a:srgbClr val="1A1D21"/>
+                </a:solidFill>
+                <a:latin typeface="Calibri"/>
+              </a:rPr>
+              <a:t>• Khoảng thời gian: </a:t>
+            </a:r>
+            <a:r>
+              <a:rPr sz="1300" b="1">
+                <a:solidFill>
+                  <a:srgbClr val="1A1D21"/>
+                </a:solidFill>
+                <a:latin typeface="Calibri"/>
+              </a:rPr>
+              <a:t>2012 – 2018</a:t>
+            </a:r>
+            <a:r>
+              <a:rPr sz="1300" b="0">
+                <a:solidFill>
+                  <a:srgbClr val="1A1D21"/>
+                </a:solidFill>
+                <a:latin typeface="Calibri"/>
+              </a:rPr>
+              <a:t> (dữ liệu kết thúc 30/09/2018)</a:t>
+            </a:r>
+          </a:p>
+          <a:p>
+            <a:pPr>
+              <a:spcAft>
+                <a:spcPts val="500"/>
+              </a:spcAft>
+            </a:pPr>
+            <a:r>
+              <a:rPr sz="1300" b="0">
+                <a:solidFill>
+                  <a:srgbClr val="1A1D21"/>
+                </a:solidFill>
+                <a:latin typeface="Calibri"/>
+              </a:rPr>
+              <a:t>• Số dòng thô </a:t>
+            </a:r>
+            <a:r>
+              <a:rPr sz="1300" b="1">
+                <a:solidFill>
+                  <a:srgbClr val="1A1D21"/>
+                </a:solidFill>
+                <a:latin typeface="Calibri"/>
+              </a:rPr>
+              <a:t>48.204</a:t>
+            </a:r>
+            <a:r>
+              <a:rPr sz="1300" b="0">
+                <a:solidFill>
+                  <a:srgbClr val="1A1D21"/>
+                </a:solidFill>
+                <a:latin typeface="Calibri"/>
+              </a:rPr>
+              <a:t> → số dòng dùng để mô hình hoá </a:t>
+            </a:r>
+            <a:r>
+              <a:rPr sz="1300" b="1">
+                <a:solidFill>
+                  <a:srgbClr val="1A1D21"/>
+                </a:solidFill>
+                <a:latin typeface="Calibri"/>
+              </a:rPr>
+              <a:t>40.575</a:t>
+            </a:r>
+            <a:r>
+              <a:rPr sz="1300" b="0">
+                <a:solidFill>
+                  <a:srgbClr val="1A1D21"/>
+                </a:solidFill>
+                <a:latin typeface="Calibri"/>
+              </a:rPr>
+              <a:t> (collapse 5.445 nhóm trùng timestamp)</a:t>
+            </a:r>
+          </a:p>
+          <a:p>
+            <a:pPr>
+              <a:spcAft>
+                <a:spcPts val="500"/>
+              </a:spcAft>
+            </a:pPr>
+            <a:r>
+              <a:rPr sz="1300" b="0">
+                <a:solidFill>
+                  <a:srgbClr val="1A1D21"/>
+                </a:solidFill>
+                <a:latin typeface="Calibri"/>
+              </a:rPr>
+              <a:t>• Ba bẫy đã xử lý:</a:t>
+            </a:r>
+          </a:p>
+          <a:p>
+            <a:pPr>
+              <a:spcAft>
+                <a:spcPts val="500"/>
+              </a:spcAft>
+            </a:pPr>
+            <a:r>
+              <a:rPr sz="1200" b="0">
+                <a:solidFill>
+                  <a:srgbClr val="33373C"/>
+                </a:solidFill>
+                <a:latin typeface="Consolas"/>
+              </a:rPr>
+              <a:t>holiday == "None"</a:t>
+            </a:r>
+            <a:r>
+              <a:rPr sz="1300" b="0">
+                <a:solidFill>
+                  <a:srgbClr val="1A1D21"/>
+                </a:solidFill>
+                <a:latin typeface="Calibri"/>
+              </a:rPr>
+              <a:t> là </a:t>
+            </a:r>
+            <a:r>
+              <a:rPr sz="1300" b="1">
+                <a:solidFill>
+                  <a:srgbClr val="1A1D21"/>
+                </a:solidFill>
+                <a:latin typeface="Calibri"/>
+              </a:rPr>
+              <a:t>không phải</a:t>
+            </a:r>
+            <a:r>
+              <a:rPr sz="1300" b="0">
+                <a:solidFill>
+                  <a:srgbClr val="1A1D21"/>
+                </a:solidFill>
+                <a:latin typeface="Calibri"/>
+              </a:rPr>
+              <a:t> ngày lễ (dùng </a:t>
+            </a:r>
+            <a:r>
+              <a:rPr sz="1200" b="0">
+                <a:solidFill>
+                  <a:srgbClr val="33373C"/>
+                </a:solidFill>
+                <a:latin typeface="Consolas"/>
+              </a:rPr>
+              <a:t>keep_default_na=False</a:t>
+            </a:r>
+            <a:r>
+              <a:rPr sz="1300" b="0">
+                <a:solidFill>
+                  <a:srgbClr val="1A1D21"/>
+                </a:solidFill>
+                <a:latin typeface="Calibri"/>
+              </a:rPr>
+              <a:t>)</a:t>
+            </a:r>
+          </a:p>
+          <a:p>
+            <a:pPr>
+              <a:spcAft>
+                <a:spcPts val="500"/>
+              </a:spcAft>
+            </a:pPr>
+            <a:r>
+              <a:rPr sz="1200" b="0">
+                <a:solidFill>
+                  <a:srgbClr val="33373C"/>
+                </a:solidFill>
+                <a:latin typeface="Consolas"/>
+              </a:rPr>
+              <a:t>temp ≤ 0 K</a:t>
+            </a:r>
+            <a:r>
+              <a:rPr sz="1300" b="0">
+                <a:solidFill>
+                  <a:srgbClr val="1A1D21"/>
+                </a:solidFill>
+                <a:latin typeface="Calibri"/>
+              </a:rPr>
+              <a:t> (10 dòng) → NaN theo </a:t>
+            </a:r>
+            <a:r>
+              <a:rPr sz="1300" b="1">
+                <a:solidFill>
+                  <a:srgbClr val="1A1D21"/>
+                </a:solidFill>
+                <a:latin typeface="Calibri"/>
+              </a:rPr>
+              <a:t>quy tắc vật lý</a:t>
+            </a:r>
+          </a:p>
+          <a:p>
+            <a:pPr>
+              <a:spcAft>
+                <a:spcPts val="500"/>
+              </a:spcAft>
+            </a:pPr>
+            <a:r>
+              <a:rPr sz="1200" b="0">
+                <a:solidFill>
+                  <a:srgbClr val="33373C"/>
+                </a:solidFill>
+                <a:latin typeface="Consolas"/>
+              </a:rPr>
+              <a:t>rain_1h = 9831,3</a:t>
+            </a:r>
+            <a:r>
+              <a:rPr sz="1300" b="0">
+                <a:solidFill>
+                  <a:srgbClr val="1A1D21"/>
+                </a:solidFill>
+                <a:latin typeface="Calibri"/>
+              </a:rPr>
+              <a:t> (1 dòng) → NaN theo </a:t>
+            </a:r>
+            <a:r>
+              <a:rPr sz="1300" b="1">
+                <a:solidFill>
+                  <a:srgbClr val="1A1D21"/>
+                </a:solidFill>
+                <a:latin typeface="Calibri"/>
+              </a:rPr>
+              <a:t>khớp sentinel</a:t>
+            </a:r>
+            <a:r>
+              <a:rPr sz="1300" b="0">
+                <a:solidFill>
+                  <a:srgbClr val="1A1D21"/>
+                </a:solidFill>
+                <a:latin typeface="Calibri"/>
+              </a:rPr>
+              <a:t>, không dùng ngưỡng</a:t>
             </a:r>
           </a:p>
           <a:p>
@@ -4679,6 +4556,69 @@
                 <a:latin typeface="Calibri"/>
               </a:rPr>
               <a:t>---</a:t>
+            </a:r>
+          </a:p>
+        </p:txBody>
+      </p:sp>
+      <p:pic>
+        <p:nvPicPr>
+          <p:cNvPr id="5" name="Picture 4" descr="eda_target_distribution.png"/>
+          <p:cNvPicPr>
+            <a:picLocks noChangeAspect="1"/>
+          </p:cNvPicPr>
+          <p:nvPr/>
+        </p:nvPicPr>
+        <p:blipFill>
+          <a:blip r:embed="rId2"/>
+          <a:stretch>
+            <a:fillRect/>
+          </a:stretch>
+        </p:blipFill>
+        <p:spPr>
+          <a:xfrm>
+            <a:off x="7132320" y="1325880"/>
+            <a:ext cx="4572000" cy="2612571"/>
+          </a:xfrm>
+          <a:prstGeom prst="rect">
+            <a:avLst/>
+          </a:prstGeom>
+        </p:spPr>
+      </p:pic>
+      <p:sp>
+        <p:nvSpPr>
+          <p:cNvPr id="6" name="TextBox 5"/>
+          <p:cNvSpPr txBox="1"/>
+          <p:nvPr/>
+        </p:nvSpPr>
+        <p:spPr>
+          <a:xfrm>
+            <a:off x="7132320" y="4983480"/>
+            <a:ext cx="4572000" cy="457200"/>
+          </a:xfrm>
+          <a:prstGeom prst="rect">
+            <a:avLst/>
+          </a:prstGeom>
+          <a:noFill/>
+        </p:spPr>
+        <p:txBody>
+          <a:bodyPr wrap="square">
+            <a:spAutoFit/>
+          </a:bodyPr>
+          <a:lstStyle/>
+          <a:p>
+            <a:pPr>
+              <a:spcAft>
+                <a:spcPts val="0"/>
+              </a:spcAft>
+            </a:pPr>
+            <a:r>
+              <a:rPr sz="900" b="0">
+                <a:solidFill>
+                  <a:srgbClr val="767D87"/>
+                </a:solidFill>
+                <a:latin typeface="Calibri"/>
+              </a:rPr>
+              <a:t>eda_target_distribution.png</a:t>
             </a:r>
           </a:p>
         </p:txBody>
@@ -4691,7 +4631,7 @@
 </p:sld>
 </file>
 
-<file path=ppt/slides/slide2.xml><?xml version="1.0" encoding="utf-8"?>
+<file path=ppt/slides/slide3.xml><?xml version="1.0" encoding="utf-8"?>
 <p:sld xmlns:a="http://schemas.openxmlformats.org/drawingml/2006/main" xmlns:p="http://schemas.openxmlformats.org/presentationml/2006/main" xmlns:r="http://schemas.openxmlformats.org/officeDocument/2006/relationships">
   <p:cSld>
     <p:spTree>
@@ -4778,7 +4718,7 @@
                 </a:solidFill>
                 <a:latin typeface="Calibri"/>
               </a:rPr>
-              <a:t>1. Bìa đề tài</a:t>
+              <a:t>2. Ba quy tắc chống rò rỉ đã chốt TRƯỚC khi động vào dữ liệu</a:t>
             </a:r>
           </a:p>
         </p:txBody>
@@ -4833,55 +4773,163 @@
                 </a:solidFill>
                 <a:latin typeface="Calibri"/>
               </a:rPr>
-              <a:t>• Tên đề tài: *Dự báo lưu lượng giao thông I-94 (chiều westbound) — trạm ATR 301*</a:t>
-            </a:r>
-          </a:p>
-          <a:p>
-            <a:pPr>
-              <a:spcAft>
-                <a:spcPts val="500"/>
-              </a:spcAft>
-            </a:pPr>
-            <a:r>
-              <a:rPr sz="1300" b="0">
-                <a:solidFill>
-                  <a:srgbClr val="1A1D21"/>
-                </a:solidFill>
-                <a:latin typeface="Calibri"/>
-              </a:rPr>
-              <a:t>• Project 20 — Bài 7: Rò rỉ dữ liệu, chia tập đúng và đánh giá trung thực</a:t>
-            </a:r>
-          </a:p>
-          <a:p>
-            <a:pPr>
-              <a:spcAft>
-                <a:spcPts val="500"/>
-              </a:spcAft>
-            </a:pPr>
-            <a:r>
-              <a:rPr sz="1300" b="0">
-                <a:solidFill>
-                  <a:srgbClr val="1A1D21"/>
-                </a:solidFill>
-                <a:latin typeface="Calibri"/>
-              </a:rPr>
-              <a:t>• Nhóm · thành viên · ngày bảo vệ</a:t>
-            </a:r>
-          </a:p>
-          <a:p>
-            <a:pPr>
-              <a:spcAft>
-                <a:spcPts val="500"/>
-              </a:spcAft>
-            </a:pPr>
-            <a:r>
-              <a:rPr sz="1300" b="0">
-                <a:solidFill>
-                  <a:srgbClr val="1A1D21"/>
-                </a:solidFill>
-                <a:latin typeface="Calibri"/>
-              </a:rPr>
-              <a:t>• Dữ liệu: Metro Interstate Traffic Volume (UCI, CC BY 4.0)</a:t>
+              <a:t>Mọi biến đổi trước khi tách tập là </a:t>
+            </a:r>
+            <a:r>
+              <a:rPr sz="1300" b="1">
+                <a:solidFill>
+                  <a:srgbClr val="1A1D21"/>
+                </a:solidFill>
+                <a:latin typeface="Calibri"/>
+              </a:rPr>
+              <a:t>quy tắc tất định</a:t>
+            </a:r>
+            <a:r>
+              <a:rPr sz="1300" b="0">
+                <a:solidFill>
+                  <a:srgbClr val="1A1D21"/>
+                </a:solidFill>
+                <a:latin typeface="Calibri"/>
+              </a:rPr>
+              <a:t> (giờ, thứ, </a:t>
+            </a:r>
+            <a:r>
+              <a:rPr sz="1200" b="0">
+                <a:solidFill>
+                  <a:srgbClr val="33373C"/>
+                </a:solidFill>
+                <a:latin typeface="Consolas"/>
+              </a:rPr>
+              <a:t>is_holiday</a:t>
+            </a:r>
+            <a:r>
+              <a:rPr sz="1300" b="0">
+                <a:solidFill>
+                  <a:srgbClr val="1A1D21"/>
+                </a:solidFill>
+                <a:latin typeface="Calibri"/>
+              </a:rPr>
+              <a:t> từ lịch),</a:t>
+            </a:r>
+          </a:p>
+          <a:p>
+            <a:pPr>
+              <a:spcAft>
+                <a:spcPts val="500"/>
+              </a:spcAft>
+            </a:pPr>
+            <a:r>
+              <a:rPr sz="1300" b="1">
+                <a:solidFill>
+                  <a:srgbClr val="1A1D21"/>
+                </a:solidFill>
+                <a:latin typeface="Calibri"/>
+              </a:rPr>
+              <a:t>không học thống kê</a:t>
+            </a:r>
+          </a:p>
+          <a:p>
+            <a:pPr>
+              <a:spcAft>
+                <a:spcPts val="500"/>
+              </a:spcAft>
+            </a:pPr>
+            <a:r>
+              <a:rPr sz="1300" b="0">
+                <a:solidFill>
+                  <a:srgbClr val="1A1D21"/>
+                </a:solidFill>
+                <a:latin typeface="Calibri"/>
+              </a:rPr>
+              <a:t>Imputer / scaler / encoder nằm trong </a:t>
+            </a:r>
+            <a:r>
+              <a:rPr sz="1200" b="0">
+                <a:solidFill>
+                  <a:srgbClr val="33373C"/>
+                </a:solidFill>
+                <a:latin typeface="Consolas"/>
+              </a:rPr>
+              <a:t>Pipeline</a:t>
+            </a:r>
+            <a:r>
+              <a:rPr sz="1300" b="0">
+                <a:solidFill>
+                  <a:srgbClr val="1A1D21"/>
+                </a:solidFill>
+                <a:latin typeface="Calibri"/>
+              </a:rPr>
+              <a:t>, </a:t>
+            </a:r>
+            <a:r>
+              <a:rPr sz="1300" b="1">
+                <a:solidFill>
+                  <a:srgbClr val="1A1D21"/>
+                </a:solidFill>
+                <a:latin typeface="Calibri"/>
+              </a:rPr>
+              <a:t>fit trên TRAIN duy nhất</a:t>
+            </a:r>
+          </a:p>
+          <a:p>
+            <a:pPr>
+              <a:spcAft>
+                <a:spcPts val="500"/>
+              </a:spcAft>
+            </a:pPr>
+            <a:r>
+              <a:rPr sz="1200" b="0">
+                <a:solidFill>
+                  <a:srgbClr val="33373C"/>
+                </a:solidFill>
+                <a:latin typeface="Consolas"/>
+              </a:rPr>
+              <a:t>traffic_volume</a:t>
+            </a:r>
+            <a:r>
+              <a:rPr sz="1300" b="0">
+                <a:solidFill>
+                  <a:srgbClr val="1A1D21"/>
+                </a:solidFill>
+                <a:latin typeface="Calibri"/>
+              </a:rPr>
+              <a:t> </a:t>
+            </a:r>
+            <a:r>
+              <a:rPr sz="1300" b="1">
+                <a:solidFill>
+                  <a:srgbClr val="1A1D21"/>
+                </a:solidFill>
+                <a:latin typeface="Calibri"/>
+              </a:rPr>
+              <a:t>không bao giờ</a:t>
+            </a:r>
+            <a:r>
+              <a:rPr sz="1300" b="0">
+                <a:solidFill>
+                  <a:srgbClr val="1A1D21"/>
+                </a:solidFill>
+                <a:latin typeface="Calibri"/>
+              </a:rPr>
+              <a:t> làm feature và </a:t>
+            </a:r>
+            <a:r>
+              <a:rPr sz="1300" b="1">
+                <a:solidFill>
+                  <a:srgbClr val="1A1D21"/>
+                </a:solidFill>
+                <a:latin typeface="Calibri"/>
+              </a:rPr>
+              <a:t>không bao giờ</a:t>
+            </a:r>
+            <a:r>
+              <a:rPr sz="1300" b="0">
+                <a:solidFill>
+                  <a:srgbClr val="1A1D21"/>
+                </a:solidFill>
+                <a:latin typeface="Calibri"/>
+              </a:rPr>
+              <a:t> được đọc lúc phục vụ</a:t>
             </a:r>
           </a:p>
           <a:p>
@@ -4910,7 +4958,7 @@
 </p:sld>
 </file>
 
-<file path=ppt/slides/slide3.xml><?xml version="1.0" encoding="utf-8"?>
+<file path=ppt/slides/slide4.xml><?xml version="1.0" encoding="utf-8"?>
 <p:sld xmlns:a="http://schemas.openxmlformats.org/drawingml/2006/main" xmlns:p="http://schemas.openxmlformats.org/presentationml/2006/main" xmlns:r="http://schemas.openxmlformats.org/officeDocument/2006/relationships">
   <p:cSld>
     <p:spTree>
@@ -4997,7 +5045,7 @@
                 </a:solidFill>
                 <a:latin typeface="Calibri"/>
               </a:rPr>
-              <a:t>2. Bài toán &amp; dữ liệu</a:t>
+              <a:t>3. Chia tập theo thời gian</a:t>
             </a:r>
           </a:p>
         </p:txBody>
@@ -5052,25 +5100,7 @@
                 </a:solidFill>
                 <a:latin typeface="Calibri"/>
               </a:rPr>
-              <a:t>• Đơn vị quan sát: </a:t>
-            </a:r>
-            <a:r>
-              <a:rPr sz="1300" b="1">
-                <a:solidFill>
-                  <a:srgbClr val="1A1D21"/>
-                </a:solidFill>
-                <a:latin typeface="Calibri"/>
-              </a:rPr>
-              <a:t>1 giờ tại một trạm đo</a:t>
-            </a:r>
-            <a:r>
-              <a:rPr sz="1300" b="0">
-                <a:solidFill>
-                  <a:srgbClr val="1A1D21"/>
-                </a:solidFill>
-                <a:latin typeface="Calibri"/>
-              </a:rPr>
-              <a:t>; biến mục tiêu </a:t>
+              <a:t>Assert chạy mỗi lần: </a:t>
             </a:r>
             <a:r>
               <a:rPr sz="1200" b="0">
@@ -5079,135 +5109,17 @@
                 </a:solidFill>
                 <a:latin typeface="Consolas"/>
               </a:rPr>
-              <a:t>traffic_volume</a:t>
-            </a:r>
-            <a:r>
-              <a:rPr sz="1300" b="0">
-                <a:solidFill>
-                  <a:srgbClr val="1A1D21"/>
-                </a:solidFill>
-                <a:latin typeface="Calibri"/>
-              </a:rPr>
-              <a:t> — </a:t>
-            </a:r>
-            <a:r>
-              <a:rPr sz="1300" b="1">
-                <a:solidFill>
-                  <a:srgbClr val="1A1D21"/>
-                </a:solidFill>
-                <a:latin typeface="Calibri"/>
-              </a:rPr>
-              <a:t>lưu lượng, xe/giờ</a:t>
-            </a:r>
-          </a:p>
-          <a:p>
-            <a:pPr>
-              <a:spcAft>
-                <a:spcPts val="500"/>
-              </a:spcAft>
-            </a:pPr>
-            <a:r>
-              <a:rPr sz="1300" b="0">
-                <a:solidFill>
-                  <a:srgbClr val="1A1D21"/>
-                </a:solidFill>
-                <a:latin typeface="Calibri"/>
-              </a:rPr>
-              <a:t>• Khoảng thời gian: </a:t>
-            </a:r>
-            <a:r>
-              <a:rPr sz="1300" b="1">
-                <a:solidFill>
-                  <a:srgbClr val="1A1D21"/>
-                </a:solidFill>
-                <a:latin typeface="Calibri"/>
-              </a:rPr>
-              <a:t>2012 – 2018</a:t>
-            </a:r>
-            <a:r>
-              <a:rPr sz="1300" b="0">
-                <a:solidFill>
-                  <a:srgbClr val="1A1D21"/>
-                </a:solidFill>
-                <a:latin typeface="Calibri"/>
-              </a:rPr>
-              <a:t> (dữ liệu kết thúc 30/09/2018)</a:t>
-            </a:r>
-          </a:p>
-          <a:p>
-            <a:pPr>
-              <a:spcAft>
-                <a:spcPts val="500"/>
-              </a:spcAft>
-            </a:pPr>
-            <a:r>
-              <a:rPr sz="1300" b="0">
-                <a:solidFill>
-                  <a:srgbClr val="1A1D21"/>
-                </a:solidFill>
-                <a:latin typeface="Calibri"/>
-              </a:rPr>
-              <a:t>• Số dòng thô </a:t>
-            </a:r>
-            <a:r>
-              <a:rPr sz="1300" b="1">
-                <a:solidFill>
-                  <a:srgbClr val="1A1D21"/>
-                </a:solidFill>
-                <a:latin typeface="Calibri"/>
-              </a:rPr>
-              <a:t>48.204</a:t>
-            </a:r>
-            <a:r>
-              <a:rPr sz="1300" b="0">
-                <a:solidFill>
-                  <a:srgbClr val="1A1D21"/>
-                </a:solidFill>
-                <a:latin typeface="Calibri"/>
-              </a:rPr>
-              <a:t> → số dòng dùng để mô hình hoá </a:t>
-            </a:r>
-            <a:r>
-              <a:rPr sz="1300" b="1">
-                <a:solidFill>
-                  <a:srgbClr val="1A1D21"/>
-                </a:solidFill>
-                <a:latin typeface="Calibri"/>
-              </a:rPr>
-              <a:t>40.575</a:t>
-            </a:r>
-            <a:r>
-              <a:rPr sz="1300" b="0">
-                <a:solidFill>
-                  <a:srgbClr val="1A1D21"/>
-                </a:solidFill>
-                <a:latin typeface="Calibri"/>
-              </a:rPr>
-              <a:t> (collapse 5.445 nhóm trùng timestamp)</a:t>
-            </a:r>
-          </a:p>
-          <a:p>
-            <a:pPr>
-              <a:spcAft>
-                <a:spcPts val="500"/>
-              </a:spcAft>
-            </a:pPr>
-            <a:r>
-              <a:rPr sz="1300" b="0">
-                <a:solidFill>
-                  <a:srgbClr val="1A1D21"/>
-                </a:solidFill>
-                <a:latin typeface="Calibri"/>
-              </a:rPr>
-              <a:t>• Ba bẫy đã xử lý:</a:t>
-            </a:r>
-          </a:p>
-          <a:p>
-            <a:pPr>
-              <a:spcAft>
-                <a:spcPts val="500"/>
-              </a:spcAft>
-            </a:pPr>
+              <a:t>max(train) &lt; min(val)</a:t>
+            </a:r>
+            <a:r>
+              <a:rPr sz="1300" b="0">
+                <a:solidFill>
+                  <a:srgbClr val="1A1D21"/>
+                </a:solidFill>
+                <a:latin typeface="Calibri"/>
+              </a:rPr>
+              <a:t> ✓ · </a:t>
+            </a:r>
             <a:r>
               <a:rPr sz="1200" b="0">
                 <a:solidFill>
@@ -5215,129 +5127,16 @@
                 </a:solidFill>
                 <a:latin typeface="Consolas"/>
               </a:rPr>
-              <a:t>holiday == "None"</a:t>
-            </a:r>
-            <a:r>
-              <a:rPr sz="1300" b="0">
-                <a:solidFill>
-                  <a:srgbClr val="1A1D21"/>
-                </a:solidFill>
-                <a:latin typeface="Calibri"/>
-              </a:rPr>
-              <a:t> là </a:t>
-            </a:r>
-            <a:r>
-              <a:rPr sz="1300" b="1">
-                <a:solidFill>
-                  <a:srgbClr val="1A1D21"/>
-                </a:solidFill>
-                <a:latin typeface="Calibri"/>
-              </a:rPr>
-              <a:t>không phải</a:t>
-            </a:r>
-            <a:r>
-              <a:rPr sz="1300" b="0">
-                <a:solidFill>
-                  <a:srgbClr val="1A1D21"/>
-                </a:solidFill>
-                <a:latin typeface="Calibri"/>
-              </a:rPr>
-              <a:t> ngày lễ (dùng </a:t>
-            </a:r>
-            <a:r>
-              <a:rPr sz="1200" b="0">
-                <a:solidFill>
-                  <a:srgbClr val="33373C"/>
-                </a:solidFill>
-                <a:latin typeface="Consolas"/>
-              </a:rPr>
-              <a:t>keep_default_na=False</a:t>
-            </a:r>
-            <a:r>
-              <a:rPr sz="1300" b="0">
-                <a:solidFill>
-                  <a:srgbClr val="1A1D21"/>
-                </a:solidFill>
-                <a:latin typeface="Calibri"/>
-              </a:rPr>
-              <a:t>)</a:t>
-            </a:r>
-          </a:p>
-          <a:p>
-            <a:pPr>
-              <a:spcAft>
-                <a:spcPts val="500"/>
-              </a:spcAft>
-            </a:pPr>
-            <a:r>
-              <a:rPr sz="1200" b="0">
-                <a:solidFill>
-                  <a:srgbClr val="33373C"/>
-                </a:solidFill>
-                <a:latin typeface="Consolas"/>
-              </a:rPr>
-              <a:t>temp ≤ 0 K</a:t>
-            </a:r>
-            <a:r>
-              <a:rPr sz="1300" b="0">
-                <a:solidFill>
-                  <a:srgbClr val="1A1D21"/>
-                </a:solidFill>
-                <a:latin typeface="Calibri"/>
-              </a:rPr>
-              <a:t> (10 dòng) → NaN theo </a:t>
-            </a:r>
-            <a:r>
-              <a:rPr sz="1300" b="1">
-                <a:solidFill>
-                  <a:srgbClr val="1A1D21"/>
-                </a:solidFill>
-                <a:latin typeface="Calibri"/>
-              </a:rPr>
-              <a:t>quy tắc vật lý</a:t>
-            </a:r>
-          </a:p>
-          <a:p>
-            <a:pPr>
-              <a:spcAft>
-                <a:spcPts val="500"/>
-              </a:spcAft>
-            </a:pPr>
-            <a:r>
-              <a:rPr sz="1200" b="0">
-                <a:solidFill>
-                  <a:srgbClr val="33373C"/>
-                </a:solidFill>
-                <a:latin typeface="Consolas"/>
-              </a:rPr>
-              <a:t>rain_1h = 9831,3</a:t>
-            </a:r>
-            <a:r>
-              <a:rPr sz="1300" b="0">
-                <a:solidFill>
-                  <a:srgbClr val="1A1D21"/>
-                </a:solidFill>
-                <a:latin typeface="Calibri"/>
-              </a:rPr>
-              <a:t> (1 dòng) → NaN theo </a:t>
-            </a:r>
-            <a:r>
-              <a:rPr sz="1300" b="1">
-                <a:solidFill>
-                  <a:srgbClr val="1A1D21"/>
-                </a:solidFill>
-                <a:latin typeface="Calibri"/>
-              </a:rPr>
-              <a:t>khớp sentinel</a:t>
-            </a:r>
-            <a:r>
-              <a:rPr sz="1300" b="0">
-                <a:solidFill>
-                  <a:srgbClr val="1A1D21"/>
-                </a:solidFill>
-                <a:latin typeface="Calibri"/>
-              </a:rPr>
-              <a:t>, không dùng ngưỡng</a:t>
+              <a:t>max(val) &lt; min(test)</a:t>
+            </a:r>
+            <a:r>
+              <a:rPr sz="1300" b="0">
+                <a:solidFill>
+                  <a:srgbClr val="1A1D21"/>
+                </a:solidFill>
+                <a:latin typeface="Calibri"/>
+              </a:rPr>
+              <a:t> ✓ · 0 timestamp chung ✓</a:t>
             </a:r>
           </a:p>
           <a:p>
@@ -5360,7 +5159,7 @@
       </p:sp>
       <p:pic>
         <p:nvPicPr>
-          <p:cNvPr id="5" name="Picture 4" descr="eda_target_distribution.png"/>
+          <p:cNvPr id="5" name="Picture 4" descr="eda_traffic_by_month_year.png"/>
           <p:cNvPicPr>
             <a:picLocks noChangeAspect="1"/>
           </p:cNvPicPr>
@@ -5375,7 +5174,7 @@
         <p:spPr>
           <a:xfrm>
             <a:off x="7132320" y="1325880"/>
-            <a:ext cx="4572000" cy="2612571"/>
+            <a:ext cx="4572000" cy="1870364"/>
           </a:xfrm>
           <a:prstGeom prst="rect">
             <a:avLst/>
@@ -5416,7 +5215,7 @@
                 </a:solidFill>
                 <a:latin typeface="Calibri"/>
               </a:rPr>
-              <a:t>eda_target_distribution.png</a:t>
+              <a:t>eda_traffic_by_month_year.png</a:t>
             </a:r>
           </a:p>
         </p:txBody>
@@ -5429,7 +5228,7 @@
 </p:sld>
 </file>
 
-<file path=ppt/slides/slide4.xml><?xml version="1.0" encoding="utf-8"?>
+<file path=ppt/slides/slide5.xml><?xml version="1.0" encoding="utf-8"?>
 <p:sld xmlns:a="http://schemas.openxmlformats.org/drawingml/2006/main" xmlns:p="http://schemas.openxmlformats.org/presentationml/2006/main" xmlns:r="http://schemas.openxmlformats.org/officeDocument/2006/relationships">
   <p:cSld>
     <p:spTree>
@@ -5516,7 +5315,7 @@
                 </a:solidFill>
                 <a:latin typeface="Calibri"/>
               </a:rPr>
-              <a:t>3. Ba quy tắc chống rò rỉ đã chốt TRƯỚC khi động vào dữ liệu</a:t>
+              <a:t>4. Baseline và mô hình</a:t>
             </a:r>
           </a:p>
         </p:txBody>
@@ -5571,25 +5370,25 @@
                 </a:solidFill>
                 <a:latin typeface="Calibri"/>
               </a:rPr>
-              <a:t>Mọi biến đổi trước khi tách tập là </a:t>
-            </a:r>
-            <a:r>
-              <a:rPr sz="1300" b="1">
-                <a:solidFill>
-                  <a:srgbClr val="1A1D21"/>
-                </a:solidFill>
-                <a:latin typeface="Calibri"/>
-              </a:rPr>
-              <a:t>quy tắc tất định</a:t>
-            </a:r>
-            <a:r>
-              <a:rPr sz="1300" b="0">
-                <a:solidFill>
-                  <a:srgbClr val="1A1D21"/>
-                </a:solidFill>
-                <a:latin typeface="Calibri"/>
-              </a:rPr>
-              <a:t> (giờ, thứ, </a:t>
+              <a:t>• </a:t>
+            </a:r>
+            <a:r>
+              <a:rPr sz="1300" b="1">
+                <a:solidFill>
+                  <a:srgbClr val="1A1D21"/>
+                </a:solidFill>
+                <a:latin typeface="Calibri"/>
+              </a:rPr>
+              <a:t>Baseline:</a:t>
+            </a:r>
+            <a:r>
+              <a:rPr sz="1300" b="0">
+                <a:solidFill>
+                  <a:srgbClr val="1A1D21"/>
+                </a:solidFill>
+                <a:latin typeface="Calibri"/>
+              </a:rPr>
+              <a:t> trung bình lưu lượng theo </a:t>
             </a:r>
             <a:r>
               <a:rPr sz="1200" b="0">
@@ -5598,48 +5397,59 @@
                 </a:solidFill>
                 <a:latin typeface="Consolas"/>
               </a:rPr>
-              <a:t>is_holiday</a:t>
-            </a:r>
-            <a:r>
-              <a:rPr sz="1300" b="0">
-                <a:solidFill>
-                  <a:srgbClr val="1A1D21"/>
-                </a:solidFill>
-                <a:latin typeface="Calibri"/>
-              </a:rPr>
-              <a:t> từ lịch),</a:t>
-            </a:r>
-          </a:p>
-          <a:p>
-            <a:pPr>
-              <a:spcAft>
-                <a:spcPts val="500"/>
-              </a:spcAft>
-            </a:pPr>
-            <a:r>
-              <a:rPr sz="1300" b="1">
-                <a:solidFill>
-                  <a:srgbClr val="1A1D21"/>
-                </a:solidFill>
-                <a:latin typeface="Calibri"/>
-              </a:rPr>
-              <a:t>không học thống kê</a:t>
-            </a:r>
-          </a:p>
-          <a:p>
-            <a:pPr>
-              <a:spcAft>
-                <a:spcPts val="500"/>
-              </a:spcAft>
-            </a:pPr>
-            <a:r>
-              <a:rPr sz="1300" b="0">
-                <a:solidFill>
-                  <a:srgbClr val="1A1D21"/>
-                </a:solidFill>
-                <a:latin typeface="Calibri"/>
-              </a:rPr>
-              <a:t>Imputer / scaler / encoder nằm trong </a:t>
+              <a:t>giờ × thứ trong tuần</a:t>
+            </a:r>
+            <a:r>
+              <a:rPr sz="1300" b="0">
+                <a:solidFill>
+                  <a:srgbClr val="1A1D21"/>
+                </a:solidFill>
+                <a:latin typeface="Calibri"/>
+              </a:rPr>
+              <a:t>, fit </a:t>
+            </a:r>
+            <a:r>
+              <a:rPr sz="1300" b="1">
+                <a:solidFill>
+                  <a:srgbClr val="1A1D21"/>
+                </a:solidFill>
+                <a:latin typeface="Calibri"/>
+              </a:rPr>
+              <a:t>chỉ trên TRAIN</a:t>
+            </a:r>
+          </a:p>
+          <a:p>
+            <a:pPr>
+              <a:spcAft>
+                <a:spcPts val="500"/>
+              </a:spcAft>
+            </a:pPr>
+            <a:r>
+              <a:rPr sz="1300" b="0">
+                <a:solidFill>
+                  <a:srgbClr val="1A1D21"/>
+                </a:solidFill>
+                <a:latin typeface="Calibri"/>
+              </a:rPr>
+              <a:t>• </a:t>
+            </a:r>
+            <a:r>
+              <a:rPr sz="1300" b="1">
+                <a:solidFill>
+                  <a:srgbClr val="1A1D21"/>
+                </a:solidFill>
+                <a:latin typeface="Calibri"/>
+              </a:rPr>
+              <a:t>Mô hình:</a:t>
+            </a:r>
+            <a:r>
+              <a:rPr sz="1300" b="0">
+                <a:solidFill>
+                  <a:srgbClr val="1A1D21"/>
+                </a:solidFill>
+                <a:latin typeface="Calibri"/>
+              </a:rPr>
+              <a:t> Ridge (L2) trong </a:t>
             </a:r>
             <a:r>
               <a:rPr sz="1200" b="0">
@@ -5650,24 +5460,6 @@
               </a:rPr>
               <a:t>Pipeline</a:t>
             </a:r>
-            <a:r>
-              <a:rPr sz="1300" b="0">
-                <a:solidFill>
-                  <a:srgbClr val="1A1D21"/>
-                </a:solidFill>
-                <a:latin typeface="Calibri"/>
-              </a:rPr>
-              <a:t>, </a:t>
-            </a:r>
-            <a:r>
-              <a:rPr sz="1300" b="1">
-                <a:solidFill>
-                  <a:srgbClr val="1A1D21"/>
-                </a:solidFill>
-                <a:latin typeface="Calibri"/>
-              </a:rPr>
-              <a:t>fit trên TRAIN duy nhất</a:t>
-            </a:r>
           </a:p>
           <a:p>
             <a:pPr>
@@ -5682,52 +5474,102 @@
                 </a:solidFill>
                 <a:latin typeface="Consolas"/>
               </a:rPr>
-              <a:t>traffic_volume</a:t>
-            </a:r>
-            <a:r>
-              <a:rPr sz="1300" b="0">
-                <a:solidFill>
-                  <a:srgbClr val="1A1D21"/>
-                </a:solidFill>
-                <a:latin typeface="Calibri"/>
-              </a:rPr>
-              <a:t> </a:t>
-            </a:r>
-            <a:r>
-              <a:rPr sz="1300" b="1">
-                <a:solidFill>
-                  <a:srgbClr val="1A1D21"/>
-                </a:solidFill>
-                <a:latin typeface="Calibri"/>
-              </a:rPr>
-              <a:t>không bao giờ</a:t>
-            </a:r>
-            <a:r>
-              <a:rPr sz="1300" b="0">
-                <a:solidFill>
-                  <a:srgbClr val="1A1D21"/>
-                </a:solidFill>
-                <a:latin typeface="Calibri"/>
-              </a:rPr>
-              <a:t> làm feature và </a:t>
-            </a:r>
-            <a:r>
-              <a:rPr sz="1300" b="1">
-                <a:solidFill>
-                  <a:srgbClr val="1A1D21"/>
-                </a:solidFill>
-                <a:latin typeface="Calibri"/>
-              </a:rPr>
-              <a:t>không bao giờ</a:t>
-            </a:r>
-            <a:r>
-              <a:rPr sz="1300" b="0">
-                <a:solidFill>
-                  <a:srgbClr val="1A1D21"/>
-                </a:solidFill>
-                <a:latin typeface="Calibri"/>
-              </a:rPr>
-              <a:t> được đọc lúc phục vụ</a:t>
+              <a:t>ColumnTransformer[OneHotEncoder | SimpleImputer(median) → StandardScaler | passthrough] → Ridge(lsqr)</a:t>
+            </a:r>
+          </a:p>
+          <a:p>
+            <a:pPr>
+              <a:spcAft>
+                <a:spcPts val="500"/>
+              </a:spcAft>
+            </a:pPr>
+            <a:r>
+              <a:rPr sz="1300" b="0">
+                <a:solidFill>
+                  <a:srgbClr val="1A1D21"/>
+                </a:solidFill>
+                <a:latin typeface="Calibri"/>
+              </a:rPr>
+              <a:t>• 4 cột categorical · 5 cột numeric · 12 cột nhị phân → </a:t>
+            </a:r>
+            <a:r>
+              <a:rPr sz="1300" b="1">
+                <a:solidFill>
+                  <a:srgbClr val="1A1D21"/>
+                </a:solidFill>
+                <a:latin typeface="Calibri"/>
+              </a:rPr>
+              <a:t>217</a:t>
+            </a:r>
+            <a:r>
+              <a:rPr sz="1300" b="0">
+                <a:solidFill>
+                  <a:srgbClr val="1A1D21"/>
+                </a:solidFill>
+                <a:latin typeface="Calibri"/>
+              </a:rPr>
+              <a:t> cột sau tiền xử lý</a:t>
+            </a:r>
+          </a:p>
+          <a:p>
+            <a:pPr>
+              <a:spcAft>
+                <a:spcPts val="500"/>
+              </a:spcAft>
+            </a:pPr>
+            <a:r>
+              <a:rPr sz="1300" b="0">
+                <a:solidFill>
+                  <a:srgbClr val="1A1D21"/>
+                </a:solidFill>
+                <a:latin typeface="Calibri"/>
+              </a:rPr>
+              <a:t>• </a:t>
+            </a:r>
+            <a:r>
+              <a:rPr sz="1200" b="0">
+                <a:solidFill>
+                  <a:srgbClr val="33373C"/>
+                </a:solidFill>
+                <a:latin typeface="Consolas"/>
+              </a:rPr>
+              <a:t>alpha</a:t>
+            </a:r>
+            <a:r>
+              <a:rPr sz="1300" b="0">
+                <a:solidFill>
+                  <a:srgbClr val="1A1D21"/>
+                </a:solidFill>
+                <a:latin typeface="Calibri"/>
+              </a:rPr>
+              <a:t> chọn theo </a:t>
+            </a:r>
+            <a:r>
+              <a:rPr sz="1300" b="1">
+                <a:solidFill>
+                  <a:srgbClr val="1A1D21"/>
+                </a:solidFill>
+                <a:latin typeface="Calibri"/>
+              </a:rPr>
+              <a:t>MAE trên validation 2017</a:t>
+            </a:r>
+            <a:r>
+              <a:rPr sz="1300" b="0">
+                <a:solidFill>
+                  <a:srgbClr val="1A1D21"/>
+                </a:solidFill>
+                <a:latin typeface="Calibri"/>
+              </a:rPr>
+              <a:t> → </a:t>
+            </a:r>
+            <a:r>
+              <a:rPr sz="1200" b="0">
+                <a:solidFill>
+                  <a:srgbClr val="33373C"/>
+                </a:solidFill>
+                <a:latin typeface="Consolas"/>
+              </a:rPr>
+              <a:t>alpha = 0,001</a:t>
             </a:r>
           </a:p>
           <a:p>
@@ -5744,6 +5586,69 @@
                 <a:latin typeface="Calibri"/>
               </a:rPr>
               <a:t>---</a:t>
+            </a:r>
+          </a:p>
+        </p:txBody>
+      </p:sp>
+      <p:pic>
+        <p:nvPicPr>
+          <p:cNvPr id="5" name="Picture 4" descr="eda_traffic_by_hour_dow.png"/>
+          <p:cNvPicPr>
+            <a:picLocks noChangeAspect="1"/>
+          </p:cNvPicPr>
+          <p:nvPr/>
+        </p:nvPicPr>
+        <p:blipFill>
+          <a:blip r:embed="rId2"/>
+          <a:stretch>
+            <a:fillRect/>
+          </a:stretch>
+        </p:blipFill>
+        <p:spPr>
+          <a:xfrm>
+            <a:off x="7132320" y="1325880"/>
+            <a:ext cx="4572000" cy="1870364"/>
+          </a:xfrm>
+          <a:prstGeom prst="rect">
+            <a:avLst/>
+          </a:prstGeom>
+        </p:spPr>
+      </p:pic>
+      <p:sp>
+        <p:nvSpPr>
+          <p:cNvPr id="6" name="TextBox 5"/>
+          <p:cNvSpPr txBox="1"/>
+          <p:nvPr/>
+        </p:nvSpPr>
+        <p:spPr>
+          <a:xfrm>
+            <a:off x="7132320" y="4983480"/>
+            <a:ext cx="4572000" cy="457200"/>
+          </a:xfrm>
+          <a:prstGeom prst="rect">
+            <a:avLst/>
+          </a:prstGeom>
+          <a:noFill/>
+        </p:spPr>
+        <p:txBody>
+          <a:bodyPr wrap="square">
+            <a:spAutoFit/>
+          </a:bodyPr>
+          <a:lstStyle/>
+          <a:p>
+            <a:pPr>
+              <a:spcAft>
+                <a:spcPts val="0"/>
+              </a:spcAft>
+            </a:pPr>
+            <a:r>
+              <a:rPr sz="900" b="0">
+                <a:solidFill>
+                  <a:srgbClr val="767D87"/>
+                </a:solidFill>
+                <a:latin typeface="Calibri"/>
+              </a:rPr>
+              <a:t>eda_traffic_by_hour_dow.png</a:t>
             </a:r>
           </a:p>
         </p:txBody>
@@ -5756,7 +5661,7 @@
 </p:sld>
 </file>
 
-<file path=ppt/slides/slide5.xml><?xml version="1.0" encoding="utf-8"?>
+<file path=ppt/slides/slide6.xml><?xml version="1.0" encoding="utf-8"?>
 <p:sld xmlns:a="http://schemas.openxmlformats.org/drawingml/2006/main" xmlns:p="http://schemas.openxmlformats.org/presentationml/2006/main" xmlns:r="http://schemas.openxmlformats.org/officeDocument/2006/relationships">
   <p:cSld>
     <p:spTree>
@@ -5843,7 +5748,7 @@
                 </a:solidFill>
                 <a:latin typeface="Calibri"/>
               </a:rPr>
-              <a:t>4. Chia tập theo thời gian</a:t>
+              <a:t>5. FINAL TEST 2018 (kết quả chính thức)</a:t>
             </a:r>
           </a:p>
         </p:txBody>
@@ -5898,7 +5803,50 @@
                 </a:solidFill>
                 <a:latin typeface="Calibri"/>
               </a:rPr>
-              <a:t>Assert chạy mỗi lần: </a:t>
+              <a:t>• Cùng một tập test, cùng một tập huấn luyện → phép so sánh </a:t>
+            </a:r>
+            <a:r>
+              <a:rPr sz="1300" b="1">
+                <a:solidFill>
+                  <a:srgbClr val="1A1D21"/>
+                </a:solidFill>
+                <a:latin typeface="Calibri"/>
+              </a:rPr>
+              <a:t>công bằng</a:t>
+            </a:r>
+          </a:p>
+          <a:p>
+            <a:pPr>
+              <a:spcAft>
+                <a:spcPts val="500"/>
+              </a:spcAft>
+            </a:pPr>
+            <a:r>
+              <a:rPr sz="1300" b="0">
+                <a:solidFill>
+                  <a:srgbClr val="1A1D21"/>
+                </a:solidFill>
+                <a:latin typeface="Calibri"/>
+              </a:rPr>
+              <a:t>• 2018 </a:t>
+            </a:r>
+            <a:r>
+              <a:rPr sz="1300" b="1">
+                <a:solidFill>
+                  <a:srgbClr val="1A1D21"/>
+                </a:solidFill>
+                <a:latin typeface="Calibri"/>
+              </a:rPr>
+              <a:t>không</a:t>
+            </a:r>
+            <a:r>
+              <a:rPr sz="1300" b="0">
+                <a:solidFill>
+                  <a:srgbClr val="1A1D21"/>
+                </a:solidFill>
+                <a:latin typeface="Calibri"/>
+              </a:rPr>
+              <a:t> dùng để chọn mô hình hay </a:t>
             </a:r>
             <a:r>
               <a:rPr sz="1200" b="0">
@@ -5907,34 +5855,170 @@
                 </a:solidFill>
                 <a:latin typeface="Consolas"/>
               </a:rPr>
-              <a:t>max(train) &lt; min(val)</a:t>
-            </a:r>
-            <a:r>
-              <a:rPr sz="1300" b="0">
-                <a:solidFill>
-                  <a:srgbClr val="1A1D21"/>
-                </a:solidFill>
-                <a:latin typeface="Calibri"/>
-              </a:rPr>
-              <a:t> ✓ · </a:t>
-            </a:r>
-            <a:r>
-              <a:rPr sz="1200" b="0">
-                <a:solidFill>
-                  <a:srgbClr val="33373C"/>
-                </a:solidFill>
-                <a:latin typeface="Consolas"/>
-              </a:rPr>
-              <a:t>max(val) &lt; min(test)</a:t>
-            </a:r>
-            <a:r>
-              <a:rPr sz="1300" b="0">
-                <a:solidFill>
-                  <a:srgbClr val="1A1D21"/>
-                </a:solidFill>
-                <a:latin typeface="Calibri"/>
-              </a:rPr>
-              <a:t> ✓ · 0 timestamp chung ✓</a:t>
+              <a:t>alpha</a:t>
+            </a:r>
+          </a:p>
+          <a:p>
+            <a:pPr>
+              <a:spcAft>
+                <a:spcPts val="500"/>
+              </a:spcAft>
+            </a:pPr>
+            <a:r>
+              <a:rPr sz="1300" b="0">
+                <a:solidFill>
+                  <a:srgbClr val="1A1D21"/>
+                </a:solidFill>
+                <a:latin typeface="Calibri"/>
+              </a:rPr>
+              <a:t>• </a:t>
+            </a:r>
+            <a:r>
+              <a:rPr sz="1300" b="1">
+                <a:solidFill>
+                  <a:srgbClr val="1A1D21"/>
+                </a:solidFill>
+                <a:latin typeface="Calibri"/>
+              </a:rPr>
+              <a:t>Kèm điều kiện:</a:t>
+            </a:r>
+            <a:r>
+              <a:rPr sz="1300" b="0">
+                <a:solidFill>
+                  <a:srgbClr val="1A1D21"/>
+                </a:solidFill>
+                <a:latin typeface="Calibri"/>
+              </a:rPr>
+              <a:t> block bootstrap theo ngày lịch → hiệu MAE </a:t>
+            </a:r>
+            <a:r>
+              <a:rPr sz="1300" b="1">
+                <a:solidFill>
+                  <a:srgbClr val="1A1D21"/>
+                </a:solidFill>
+                <a:latin typeface="Calibri"/>
+              </a:rPr>
+              <a:t>+13,16</a:t>
+            </a:r>
+            <a:r>
+              <a:rPr sz="1300" b="0">
+                <a:solidFill>
+                  <a:srgbClr val="1A1D21"/>
+                </a:solidFill>
+                <a:latin typeface="Calibri"/>
+              </a:rPr>
+              <a:t>,</a:t>
+            </a:r>
+          </a:p>
+          <a:p>
+            <a:pPr>
+              <a:spcAft>
+                <a:spcPts val="500"/>
+              </a:spcAft>
+            </a:pPr>
+            <a:r>
+              <a:rPr sz="1300" b="0">
+                <a:solidFill>
+                  <a:srgbClr val="1A1D21"/>
+                </a:solidFill>
+                <a:latin typeface="Calibri"/>
+              </a:rPr>
+              <a:t>CI 95 % </a:t>
+            </a:r>
+            <a:r>
+              <a:rPr sz="1300" b="1">
+                <a:solidFill>
+                  <a:srgbClr val="1A1D21"/>
+                </a:solidFill>
+                <a:latin typeface="Calibri"/>
+              </a:rPr>
+              <a:t>[+3,80; +22,00]</a:t>
+            </a:r>
+            <a:r>
+              <a:rPr sz="1300" b="0">
+                <a:solidFill>
+                  <a:srgbClr val="1A1D21"/>
+                </a:solidFill>
+                <a:latin typeface="Calibri"/>
+              </a:rPr>
+              <a:t> (không chứa 0), Ridge thắng </a:t>
+            </a:r>
+            <a:r>
+              <a:rPr sz="1300" b="1">
+                <a:solidFill>
+                  <a:srgbClr val="1A1D21"/>
+                </a:solidFill>
+                <a:latin typeface="Calibri"/>
+              </a:rPr>
+              <a:t>8/9 tháng</a:t>
+            </a:r>
+          </a:p>
+          <a:p>
+            <a:pPr>
+              <a:spcAft>
+                <a:spcPts val="500"/>
+              </a:spcAft>
+            </a:pPr>
+            <a:r>
+              <a:rPr sz="1300" b="0">
+                <a:solidFill>
+                  <a:srgbClr val="1A1D21"/>
+                </a:solidFill>
+                <a:latin typeface="Calibri"/>
+              </a:rPr>
+              <a:t>• </a:t>
+            </a:r>
+            <a:r>
+              <a:rPr sz="1300" b="1">
+                <a:solidFill>
+                  <a:srgbClr val="1A1D21"/>
+                </a:solidFill>
+                <a:latin typeface="Calibri"/>
+              </a:rPr>
+              <a:t>Nhưng</a:t>
+            </a:r>
+            <a:r>
+              <a:rPr sz="1300" b="0">
+                <a:solidFill>
+                  <a:srgbClr val="1A1D21"/>
+                </a:solidFill>
+                <a:latin typeface="Calibri"/>
+              </a:rPr>
+              <a:t> ở 3/4 cửa sổ dev 2012–2017 thì Ridge </a:t>
+            </a:r>
+            <a:r>
+              <a:rPr sz="1300" b="1">
+                <a:solidFill>
+                  <a:srgbClr val="1A1D21"/>
+                </a:solidFill>
+                <a:latin typeface="Calibri"/>
+              </a:rPr>
+              <a:t>thua</a:t>
+            </a:r>
+            <a:r>
+              <a:rPr sz="1300" b="0">
+                <a:solidFill>
+                  <a:srgbClr val="1A1D21"/>
+                </a:solidFill>
+                <a:latin typeface="Calibri"/>
+              </a:rPr>
+              <a:t> baseline → không nói</a:t>
+            </a:r>
+          </a:p>
+          <a:p>
+            <a:pPr>
+              <a:spcAft>
+                <a:spcPts val="500"/>
+              </a:spcAft>
+            </a:pPr>
+            <a:r>
+              <a:rPr sz="1300" b="0">
+                <a:solidFill>
+                  <a:srgbClr val="1A1D21"/>
+                </a:solidFill>
+                <a:latin typeface="Calibri"/>
+              </a:rPr>
+              <a:t>chung "mô hình luôn hơn baseline"</a:t>
             </a:r>
           </a:p>
           <a:p>
@@ -5957,7 +6041,7 @@
       </p:sp>
       <p:pic>
         <p:nvPicPr>
-          <p:cNvPr id="5" name="Picture 4" descr="eda_traffic_by_month_year.png"/>
+          <p:cNvPr id="5" name="Picture 4" descr="uncertainty_bootstrap.png"/>
           <p:cNvPicPr>
             <a:picLocks noChangeAspect="1"/>
           </p:cNvPicPr>
@@ -5972,7 +6056,7 @@
         <p:spPr>
           <a:xfrm>
             <a:off x="7132320" y="1325880"/>
-            <a:ext cx="4572000" cy="1870364"/>
+            <a:ext cx="4572000" cy="1547446"/>
           </a:xfrm>
           <a:prstGeom prst="rect">
             <a:avLst/>
@@ -6013,7 +6097,7 @@
                 </a:solidFill>
                 <a:latin typeface="Calibri"/>
               </a:rPr>
-              <a:t>eda_traffic_by_month_year.png</a:t>
+              <a:t>uncertainty_bootstrap.png</a:t>
             </a:r>
           </a:p>
         </p:txBody>
@@ -6026,7 +6110,7 @@
 </p:sld>
 </file>
 
-<file path=ppt/slides/slide6.xml><?xml version="1.0" encoding="utf-8"?>
+<file path=ppt/slides/slide7.xml><?xml version="1.0" encoding="utf-8"?>
 <p:sld xmlns:a="http://schemas.openxmlformats.org/drawingml/2006/main" xmlns:p="http://schemas.openxmlformats.org/presentationml/2006/main" xmlns:r="http://schemas.openxmlformats.org/officeDocument/2006/relationships">
   <p:cSld>
     <p:spTree>
@@ -6113,7 +6197,7 @@
                 </a:solidFill>
                 <a:latin typeface="Calibri"/>
               </a:rPr>
-              <a:t>5. Baseline và mô hình</a:t>
+              <a:t>6. Thí nghiệm 1b/1c: đo cái đo được, không đoán cơ chế</a:t>
             </a:r>
           </a:p>
         </p:txBody>
@@ -6168,206 +6252,136 @@
                 </a:solidFill>
                 <a:latin typeface="Calibri"/>
               </a:rPr>
-              <a:t>• </a:t>
-            </a:r>
-            <a:r>
-              <a:rPr sz="1300" b="1">
-                <a:solidFill>
-                  <a:srgbClr val="1A1D21"/>
-                </a:solidFill>
-                <a:latin typeface="Calibri"/>
-              </a:rPr>
-              <a:t>Baseline:</a:t>
-            </a:r>
-            <a:r>
-              <a:rPr sz="1300" b="0">
-                <a:solidFill>
-                  <a:srgbClr val="1A1D21"/>
-                </a:solidFill>
-                <a:latin typeface="Calibri"/>
-              </a:rPr>
-              <a:t> trung bình lưu lượng theo </a:t>
-            </a:r>
-            <a:r>
-              <a:rPr sz="1200" b="0">
-                <a:solidFill>
-                  <a:srgbClr val="33373C"/>
-                </a:solidFill>
-                <a:latin typeface="Consolas"/>
-              </a:rPr>
-              <a:t>giờ × thứ trong tuần</a:t>
-            </a:r>
-            <a:r>
-              <a:rPr sz="1300" b="0">
-                <a:solidFill>
-                  <a:srgbClr val="1A1D21"/>
-                </a:solidFill>
-                <a:latin typeface="Calibri"/>
-              </a:rPr>
-              <a:t>, fit </a:t>
-            </a:r>
-            <a:r>
-              <a:rPr sz="1300" b="1">
-                <a:solidFill>
-                  <a:srgbClr val="1A1D21"/>
-                </a:solidFill>
-                <a:latin typeface="Calibri"/>
-              </a:rPr>
-              <a:t>chỉ trên TRAIN</a:t>
-            </a:r>
-          </a:p>
-          <a:p>
-            <a:pPr>
-              <a:spcAft>
-                <a:spcPts val="500"/>
-              </a:spcAft>
-            </a:pPr>
-            <a:r>
-              <a:rPr sz="1300" b="0">
-                <a:solidFill>
-                  <a:srgbClr val="1A1D21"/>
-                </a:solidFill>
-                <a:latin typeface="Calibri"/>
-              </a:rPr>
-              <a:t>• </a:t>
-            </a:r>
-            <a:r>
-              <a:rPr sz="1300" b="1">
-                <a:solidFill>
-                  <a:srgbClr val="1A1D21"/>
-                </a:solidFill>
-                <a:latin typeface="Calibri"/>
-              </a:rPr>
-              <a:t>Mô hình:</a:t>
-            </a:r>
-            <a:r>
-              <a:rPr sz="1300" b="0">
-                <a:solidFill>
-                  <a:srgbClr val="1A1D21"/>
-                </a:solidFill>
-                <a:latin typeface="Calibri"/>
-              </a:rPr>
-              <a:t> Ridge (L2) trong </a:t>
-            </a:r>
-            <a:r>
-              <a:rPr sz="1200" b="0">
-                <a:solidFill>
-                  <a:srgbClr val="33373C"/>
-                </a:solidFill>
-                <a:latin typeface="Consolas"/>
-              </a:rPr>
-              <a:t>Pipeline</a:t>
-            </a:r>
-          </a:p>
-          <a:p>
-            <a:pPr>
-              <a:spcAft>
-                <a:spcPts val="500"/>
-              </a:spcAft>
-            </a:pPr>
-            <a:r>
-              <a:rPr sz="1200" b="0">
-                <a:solidFill>
-                  <a:srgbClr val="33373C"/>
-                </a:solidFill>
-                <a:latin typeface="Consolas"/>
-              </a:rPr>
-              <a:t>ColumnTransformer[OneHotEncoder | SimpleImputer(median) → StandardScaler | passthrough] → Ridge(lsqr)</a:t>
-            </a:r>
-          </a:p>
-          <a:p>
-            <a:pPr>
-              <a:spcAft>
-                <a:spcPts val="500"/>
-              </a:spcAft>
-            </a:pPr>
-            <a:r>
-              <a:rPr sz="1300" b="0">
-                <a:solidFill>
-                  <a:srgbClr val="1A1D21"/>
-                </a:solidFill>
-                <a:latin typeface="Calibri"/>
-              </a:rPr>
-              <a:t>• 4 cột categorical · 5 cột numeric · 12 cột nhị phân → </a:t>
-            </a:r>
-            <a:r>
-              <a:rPr sz="1300" b="1">
-                <a:solidFill>
-                  <a:srgbClr val="1A1D21"/>
-                </a:solidFill>
-                <a:latin typeface="Calibri"/>
-              </a:rPr>
-              <a:t>217</a:t>
-            </a:r>
-            <a:r>
-              <a:rPr sz="1300" b="0">
-                <a:solidFill>
-                  <a:srgbClr val="1A1D21"/>
-                </a:solidFill>
-                <a:latin typeface="Calibri"/>
-              </a:rPr>
-              <a:t> cột sau tiền xử lý</a:t>
-            </a:r>
-          </a:p>
-          <a:p>
-            <a:pPr>
-              <a:spcAft>
-                <a:spcPts val="500"/>
-              </a:spcAft>
-            </a:pPr>
-            <a:r>
-              <a:rPr sz="1300" b="0">
-                <a:solidFill>
-                  <a:srgbClr val="1A1D21"/>
-                </a:solidFill>
-                <a:latin typeface="Calibri"/>
-              </a:rPr>
-              <a:t>• </a:t>
-            </a:r>
-            <a:r>
-              <a:rPr sz="1200" b="0">
-                <a:solidFill>
-                  <a:srgbClr val="33373C"/>
-                </a:solidFill>
-                <a:latin typeface="Consolas"/>
-              </a:rPr>
-              <a:t>alpha</a:t>
-            </a:r>
-            <a:r>
-              <a:rPr sz="1300" b="0">
-                <a:solidFill>
-                  <a:srgbClr val="1A1D21"/>
-                </a:solidFill>
-                <a:latin typeface="Calibri"/>
-              </a:rPr>
-              <a:t> chọn theo </a:t>
-            </a:r>
-            <a:r>
-              <a:rPr sz="1300" b="1">
-                <a:solidFill>
-                  <a:srgbClr val="1A1D21"/>
-                </a:solidFill>
-                <a:latin typeface="Calibri"/>
-              </a:rPr>
-              <a:t>MAE trên validation 2017</a:t>
-            </a:r>
-            <a:r>
-              <a:rPr sz="1300" b="0">
-                <a:solidFill>
-                  <a:srgbClr val="1A1D21"/>
-                </a:solidFill>
-                <a:latin typeface="Calibri"/>
-              </a:rPr>
-              <a:t> → </a:t>
-            </a:r>
-            <a:r>
-              <a:rPr sz="1200" b="0">
-                <a:solidFill>
-                  <a:srgbClr val="33373C"/>
-                </a:solidFill>
-                <a:latin typeface="Consolas"/>
-              </a:rPr>
-              <a:t>alpha = 0,001</a:t>
+              <a:t>Bốn arm dùng </a:t>
+            </a:r>
+            <a:r>
+              <a:rPr sz="1300" b="1">
+                <a:solidFill>
+                  <a:srgbClr val="1A1D21"/>
+                </a:solidFill>
+                <a:latin typeface="Calibri"/>
+              </a:rPr>
+              <a:t>CHUNG một tập test</a:t>
+            </a:r>
+            <a:r>
+              <a:rPr sz="1300" b="0">
+                <a:solidFill>
+                  <a:srgbClr val="1A1D21"/>
+                </a:solidFill>
+                <a:latin typeface="Calibri"/>
+              </a:rPr>
+              <a:t> (nửa 2017, n = 4.357), lặp trên 5 seed cố định:</a:t>
+            </a:r>
+          </a:p>
+          <a:p>
+            <a:pPr>
+              <a:spcAft>
+                <a:spcPts val="500"/>
+              </a:spcAft>
+            </a:pPr>
+            <a:r>
+              <a:rPr sz="1300" b="0">
+                <a:solidFill>
+                  <a:srgbClr val="1A1D21"/>
+                </a:solidFill>
+                <a:latin typeface="Calibri"/>
+              </a:rPr>
+              <a:t>• ΔMAE (C − B) = </a:t>
+            </a:r>
+            <a:r>
+              <a:rPr sz="1300" b="1">
+                <a:solidFill>
+                  <a:srgbClr val="1A1D21"/>
+                </a:solidFill>
+                <a:latin typeface="Calibri"/>
+              </a:rPr>
+              <a:t>−6,55 ± 0,37</a:t>
+            </a:r>
+            <a:r>
+              <a:rPr sz="1300" b="0">
+                <a:solidFill>
+                  <a:srgbClr val="1A1D21"/>
+                </a:solidFill>
+                <a:latin typeface="Calibri"/>
+              </a:rPr>
+              <a:t> · ΔMAE (D − B) = </a:t>
+            </a:r>
+            <a:r>
+              <a:rPr sz="1300" b="1">
+                <a:solidFill>
+                  <a:srgbClr val="1A1D21"/>
+                </a:solidFill>
+                <a:latin typeface="Calibri"/>
+              </a:rPr>
+              <a:t>−6,76 ± 0,39</a:t>
+            </a:r>
+            <a:r>
+              <a:rPr sz="1300" b="0">
+                <a:solidFill>
+                  <a:srgbClr val="1A1D21"/>
+                </a:solidFill>
+                <a:latin typeface="Calibri"/>
+              </a:rPr>
+              <a:t> → chênh </a:t>
+            </a:r>
+            <a:r>
+              <a:rPr sz="1300" b="1">
+                <a:solidFill>
+                  <a:srgbClr val="1A1D21"/>
+                </a:solidFill>
+                <a:latin typeface="Calibri"/>
+              </a:rPr>
+              <a:t>+0,21</a:t>
+            </a:r>
+          </a:p>
+          <a:p>
+            <a:pPr>
+              <a:spcAft>
+                <a:spcPts val="500"/>
+              </a:spcAft>
+            </a:pPr>
+            <a:r>
+              <a:rPr sz="1300" b="0">
+                <a:solidFill>
+                  <a:srgbClr val="1A1D21"/>
+                </a:solidFill>
+                <a:latin typeface="Calibri"/>
+              </a:rPr>
+              <a:t>• Thí nghiệm 1c (tháng chẵn → train, tháng lẻ → test): ΔMAE = </a:t>
+            </a:r>
+            <a:r>
+              <a:rPr sz="1300" b="1">
+                <a:solidFill>
+                  <a:srgbClr val="1A1D21"/>
+                </a:solidFill>
+                <a:latin typeface="Calibri"/>
+              </a:rPr>
+              <a:t>−2,40</a:t>
+            </a:r>
+          </a:p>
+          <a:p>
+            <a:pPr>
+              <a:spcAft>
+                <a:spcPts val="500"/>
+              </a:spcAft>
+            </a:pPr>
+            <a:r>
+              <a:rPr sz="1300" b="0">
+                <a:solidFill>
+                  <a:srgbClr val="1A1D21"/>
+                </a:solidFill>
+                <a:latin typeface="Calibri"/>
+              </a:rPr>
+              <a:t>→ chênh giữa "2017 rải rác toàn năm" và "2017 chỉ ở tháng khác" là </a:t>
+            </a:r>
+            <a:r>
+              <a:rPr sz="1300" b="1">
+                <a:solidFill>
+                  <a:srgbClr val="1A1D21"/>
+                </a:solidFill>
+                <a:latin typeface="Calibri"/>
+              </a:rPr>
+              <a:t>4,15 MAE</a:t>
             </a:r>
           </a:p>
           <a:p>
@@ -6384,69 +6398,6 @@
                 <a:latin typeface="Calibri"/>
               </a:rPr>
               <a:t>---</a:t>
-            </a:r>
-          </a:p>
-        </p:txBody>
-      </p:sp>
-      <p:pic>
-        <p:nvPicPr>
-          <p:cNvPr id="5" name="Picture 4" descr="eda_traffic_by_hour_dow.png"/>
-          <p:cNvPicPr>
-            <a:picLocks noChangeAspect="1"/>
-          </p:cNvPicPr>
-          <p:nvPr/>
-        </p:nvPicPr>
-        <p:blipFill>
-          <a:blip r:embed="rId2"/>
-          <a:stretch>
-            <a:fillRect/>
-          </a:stretch>
-        </p:blipFill>
-        <p:spPr>
-          <a:xfrm>
-            <a:off x="7132320" y="1325880"/>
-            <a:ext cx="4572000" cy="1870364"/>
-          </a:xfrm>
-          <a:prstGeom prst="rect">
-            <a:avLst/>
-          </a:prstGeom>
-        </p:spPr>
-      </p:pic>
-      <p:sp>
-        <p:nvSpPr>
-          <p:cNvPr id="6" name="TextBox 5"/>
-          <p:cNvSpPr txBox="1"/>
-          <p:nvPr/>
-        </p:nvSpPr>
-        <p:spPr>
-          <a:xfrm>
-            <a:off x="7132320" y="4983480"/>
-            <a:ext cx="4572000" cy="457200"/>
-          </a:xfrm>
-          <a:prstGeom prst="rect">
-            <a:avLst/>
-          </a:prstGeom>
-          <a:noFill/>
-        </p:spPr>
-        <p:txBody>
-          <a:bodyPr wrap="square">
-            <a:spAutoFit/>
-          </a:bodyPr>
-          <a:lstStyle/>
-          <a:p>
-            <a:pPr>
-              <a:spcAft>
-                <a:spcPts val="0"/>
-              </a:spcAft>
-            </a:pPr>
-            <a:r>
-              <a:rPr sz="900" b="0">
-                <a:solidFill>
-                  <a:srgbClr val="767D87"/>
-                </a:solidFill>
-                <a:latin typeface="Calibri"/>
-              </a:rPr>
-              <a:t>eda_traffic_by_hour_dow.png</a:t>
             </a:r>
           </a:p>
         </p:txBody>
@@ -6459,7 +6410,7 @@
 </p:sld>
 </file>
 
-<file path=ppt/slides/slide7.xml><?xml version="1.0" encoding="utf-8"?>
+<file path=ppt/slides/slide8.xml><?xml version="1.0" encoding="utf-8"?>
 <p:sld xmlns:a="http://schemas.openxmlformats.org/drawingml/2006/main" xmlns:p="http://schemas.openxmlformats.org/presentationml/2006/main" xmlns:r="http://schemas.openxmlformats.org/officeDocument/2006/relationships">
   <p:cSld>
     <p:spTree>
@@ -6546,7 +6497,7 @@
                 </a:solidFill>
                 <a:latin typeface="Calibri"/>
               </a:rPr>
-              <a:t>6. FINAL TEST 2018 (kết quả chính thức)</a:t>
+              <a:t>7. Mô hình hỏng ở đâu? (phân tích lỗi, kèm số mẫu)</a:t>
             </a:r>
           </a:p>
         </p:txBody>
@@ -6601,32 +6552,111 @@
                 </a:solidFill>
                 <a:latin typeface="Calibri"/>
               </a:rPr>
-              <a:t>• Cùng một tập test, cùng một tập huấn luyện → phép so sánh </a:t>
-            </a:r>
-            <a:r>
-              <a:rPr sz="1300" b="1">
-                <a:solidFill>
-                  <a:srgbClr val="1A1D21"/>
-                </a:solidFill>
-                <a:latin typeface="Calibri"/>
-              </a:rPr>
-              <a:t>công bằng</a:t>
-            </a:r>
-          </a:p>
-          <a:p>
-            <a:pPr>
-              <a:spcAft>
-                <a:spcPts val="500"/>
-              </a:spcAft>
-            </a:pPr>
-            <a:r>
-              <a:rPr sz="1300" b="0">
-                <a:solidFill>
-                  <a:srgbClr val="1A1D21"/>
-                </a:solidFill>
-                <a:latin typeface="Calibri"/>
-              </a:rPr>
-              <a:t>• 2018 </a:t>
+              <a:t>• Ngày lễ: MAE </a:t>
+            </a:r>
+            <a:r>
+              <a:rPr sz="1300" b="1">
+                <a:solidFill>
+                  <a:srgbClr val="1A1D21"/>
+                </a:solidFill>
+                <a:latin typeface="Calibri"/>
+              </a:rPr>
+              <a:t>gấp 4,3 lần</a:t>
+            </a:r>
+            <a:r>
+              <a:rPr sz="1300" b="0">
+                <a:solidFill>
+                  <a:srgbClr val="1A1D21"/>
+                </a:solidFill>
+                <a:latin typeface="Calibri"/>
+              </a:rPr>
+              <a:t>, thiên lệch </a:t>
+            </a:r>
+            <a:r>
+              <a:rPr sz="1300" b="1">
+                <a:solidFill>
+                  <a:srgbClr val="1A1D21"/>
+                </a:solidFill>
+                <a:latin typeface="Calibri"/>
+              </a:rPr>
+              <a:t>+58,68</a:t>
+            </a:r>
+            <a:r>
+              <a:rPr sz="1300" b="0">
+                <a:solidFill>
+                  <a:srgbClr val="1A1D21"/>
+                </a:solidFill>
+                <a:latin typeface="Calibri"/>
+              </a:rPr>
+              <a:t> (mô hình dự báo cao hơn thực tế)</a:t>
+            </a:r>
+          </a:p>
+          <a:p>
+            <a:pPr>
+              <a:spcAft>
+                <a:spcPts val="500"/>
+              </a:spcAft>
+            </a:pPr>
+            <a:r>
+              <a:rPr sz="1300" b="0">
+                <a:solidFill>
+                  <a:srgbClr val="1A1D21"/>
+                </a:solidFill>
+                <a:latin typeface="Calibri"/>
+              </a:rPr>
+              <a:t>• Chỉ </a:t>
+            </a:r>
+            <a:r>
+              <a:rPr sz="1300" b="1">
+                <a:solidFill>
+                  <a:srgbClr val="1A1D21"/>
+                </a:solidFill>
+                <a:latin typeface="Calibri"/>
+              </a:rPr>
+              <a:t>7 ngày lễ</a:t>
+            </a:r>
+            <a:r>
+              <a:rPr sz="1300" b="0">
+                <a:solidFill>
+                  <a:srgbClr val="1A1D21"/>
+                </a:solidFill>
+                <a:latin typeface="Calibri"/>
+              </a:rPr>
+              <a:t> trong 2018 → ước lượng có độ bất định lớn</a:t>
+            </a:r>
+          </a:p>
+          <a:p>
+            <a:pPr>
+              <a:spcAft>
+                <a:spcPts val="500"/>
+              </a:spcAft>
+            </a:pPr>
+            <a:r>
+              <a:rPr sz="1300" b="0">
+                <a:solidFill>
+                  <a:srgbClr val="1A1D21"/>
+                </a:solidFill>
+                <a:latin typeface="Calibri"/>
+              </a:rPr>
+              <a:t>• Phân khúc </a:t>
+            </a:r>
+            <a:r>
+              <a:rPr sz="1300" b="1">
+                <a:solidFill>
+                  <a:srgbClr val="1A1D21"/>
+                </a:solidFill>
+                <a:latin typeface="Calibri"/>
+              </a:rPr>
+              <a:t>Squall có n = 0</a:t>
+            </a:r>
+            <a:r>
+              <a:rPr sz="1300" b="0">
+                <a:solidFill>
+                  <a:srgbClr val="1A1D21"/>
+                </a:solidFill>
+                <a:latin typeface="Calibri"/>
+              </a:rPr>
+              <a:t> → báo cáo ghi "không đánh giá được", </a:t>
             </a:r>
             <a:r>
               <a:rPr sz="1300" b="1">
@@ -6644,179 +6674,166 @@
                 </a:solidFill>
                 <a:latin typeface="Calibri"/>
               </a:rPr>
-              <a:t> dùng để chọn mô hình hay </a:t>
-            </a:r>
-            <a:r>
-              <a:rPr sz="1200" b="0">
-                <a:solidFill>
-                  <a:srgbClr val="33373C"/>
-                </a:solidFill>
-                <a:latin typeface="Consolas"/>
-              </a:rPr>
-              <a:t>alpha</a:t>
-            </a:r>
-          </a:p>
-          <a:p>
-            <a:pPr>
-              <a:spcAft>
-                <a:spcPts val="500"/>
-              </a:spcAft>
-            </a:pPr>
-            <a:r>
-              <a:rPr sz="1300" b="0">
-                <a:solidFill>
-                  <a:srgbClr val="1A1D21"/>
-                </a:solidFill>
-                <a:latin typeface="Calibri"/>
-              </a:rPr>
-              <a:t>• </a:t>
-            </a:r>
-            <a:r>
-              <a:rPr sz="1300" b="1">
-                <a:solidFill>
-                  <a:srgbClr val="1A1D21"/>
-                </a:solidFill>
-                <a:latin typeface="Calibri"/>
-              </a:rPr>
-              <a:t>Kèm điều kiện:</a:t>
-            </a:r>
-            <a:r>
-              <a:rPr sz="1300" b="0">
-                <a:solidFill>
-                  <a:srgbClr val="1A1D21"/>
-                </a:solidFill>
-                <a:latin typeface="Calibri"/>
-              </a:rPr>
-              <a:t> block bootstrap theo ngày lịch → hiệu MAE </a:t>
-            </a:r>
-            <a:r>
-              <a:rPr sz="1300" b="1">
-                <a:solidFill>
-                  <a:srgbClr val="1A1D21"/>
-                </a:solidFill>
-                <a:latin typeface="Calibri"/>
-              </a:rPr>
-              <a:t>+13,16</a:t>
-            </a:r>
-            <a:r>
-              <a:rPr sz="1300" b="0">
-                <a:solidFill>
-                  <a:srgbClr val="1A1D21"/>
-                </a:solidFill>
-                <a:latin typeface="Calibri"/>
-              </a:rPr>
-              <a:t>,</a:t>
-            </a:r>
-          </a:p>
-          <a:p>
-            <a:pPr>
-              <a:spcAft>
-                <a:spcPts val="500"/>
-              </a:spcAft>
-            </a:pPr>
-            <a:r>
-              <a:rPr sz="1300" b="0">
-                <a:solidFill>
-                  <a:srgbClr val="1A1D21"/>
-                </a:solidFill>
-                <a:latin typeface="Calibri"/>
-              </a:rPr>
-              <a:t>CI 95 % </a:t>
-            </a:r>
-            <a:r>
-              <a:rPr sz="1300" b="1">
-                <a:solidFill>
-                  <a:srgbClr val="1A1D21"/>
-                </a:solidFill>
-                <a:latin typeface="Calibri"/>
-              </a:rPr>
-              <a:t>[+3,80; +22,00]</a:t>
-            </a:r>
-            <a:r>
-              <a:rPr sz="1300" b="0">
-                <a:solidFill>
-                  <a:srgbClr val="1A1D21"/>
-                </a:solidFill>
-                <a:latin typeface="Calibri"/>
-              </a:rPr>
-              <a:t> (không chứa 0), Ridge thắng </a:t>
-            </a:r>
-            <a:r>
-              <a:rPr sz="1300" b="1">
-                <a:solidFill>
-                  <a:srgbClr val="1A1D21"/>
-                </a:solidFill>
-                <a:latin typeface="Calibri"/>
-              </a:rPr>
-              <a:t>8/9 tháng</a:t>
-            </a:r>
-          </a:p>
-          <a:p>
-            <a:pPr>
-              <a:spcAft>
-                <a:spcPts val="500"/>
-              </a:spcAft>
-            </a:pPr>
-            <a:r>
-              <a:rPr sz="1300" b="0">
-                <a:solidFill>
-                  <a:srgbClr val="1A1D21"/>
-                </a:solidFill>
-                <a:latin typeface="Calibri"/>
-              </a:rPr>
-              <a:t>• </a:t>
-            </a:r>
-            <a:r>
-              <a:rPr sz="1300" b="1">
-                <a:solidFill>
-                  <a:srgbClr val="1A1D21"/>
-                </a:solidFill>
-                <a:latin typeface="Calibri"/>
-              </a:rPr>
-              <a:t>Nhưng</a:t>
-            </a:r>
-            <a:r>
-              <a:rPr sz="1300" b="0">
-                <a:solidFill>
-                  <a:srgbClr val="1A1D21"/>
-                </a:solidFill>
-                <a:latin typeface="Calibri"/>
-              </a:rPr>
-              <a:t> ở 3/4 cửa sổ dev 2012–2017 thì Ridge </a:t>
-            </a:r>
-            <a:r>
-              <a:rPr sz="1300" b="1">
-                <a:solidFill>
-                  <a:srgbClr val="1A1D21"/>
-                </a:solidFill>
-                <a:latin typeface="Calibri"/>
-              </a:rPr>
-              <a:t>thua</a:t>
-            </a:r>
-            <a:r>
-              <a:rPr sz="1300" b="0">
-                <a:solidFill>
-                  <a:srgbClr val="1A1D21"/>
-                </a:solidFill>
-                <a:latin typeface="Calibri"/>
-              </a:rPr>
-              <a:t> baseline → không nói</a:t>
-            </a:r>
-          </a:p>
-          <a:p>
-            <a:pPr>
-              <a:spcAft>
-                <a:spcPts val="500"/>
-              </a:spcAft>
-            </a:pPr>
-            <a:r>
-              <a:rPr sz="1300" b="0">
-                <a:solidFill>
-                  <a:srgbClr val="1A1D21"/>
-                </a:solidFill>
-                <a:latin typeface="Calibri"/>
-              </a:rPr>
-              <a:t>chung "mô hình luôn hơn baseline"</a:t>
+              <a:t> báo số 0</a:t>
+            </a:r>
+          </a:p>
+          <a:p>
+            <a:pPr>
+              <a:spcAft>
+                <a:spcPts val="500"/>
+              </a:spcAft>
+            </a:pPr>
+            <a:r>
+              <a:rPr sz="1300" b="0">
+                <a:solidFill>
+                  <a:srgbClr val="1A1D21"/>
+                </a:solidFill>
+                <a:latin typeface="Calibri"/>
+              </a:rPr>
+              <a:t>Và quan trọng: nhóm em </a:t>
+            </a:r>
+            <a:r>
+              <a:rPr sz="1300" b="1">
+                <a:solidFill>
+                  <a:srgbClr val="1A1D21"/>
+                </a:solidFill>
+                <a:latin typeface="Calibri"/>
+              </a:rPr>
+              <a:t>đã kiểm chứng lại trên dữ liệu 2012–2017</a:t>
+            </a:r>
+            <a:r>
+              <a:rPr sz="1300" b="0">
+                <a:solidFill>
+                  <a:srgbClr val="1A1D21"/>
+                </a:solidFill>
+                <a:latin typeface="Calibri"/>
+              </a:rPr>
+              <a:t>, không chỉ nhìn 2018 —</a:t>
+            </a:r>
+          </a:p>
+          <a:p>
+            <a:pPr>
+              <a:spcAft>
+                <a:spcPts val="500"/>
+              </a:spcAft>
+            </a:pPr>
+            <a:r>
+              <a:rPr sz="1300" b="0">
+                <a:solidFill>
+                  <a:srgbClr val="1A1D21"/>
+                </a:solidFill>
+                <a:latin typeface="Calibri"/>
+              </a:rPr>
+              <a:t>Ridge kém ở </a:t>
+            </a:r>
+            <a:r>
+              <a:rPr sz="1300" b="1">
+                <a:solidFill>
+                  <a:srgbClr val="1A1D21"/>
+                </a:solidFill>
+                <a:latin typeface="Calibri"/>
+              </a:rPr>
+              <a:t>toàn bộ 5 giờ đêm trong cả 3/3 cửa sổ</a:t>
+            </a:r>
+            <a:r>
+              <a:rPr sz="1300" b="0">
+                <a:solidFill>
+                  <a:srgbClr val="1A1D21"/>
+                </a:solidFill>
+                <a:latin typeface="Calibri"/>
+              </a:rPr>
+              <a:t>. Nên đây là </a:t>
+            </a:r>
+            <a:r>
+              <a:rPr sz="1300" b="1">
+                <a:solidFill>
+                  <a:srgbClr val="1A1D21"/>
+                </a:solidFill>
+                <a:latin typeface="Calibri"/>
+              </a:rPr>
+              <a:t>đặc tính của mô hình</a:t>
+            </a:r>
+            <a:r>
+              <a:rPr sz="1300" b="0">
+                <a:solidFill>
+                  <a:srgbClr val="1A1D21"/>
+                </a:solidFill>
+                <a:latin typeface="Calibri"/>
+              </a:rPr>
+              <a:t>, không</a:t>
+            </a:r>
+          </a:p>
+          <a:p>
+            <a:pPr>
+              <a:spcAft>
+                <a:spcPts val="500"/>
+              </a:spcAft>
+            </a:pPr>
+            <a:r>
+              <a:rPr sz="1300" b="0">
+                <a:solidFill>
+                  <a:srgbClr val="1A1D21"/>
+                </a:solidFill>
+                <a:latin typeface="Calibri"/>
+              </a:rPr>
+              <a:t>phải đặc điểm của năm 2018. Giả thuyết: mô hình cộng tuyến tính nên hiệu ứng thời tiết cộng</a:t>
+            </a:r>
+          </a:p>
+          <a:p>
+            <a:pPr>
+              <a:spcAft>
+                <a:spcPts val="500"/>
+              </a:spcAft>
+            </a:pPr>
+            <a:r>
+              <a:rPr sz="1300" b="0">
+                <a:solidFill>
+                  <a:srgbClr val="1A1D21"/>
+                </a:solidFill>
+                <a:latin typeface="Calibri"/>
+              </a:rPr>
+              <a:t>một lượng *tuyệt đối* giống nhau ở mọi giờ, trong khi thực tế nó *tương đối* theo lưu lượng.</a:t>
+            </a:r>
+          </a:p>
+          <a:p>
+            <a:pPr>
+              <a:spcAft>
+                <a:spcPts val="500"/>
+              </a:spcAft>
+            </a:pPr>
+            <a:r>
+              <a:rPr sz="1300" b="0">
+                <a:solidFill>
+                  <a:srgbClr val="1A1D21"/>
+                </a:solidFill>
+                <a:latin typeface="Calibri"/>
+              </a:rPr>
+              <a:t>Nhóm thử log-target: MAE giờ đêm giảm gần một nửa, nhưng MAE tổng lại xấu hơn — và nhóm </a:t>
+            </a:r>
+            <a:r>
+              <a:rPr sz="1300" b="1">
+                <a:solidFill>
+                  <a:srgbClr val="1A1D21"/>
+                </a:solidFill>
+                <a:latin typeface="Calibri"/>
+              </a:rPr>
+              <a:t>không</a:t>
+            </a:r>
+          </a:p>
+          <a:p>
+            <a:pPr>
+              <a:spcAft>
+                <a:spcPts val="500"/>
+              </a:spcAft>
+            </a:pPr>
+            <a:r>
+              <a:rPr sz="1300" b="0">
+                <a:solidFill>
+                  <a:srgbClr val="1A1D21"/>
+                </a:solidFill>
+                <a:latin typeface="Calibri"/>
+              </a:rPr>
+              <a:t>thay mô hình, vì giả thuyết này nêu ra sau khi đã nhìn 2018."</a:t>
             </a:r>
           </a:p>
           <a:p>
@@ -6839,7 +6856,7 @@
       </p:sp>
       <p:pic>
         <p:nvPicPr>
-          <p:cNvPr id="5" name="Picture 4" descr="uncertainty_bootstrap.png"/>
+          <p:cNvPr id="5" name="Picture 4" descr="final_mae_by_weather.png"/>
           <p:cNvPicPr>
             <a:picLocks noChangeAspect="1"/>
           </p:cNvPicPr>
@@ -6854,7 +6871,7 @@
         <p:spPr>
           <a:xfrm>
             <a:off x="7132320" y="1325880"/>
-            <a:ext cx="4572000" cy="1547446"/>
+            <a:ext cx="4572000" cy="2057400"/>
           </a:xfrm>
           <a:prstGeom prst="rect">
             <a:avLst/>
@@ -6895,7 +6912,7 @@
                 </a:solidFill>
                 <a:latin typeface="Calibri"/>
               </a:rPr>
-              <a:t>uncertainty_bootstrap.png</a:t>
+              <a:t>final_mae_by_weather.png</a:t>
             </a:r>
           </a:p>
         </p:txBody>
@@ -6908,7 +6925,7 @@
 </p:sld>
 </file>
 
-<file path=ppt/slides/slide8.xml><?xml version="1.0" encoding="utf-8"?>
+<file path=ppt/slides/slide9.xml><?xml version="1.0" encoding="utf-8"?>
 <p:sld xmlns:a="http://schemas.openxmlformats.org/drawingml/2006/main" xmlns:p="http://schemas.openxmlformats.org/presentationml/2006/main" xmlns:r="http://schemas.openxmlformats.org/officeDocument/2006/relationships">
   <p:cSld>
     <p:spTree>
@@ -6995,7 +7012,7 @@
                 </a:solidFill>
                 <a:latin typeface="Calibri"/>
               </a:rPr>
-              <a:t>7. Thí nghiệm 1b/1c: đo cái đo được, không đoán cơ chế</a:t>
+              <a:t>8. Ứng dụng Web / API: chỉ nạp artifact, không train lại</a:t>
             </a:r>
           </a:p>
         </p:txBody>
@@ -7050,136 +7067,414 @@
                 </a:solidFill>
                 <a:latin typeface="Calibri"/>
               </a:rPr>
-              <a:t>Bốn arm dùng </a:t>
-            </a:r>
-            <a:r>
-              <a:rPr sz="1300" b="1">
-                <a:solidFill>
-                  <a:srgbClr val="1A1D21"/>
-                </a:solidFill>
-                <a:latin typeface="Calibri"/>
-              </a:rPr>
-              <a:t>CHUNG một tập test</a:t>
-            </a:r>
-            <a:r>
-              <a:rPr sz="1300" b="0">
-                <a:solidFill>
-                  <a:srgbClr val="1A1D21"/>
-                </a:solidFill>
-                <a:latin typeface="Calibri"/>
-              </a:rPr>
-              <a:t> (nửa 2017, n = 4.357), lặp trên 5 seed cố định:</a:t>
-            </a:r>
-          </a:p>
-          <a:p>
-            <a:pPr>
-              <a:spcAft>
-                <a:spcPts val="500"/>
-              </a:spcAft>
-            </a:pPr>
-            <a:r>
-              <a:rPr sz="1300" b="0">
-                <a:solidFill>
-                  <a:srgbClr val="1A1D21"/>
-                </a:solidFill>
-                <a:latin typeface="Calibri"/>
-              </a:rPr>
-              <a:t>• ΔMAE (C − B) = </a:t>
-            </a:r>
-            <a:r>
-              <a:rPr sz="1300" b="1">
-                <a:solidFill>
-                  <a:srgbClr val="1A1D21"/>
-                </a:solidFill>
-                <a:latin typeface="Calibri"/>
-              </a:rPr>
-              <a:t>−6,55 ± 0,37</a:t>
-            </a:r>
-            <a:r>
-              <a:rPr sz="1300" b="0">
-                <a:solidFill>
-                  <a:srgbClr val="1A1D21"/>
-                </a:solidFill>
-                <a:latin typeface="Calibri"/>
-              </a:rPr>
-              <a:t> · ΔMAE (D − B) = </a:t>
-            </a:r>
-            <a:r>
-              <a:rPr sz="1300" b="1">
-                <a:solidFill>
-                  <a:srgbClr val="1A1D21"/>
-                </a:solidFill>
-                <a:latin typeface="Calibri"/>
-              </a:rPr>
-              <a:t>−6,76 ± 0,39</a:t>
-            </a:r>
-            <a:r>
-              <a:rPr sz="1300" b="0">
-                <a:solidFill>
-                  <a:srgbClr val="1A1D21"/>
-                </a:solidFill>
-                <a:latin typeface="Calibri"/>
-              </a:rPr>
-              <a:t> → chênh </a:t>
-            </a:r>
-            <a:r>
-              <a:rPr sz="1300" b="1">
-                <a:solidFill>
-                  <a:srgbClr val="1A1D21"/>
-                </a:solidFill>
-                <a:latin typeface="Calibri"/>
-              </a:rPr>
-              <a:t>+0,21</a:t>
-            </a:r>
-          </a:p>
-          <a:p>
-            <a:pPr>
-              <a:spcAft>
-                <a:spcPts val="500"/>
-              </a:spcAft>
-            </a:pPr>
-            <a:r>
-              <a:rPr sz="1300" b="0">
-                <a:solidFill>
-                  <a:srgbClr val="1A1D21"/>
-                </a:solidFill>
-                <a:latin typeface="Calibri"/>
-              </a:rPr>
-              <a:t>• Thí nghiệm 1c (tháng chẵn → train, tháng lẻ → test): ΔMAE = </a:t>
-            </a:r>
-            <a:r>
-              <a:rPr sz="1300" b="1">
-                <a:solidFill>
-                  <a:srgbClr val="1A1D21"/>
-                </a:solidFill>
-                <a:latin typeface="Calibri"/>
-              </a:rPr>
-              <a:t>−2,40</a:t>
-            </a:r>
-          </a:p>
-          <a:p>
-            <a:pPr>
-              <a:spcAft>
-                <a:spcPts val="500"/>
-              </a:spcAft>
-            </a:pPr>
-            <a:r>
-              <a:rPr sz="1300" b="0">
-                <a:solidFill>
-                  <a:srgbClr val="1A1D21"/>
-                </a:solidFill>
-                <a:latin typeface="Calibri"/>
-              </a:rPr>
-              <a:t>→ chênh giữa "2017 rải rác toàn năm" và "2017 chỉ ở tháng khác" là </a:t>
-            </a:r>
-            <a:r>
-              <a:rPr sz="1300" b="1">
-                <a:solidFill>
-                  <a:srgbClr val="1A1D21"/>
-                </a:solidFill>
-                <a:latin typeface="Calibri"/>
-              </a:rPr>
-              <a:t>4,15 MAE</a:t>
+              <a:t>• 3 màn hình: </a:t>
+            </a:r>
+            <a:r>
+              <a:rPr sz="1300" b="1">
+                <a:solidFill>
+                  <a:srgbClr val="1A1D21"/>
+                </a:solidFill>
+                <a:latin typeface="Calibri"/>
+              </a:rPr>
+              <a:t>Giới thiệu</a:t>
+            </a:r>
+            <a:r>
+              <a:rPr sz="1300" b="0">
+                <a:solidFill>
+                  <a:srgbClr val="1A1D21"/>
+                </a:solidFill>
+                <a:latin typeface="Calibri"/>
+              </a:rPr>
+              <a:t> (</a:t>
+            </a:r>
+            <a:r>
+              <a:rPr sz="1200" b="0">
+                <a:solidFill>
+                  <a:srgbClr val="33373C"/>
+                </a:solidFill>
+                <a:latin typeface="Consolas"/>
+              </a:rPr>
+              <a:t>/</a:t>
+            </a:r>
+            <a:r>
+              <a:rPr sz="1300" b="0">
+                <a:solidFill>
+                  <a:srgbClr val="1A1D21"/>
+                </a:solidFill>
+                <a:latin typeface="Calibri"/>
+              </a:rPr>
+              <a:t>) · </a:t>
+            </a:r>
+            <a:r>
+              <a:rPr sz="1300" b="1">
+                <a:solidFill>
+                  <a:srgbClr val="1A1D21"/>
+                </a:solidFill>
+                <a:latin typeface="Calibri"/>
+              </a:rPr>
+              <a:t>Dự báo</a:t>
+            </a:r>
+            <a:r>
+              <a:rPr sz="1300" b="0">
+                <a:solidFill>
+                  <a:srgbClr val="1A1D21"/>
+                </a:solidFill>
+                <a:latin typeface="Calibri"/>
+              </a:rPr>
+              <a:t> (</a:t>
+            </a:r>
+            <a:r>
+              <a:rPr sz="1200" b="0">
+                <a:solidFill>
+                  <a:srgbClr val="33373C"/>
+                </a:solidFill>
+                <a:latin typeface="Consolas"/>
+              </a:rPr>
+              <a:t>/du-bao</a:t>
+            </a:r>
+            <a:r>
+              <a:rPr sz="1300" b="0">
+                <a:solidFill>
+                  <a:srgbClr val="1A1D21"/>
+                </a:solidFill>
+                <a:latin typeface="Calibri"/>
+              </a:rPr>
+              <a:t>, gọi </a:t>
+            </a:r>
+            <a:r>
+              <a:rPr sz="1200" b="0">
+                <a:solidFill>
+                  <a:srgbClr val="33373C"/>
+                </a:solidFill>
+                <a:latin typeface="Consolas"/>
+              </a:rPr>
+              <a:t>POST /api/traffic-forecast</a:t>
+            </a:r>
+            <a:r>
+              <a:rPr sz="1300" b="0">
+                <a:solidFill>
+                  <a:srgbClr val="1A1D21"/>
+                </a:solidFill>
+                <a:latin typeface="Calibri"/>
+              </a:rPr>
+              <a:t> thật) ·</a:t>
+            </a:r>
+          </a:p>
+          <a:p>
+            <a:pPr>
+              <a:spcAft>
+                <a:spcPts val="500"/>
+              </a:spcAft>
+            </a:pPr>
+            <a:r>
+              <a:rPr sz="1300" b="1">
+                <a:solidFill>
+                  <a:srgbClr val="1A1D21"/>
+                </a:solidFill>
+                <a:latin typeface="Calibri"/>
+              </a:rPr>
+              <a:t>Dashboard &amp; Model Card</a:t>
+            </a:r>
+            <a:r>
+              <a:rPr sz="1300" b="0">
+                <a:solidFill>
+                  <a:srgbClr val="1A1D21"/>
+                </a:solidFill>
+                <a:latin typeface="Calibri"/>
+              </a:rPr>
+              <a:t> (</a:t>
+            </a:r>
+            <a:r>
+              <a:rPr sz="1200" b="0">
+                <a:solidFill>
+                  <a:srgbClr val="33373C"/>
+                </a:solidFill>
+                <a:latin typeface="Consolas"/>
+              </a:rPr>
+              <a:t>/dashboard</a:t>
+            </a:r>
+            <a:r>
+              <a:rPr sz="1300" b="0">
+                <a:solidFill>
+                  <a:srgbClr val="1A1D21"/>
+                </a:solidFill>
+                <a:latin typeface="Calibri"/>
+              </a:rPr>
+              <a:t>)</a:t>
+            </a:r>
+          </a:p>
+          <a:p>
+            <a:pPr>
+              <a:spcAft>
+                <a:spcPts val="500"/>
+              </a:spcAft>
+            </a:pPr>
+            <a:r>
+              <a:rPr sz="1300" b="0">
+                <a:solidFill>
+                  <a:srgbClr val="1A1D21"/>
+                </a:solidFill>
+                <a:latin typeface="Calibri"/>
+              </a:rPr>
+              <a:t>• 4 endpoint: </a:t>
+            </a:r>
+            <a:r>
+              <a:rPr sz="1200" b="0">
+                <a:solidFill>
+                  <a:srgbClr val="33373C"/>
+                </a:solidFill>
+                <a:latin typeface="Consolas"/>
+              </a:rPr>
+              <a:t>GET /health</a:t>
+            </a:r>
+            <a:r>
+              <a:rPr sz="1300" b="0">
+                <a:solidFill>
+                  <a:srgbClr val="1A1D21"/>
+                </a:solidFill>
+                <a:latin typeface="Calibri"/>
+              </a:rPr>
+              <a:t> · </a:t>
+            </a:r>
+            <a:r>
+              <a:rPr sz="1200" b="0">
+                <a:solidFill>
+                  <a:srgbClr val="33373C"/>
+                </a:solidFill>
+                <a:latin typeface="Consolas"/>
+              </a:rPr>
+              <a:t>GET /api/model-info</a:t>
+            </a:r>
+            <a:r>
+              <a:rPr sz="1300" b="0">
+                <a:solidFill>
+                  <a:srgbClr val="1A1D21"/>
+                </a:solidFill>
+                <a:latin typeface="Calibri"/>
+              </a:rPr>
+              <a:t> · </a:t>
+            </a:r>
+            <a:r>
+              <a:rPr sz="1200" b="0">
+                <a:solidFill>
+                  <a:srgbClr val="33373C"/>
+                </a:solidFill>
+                <a:latin typeface="Consolas"/>
+              </a:rPr>
+              <a:t>POST /api/traffic-forecast</a:t>
+            </a:r>
+            <a:r>
+              <a:rPr sz="1300" b="0">
+                <a:solidFill>
+                  <a:srgbClr val="1A1D21"/>
+                </a:solidFill>
+                <a:latin typeface="Calibri"/>
+              </a:rPr>
+              <a:t> ·</a:t>
+            </a:r>
+          </a:p>
+          <a:p>
+            <a:pPr>
+              <a:spcAft>
+                <a:spcPts val="500"/>
+              </a:spcAft>
+            </a:pPr>
+            <a:r>
+              <a:rPr sz="1200" b="0">
+                <a:solidFill>
+                  <a:srgbClr val="33373C"/>
+                </a:solidFill>
+                <a:latin typeface="Consolas"/>
+              </a:rPr>
+              <a:t>GET /api/dashboard-metrics</a:t>
+            </a:r>
+          </a:p>
+          <a:p>
+            <a:pPr>
+              <a:spcAft>
+                <a:spcPts val="500"/>
+              </a:spcAft>
+            </a:pPr>
+            <a:r>
+              <a:rPr sz="1300" b="0">
+                <a:solidFill>
+                  <a:srgbClr val="1A1D21"/>
+                </a:solidFill>
+                <a:latin typeface="Calibri"/>
+              </a:rPr>
+              <a:t>• </a:t>
+            </a:r>
+            <a:r>
+              <a:rPr sz="1300" b="1">
+                <a:solidFill>
+                  <a:srgbClr val="1A1D21"/>
+                </a:solidFill>
+                <a:latin typeface="Calibri"/>
+              </a:rPr>
+              <a:t>Không</a:t>
+            </a:r>
+            <a:r>
+              <a:rPr sz="1300" b="0">
+                <a:solidFill>
+                  <a:srgbClr val="1A1D21"/>
+                </a:solidFill>
+                <a:latin typeface="Calibri"/>
+              </a:rPr>
+              <a:t> train, </a:t>
+            </a:r>
+            <a:r>
+              <a:rPr sz="1300" b="1">
+                <a:solidFill>
+                  <a:srgbClr val="1A1D21"/>
+                </a:solidFill>
+                <a:latin typeface="Calibri"/>
+              </a:rPr>
+              <a:t>không</a:t>
+            </a:r>
+            <a:r>
+              <a:rPr sz="1300" b="0">
+                <a:solidFill>
+                  <a:srgbClr val="1A1D21"/>
+                </a:solidFill>
+                <a:latin typeface="Calibri"/>
+              </a:rPr>
+              <a:t> tune alpha, </a:t>
+            </a:r>
+            <a:r>
+              <a:rPr sz="1300" b="1">
+                <a:solidFill>
+                  <a:srgbClr val="1A1D21"/>
+                </a:solidFill>
+                <a:latin typeface="Calibri"/>
+              </a:rPr>
+              <a:t>không</a:t>
+            </a:r>
+            <a:r>
+              <a:rPr sz="1300" b="0">
+                <a:solidFill>
+                  <a:srgbClr val="1A1D21"/>
+                </a:solidFill>
+                <a:latin typeface="Calibri"/>
+              </a:rPr>
+              <a:t> fit lại encoder/imputer/scaler,</a:t>
+            </a:r>
+          </a:p>
+          <a:p>
+            <a:pPr>
+              <a:spcAft>
+                <a:spcPts val="500"/>
+              </a:spcAft>
+            </a:pPr>
+            <a:r>
+              <a:rPr sz="1300" b="1">
+                <a:solidFill>
+                  <a:srgbClr val="1A1D21"/>
+                </a:solidFill>
+                <a:latin typeface="Calibri"/>
+              </a:rPr>
+              <a:t>không</a:t>
+            </a:r>
+            <a:r>
+              <a:rPr sz="1300" b="0">
+                <a:solidFill>
+                  <a:srgbClr val="1A1D21"/>
+                </a:solidFill>
+                <a:latin typeface="Calibri"/>
+              </a:rPr>
+              <a:t> đọc target từ dataset</a:t>
+            </a:r>
+          </a:p>
+          <a:p>
+            <a:pPr>
+              <a:spcAft>
+                <a:spcPts val="500"/>
+              </a:spcAft>
+            </a:pPr>
+            <a:r>
+              <a:rPr sz="1300" b="0">
+                <a:solidFill>
+                  <a:srgbClr val="1A1D21"/>
+                </a:solidFill>
+                <a:latin typeface="Calibri"/>
+              </a:rPr>
+              <a:t>• Mọi feature sinh bằng </a:t>
+            </a:r>
+            <a:r>
+              <a:rPr sz="1300" b="1">
+                <a:solidFill>
+                  <a:srgbClr val="1A1D21"/>
+                </a:solidFill>
+                <a:latin typeface="Calibri"/>
+              </a:rPr>
+              <a:t>CHUNG hàm src.features.build_features</a:t>
+            </a:r>
+            <a:r>
+              <a:rPr sz="1300" b="0">
+                <a:solidFill>
+                  <a:srgbClr val="1A1D21"/>
+                </a:solidFill>
+                <a:latin typeface="Calibri"/>
+              </a:rPr>
+              <a:t> với lúc huấn luyện</a:t>
+            </a:r>
+          </a:p>
+          <a:p>
+            <a:pPr>
+              <a:spcAft>
+                <a:spcPts val="500"/>
+              </a:spcAft>
+            </a:pPr>
+            <a:r>
+              <a:rPr sz="1300" b="0">
+                <a:solidFill>
+                  <a:srgbClr val="1A1D21"/>
+                </a:solidFill>
+                <a:latin typeface="Calibri"/>
+              </a:rPr>
+              <a:t>→ </a:t>
+            </a:r>
+            <a:r>
+              <a:rPr sz="1300" b="1">
+                <a:solidFill>
+                  <a:srgbClr val="1A1D21"/>
+                </a:solidFill>
+                <a:latin typeface="Calibri"/>
+              </a:rPr>
+              <a:t>không có train-serving skew</a:t>
+            </a:r>
+          </a:p>
+          <a:p>
+            <a:pPr>
+              <a:spcAft>
+                <a:spcPts val="500"/>
+              </a:spcAft>
+            </a:pPr>
+            <a:r>
+              <a:rPr sz="1300" b="0">
+                <a:solidFill>
+                  <a:srgbClr val="1A1D21"/>
+                </a:solidFill>
+                <a:latin typeface="Calibri"/>
+              </a:rPr>
+              <a:t>• Số liệu dashboard </a:t>
+            </a:r>
+            <a:r>
+              <a:rPr sz="1300" b="1">
+                <a:solidFill>
+                  <a:srgbClr val="1A1D21"/>
+                </a:solidFill>
+                <a:latin typeface="Calibri"/>
+              </a:rPr>
+              <a:t>đọc từ artifact</a:t>
+            </a:r>
+            <a:r>
+              <a:rPr sz="1300" b="0">
+                <a:solidFill>
+                  <a:srgbClr val="1A1D21"/>
+                </a:solidFill>
+                <a:latin typeface="Calibri"/>
+              </a:rPr>
+              <a:t>, không hard-code trong HTML/JS</a:t>
             </a:r>
           </a:p>
           <a:p>
@@ -7196,521 +7491,6 @@
                 <a:latin typeface="Calibri"/>
               </a:rPr>
               <a:t>---</a:t>
-            </a:r>
-          </a:p>
-        </p:txBody>
-      </p:sp>
-    </p:spTree>
-  </p:cSld>
-  <p:clrMapOvr>
-    <a:masterClrMapping/>
-  </p:clrMapOvr>
-</p:sld>
-</file>
-
-<file path=ppt/slides/slide9.xml><?xml version="1.0" encoding="utf-8"?>
-<p:sld xmlns:a="http://schemas.openxmlformats.org/drawingml/2006/main" xmlns:p="http://schemas.openxmlformats.org/presentationml/2006/main" xmlns:r="http://schemas.openxmlformats.org/officeDocument/2006/relationships">
-  <p:cSld>
-    <p:spTree>
-      <p:nvGrpSpPr>
-        <p:cNvPr id="1" name=""/>
-        <p:cNvGrpSpPr/>
-        <p:nvPr/>
-      </p:nvGrpSpPr>
-      <p:grpSpPr/>
-      <p:sp>
-        <p:nvSpPr>
-          <p:cNvPr id="2" name="Rectangle 1"/>
-          <p:cNvSpPr/>
-          <p:nvPr/>
-        </p:nvSpPr>
-        <p:spPr>
-          <a:xfrm>
-            <a:off x="0" y="0"/>
-            <a:ext cx="12191695" cy="54864"/>
-          </a:xfrm>
-          <a:prstGeom prst="rect">
-            <a:avLst/>
-          </a:prstGeom>
-          <a:solidFill>
-            <a:srgbClr val="1F4E79"/>
-          </a:solidFill>
-          <a:ln>
-            <a:noFill/>
-          </a:ln>
-        </p:spPr>
-        <p:style>
-          <a:lnRef idx="1">
-            <a:schemeClr val="accent1"/>
-          </a:lnRef>
-          <a:fillRef idx="3">
-            <a:schemeClr val="accent1"/>
-          </a:fillRef>
-          <a:effectRef idx="2">
-            <a:schemeClr val="accent1"/>
-          </a:effectRef>
-          <a:fontRef idx="minor">
-            <a:schemeClr val="lt1"/>
-          </a:fontRef>
-        </p:style>
-        <p:txBody>
-          <a:bodyPr rtlCol="0" anchor="ctr"/>
-          <a:lstStyle/>
-          <a:p>
-            <a:pPr algn="ctr"/>
-          </a:p>
-        </p:txBody>
-      </p:sp>
-      <p:sp>
-        <p:nvSpPr>
-          <p:cNvPr id="3" name="TextBox 2"/>
-          <p:cNvSpPr txBox="1"/>
-          <p:nvPr/>
-        </p:nvSpPr>
-        <p:spPr>
-          <a:xfrm>
-            <a:off x="502920" y="256032"/>
-            <a:ext cx="11155680" cy="868680"/>
-          </a:xfrm>
-          <a:prstGeom prst="rect">
-            <a:avLst/>
-          </a:prstGeom>
-          <a:noFill/>
-        </p:spPr>
-        <p:txBody>
-          <a:bodyPr wrap="square">
-            <a:spAutoFit/>
-          </a:bodyPr>
-          <a:lstStyle/>
-          <a:p>
-            <a:pPr>
-              <a:spcAft>
-                <a:spcPts val="0"/>
-              </a:spcAft>
-            </a:pPr>
-            <a:r>
-              <a:rPr sz="2400" b="1">
-                <a:solidFill>
-                  <a:srgbClr val="1F4E79"/>
-                </a:solidFill>
-                <a:latin typeface="Calibri"/>
-              </a:rPr>
-              <a:t>8. Mô hình hỏng ở đâu? (phân tích lỗi, kèm số mẫu)</a:t>
-            </a:r>
-          </a:p>
-        </p:txBody>
-      </p:sp>
-      <p:sp>
-        <p:nvSpPr>
-          <p:cNvPr id="4" name="TextBox 3"/>
-          <p:cNvSpPr txBox="1"/>
-          <p:nvPr/>
-        </p:nvSpPr>
-        <p:spPr>
-          <a:xfrm>
-            <a:off x="502920" y="1234440"/>
-            <a:ext cx="6400800" cy="4937760"/>
-          </a:xfrm>
-          <a:prstGeom prst="rect">
-            <a:avLst/>
-          </a:prstGeom>
-          <a:noFill/>
-        </p:spPr>
-        <p:txBody>
-          <a:bodyPr wrap="square">
-            <a:spAutoFit/>
-          </a:bodyPr>
-          <a:lstStyle/>
-          <a:p>
-            <a:pPr>
-              <a:spcAft>
-                <a:spcPts val="500"/>
-              </a:spcAft>
-            </a:pPr>
-            <a:r>
-              <a:rPr sz="1300" b="1">
-                <a:solidFill>
-                  <a:srgbClr val="1A1D21"/>
-                </a:solidFill>
-                <a:latin typeface="Calibri"/>
-              </a:rPr>
-              <a:t>Nội dung</a:t>
-            </a:r>
-          </a:p>
-          <a:p>
-            <a:pPr>
-              <a:spcAft>
-                <a:spcPts val="500"/>
-              </a:spcAft>
-            </a:pPr>
-            <a:r>
-              <a:rPr sz="1300" b="0">
-                <a:solidFill>
-                  <a:srgbClr val="1A1D21"/>
-                </a:solidFill>
-                <a:latin typeface="Calibri"/>
-              </a:rPr>
-              <a:t>• Ngày lễ: MAE </a:t>
-            </a:r>
-            <a:r>
-              <a:rPr sz="1300" b="1">
-                <a:solidFill>
-                  <a:srgbClr val="1A1D21"/>
-                </a:solidFill>
-                <a:latin typeface="Calibri"/>
-              </a:rPr>
-              <a:t>gấp 4,3 lần</a:t>
-            </a:r>
-            <a:r>
-              <a:rPr sz="1300" b="0">
-                <a:solidFill>
-                  <a:srgbClr val="1A1D21"/>
-                </a:solidFill>
-                <a:latin typeface="Calibri"/>
-              </a:rPr>
-              <a:t>, thiên lệch </a:t>
-            </a:r>
-            <a:r>
-              <a:rPr sz="1300" b="1">
-                <a:solidFill>
-                  <a:srgbClr val="1A1D21"/>
-                </a:solidFill>
-                <a:latin typeface="Calibri"/>
-              </a:rPr>
-              <a:t>+58,68</a:t>
-            </a:r>
-            <a:r>
-              <a:rPr sz="1300" b="0">
-                <a:solidFill>
-                  <a:srgbClr val="1A1D21"/>
-                </a:solidFill>
-                <a:latin typeface="Calibri"/>
-              </a:rPr>
-              <a:t> (mô hình dự báo cao hơn thực tế)</a:t>
-            </a:r>
-          </a:p>
-          <a:p>
-            <a:pPr>
-              <a:spcAft>
-                <a:spcPts val="500"/>
-              </a:spcAft>
-            </a:pPr>
-            <a:r>
-              <a:rPr sz="1300" b="0">
-                <a:solidFill>
-                  <a:srgbClr val="1A1D21"/>
-                </a:solidFill>
-                <a:latin typeface="Calibri"/>
-              </a:rPr>
-              <a:t>• Chỉ </a:t>
-            </a:r>
-            <a:r>
-              <a:rPr sz="1300" b="1">
-                <a:solidFill>
-                  <a:srgbClr val="1A1D21"/>
-                </a:solidFill>
-                <a:latin typeface="Calibri"/>
-              </a:rPr>
-              <a:t>7 ngày lễ</a:t>
-            </a:r>
-            <a:r>
-              <a:rPr sz="1300" b="0">
-                <a:solidFill>
-                  <a:srgbClr val="1A1D21"/>
-                </a:solidFill>
-                <a:latin typeface="Calibri"/>
-              </a:rPr>
-              <a:t> trong 2018 → ước lượng có độ bất định lớn</a:t>
-            </a:r>
-          </a:p>
-          <a:p>
-            <a:pPr>
-              <a:spcAft>
-                <a:spcPts val="500"/>
-              </a:spcAft>
-            </a:pPr>
-            <a:r>
-              <a:rPr sz="1300" b="0">
-                <a:solidFill>
-                  <a:srgbClr val="1A1D21"/>
-                </a:solidFill>
-                <a:latin typeface="Calibri"/>
-              </a:rPr>
-              <a:t>• Phân khúc </a:t>
-            </a:r>
-            <a:r>
-              <a:rPr sz="1300" b="1">
-                <a:solidFill>
-                  <a:srgbClr val="1A1D21"/>
-                </a:solidFill>
-                <a:latin typeface="Calibri"/>
-              </a:rPr>
-              <a:t>Squall có n = 0</a:t>
-            </a:r>
-            <a:r>
-              <a:rPr sz="1300" b="0">
-                <a:solidFill>
-                  <a:srgbClr val="1A1D21"/>
-                </a:solidFill>
-                <a:latin typeface="Calibri"/>
-              </a:rPr>
-              <a:t> → báo cáo ghi "không đánh giá được", </a:t>
-            </a:r>
-            <a:r>
-              <a:rPr sz="1300" b="1">
-                <a:solidFill>
-                  <a:srgbClr val="1A1D21"/>
-                </a:solidFill>
-                <a:latin typeface="Calibri"/>
-              </a:rPr>
-              <a:t>không</a:t>
-            </a:r>
-            <a:r>
-              <a:rPr sz="1300" b="0">
-                <a:solidFill>
-                  <a:srgbClr val="1A1D21"/>
-                </a:solidFill>
-                <a:latin typeface="Calibri"/>
-              </a:rPr>
-              <a:t> báo số 0</a:t>
-            </a:r>
-          </a:p>
-          <a:p>
-            <a:pPr>
-              <a:spcAft>
-                <a:spcPts val="500"/>
-              </a:spcAft>
-            </a:pPr>
-            <a:r>
-              <a:rPr sz="1300" b="0">
-                <a:solidFill>
-                  <a:srgbClr val="1A1D21"/>
-                </a:solidFill>
-                <a:latin typeface="Calibri"/>
-              </a:rPr>
-              <a:t>Và quan trọng: nhóm em </a:t>
-            </a:r>
-            <a:r>
-              <a:rPr sz="1300" b="1">
-                <a:solidFill>
-                  <a:srgbClr val="1A1D21"/>
-                </a:solidFill>
-                <a:latin typeface="Calibri"/>
-              </a:rPr>
-              <a:t>đã kiểm chứng lại trên dữ liệu 2012–2017</a:t>
-            </a:r>
-            <a:r>
-              <a:rPr sz="1300" b="0">
-                <a:solidFill>
-                  <a:srgbClr val="1A1D21"/>
-                </a:solidFill>
-                <a:latin typeface="Calibri"/>
-              </a:rPr>
-              <a:t>, không chỉ nhìn 2018 —</a:t>
-            </a:r>
-          </a:p>
-          <a:p>
-            <a:pPr>
-              <a:spcAft>
-                <a:spcPts val="500"/>
-              </a:spcAft>
-            </a:pPr>
-            <a:r>
-              <a:rPr sz="1300" b="0">
-                <a:solidFill>
-                  <a:srgbClr val="1A1D21"/>
-                </a:solidFill>
-                <a:latin typeface="Calibri"/>
-              </a:rPr>
-              <a:t>Ridge kém ở </a:t>
-            </a:r>
-            <a:r>
-              <a:rPr sz="1300" b="1">
-                <a:solidFill>
-                  <a:srgbClr val="1A1D21"/>
-                </a:solidFill>
-                <a:latin typeface="Calibri"/>
-              </a:rPr>
-              <a:t>toàn bộ 5 giờ đêm trong cả 3/3 cửa sổ</a:t>
-            </a:r>
-            <a:r>
-              <a:rPr sz="1300" b="0">
-                <a:solidFill>
-                  <a:srgbClr val="1A1D21"/>
-                </a:solidFill>
-                <a:latin typeface="Calibri"/>
-              </a:rPr>
-              <a:t>. Nên đây là </a:t>
-            </a:r>
-            <a:r>
-              <a:rPr sz="1300" b="1">
-                <a:solidFill>
-                  <a:srgbClr val="1A1D21"/>
-                </a:solidFill>
-                <a:latin typeface="Calibri"/>
-              </a:rPr>
-              <a:t>đặc tính của mô hình</a:t>
-            </a:r>
-            <a:r>
-              <a:rPr sz="1300" b="0">
-                <a:solidFill>
-                  <a:srgbClr val="1A1D21"/>
-                </a:solidFill>
-                <a:latin typeface="Calibri"/>
-              </a:rPr>
-              <a:t>, không</a:t>
-            </a:r>
-          </a:p>
-          <a:p>
-            <a:pPr>
-              <a:spcAft>
-                <a:spcPts val="500"/>
-              </a:spcAft>
-            </a:pPr>
-            <a:r>
-              <a:rPr sz="1300" b="0">
-                <a:solidFill>
-                  <a:srgbClr val="1A1D21"/>
-                </a:solidFill>
-                <a:latin typeface="Calibri"/>
-              </a:rPr>
-              <a:t>phải đặc điểm của năm 2018. Giả thuyết: mô hình cộng tuyến tính nên hiệu ứng thời tiết cộng</a:t>
-            </a:r>
-          </a:p>
-          <a:p>
-            <a:pPr>
-              <a:spcAft>
-                <a:spcPts val="500"/>
-              </a:spcAft>
-            </a:pPr>
-            <a:r>
-              <a:rPr sz="1300" b="0">
-                <a:solidFill>
-                  <a:srgbClr val="1A1D21"/>
-                </a:solidFill>
-                <a:latin typeface="Calibri"/>
-              </a:rPr>
-              <a:t>một lượng *tuyệt đối* giống nhau ở mọi giờ, trong khi thực tế nó *tương đối* theo lưu lượng.</a:t>
-            </a:r>
-          </a:p>
-          <a:p>
-            <a:pPr>
-              <a:spcAft>
-                <a:spcPts val="500"/>
-              </a:spcAft>
-            </a:pPr>
-            <a:r>
-              <a:rPr sz="1300" b="0">
-                <a:solidFill>
-                  <a:srgbClr val="1A1D21"/>
-                </a:solidFill>
-                <a:latin typeface="Calibri"/>
-              </a:rPr>
-              <a:t>Nhóm thử log-target: MAE giờ đêm giảm gần một nửa, nhưng MAE tổng lại xấu hơn — và nhóm </a:t>
-            </a:r>
-            <a:r>
-              <a:rPr sz="1300" b="1">
-                <a:solidFill>
-                  <a:srgbClr val="1A1D21"/>
-                </a:solidFill>
-                <a:latin typeface="Calibri"/>
-              </a:rPr>
-              <a:t>không</a:t>
-            </a:r>
-          </a:p>
-          <a:p>
-            <a:pPr>
-              <a:spcAft>
-                <a:spcPts val="500"/>
-              </a:spcAft>
-            </a:pPr>
-            <a:r>
-              <a:rPr sz="1300" b="0">
-                <a:solidFill>
-                  <a:srgbClr val="1A1D21"/>
-                </a:solidFill>
-                <a:latin typeface="Calibri"/>
-              </a:rPr>
-              <a:t>thay mô hình, vì giả thuyết này nêu ra sau khi đã nhìn 2018."</a:t>
-            </a:r>
-          </a:p>
-          <a:p>
-            <a:pPr>
-              <a:spcAft>
-                <a:spcPts val="500"/>
-              </a:spcAft>
-            </a:pPr>
-            <a:r>
-              <a:rPr sz="1300" b="0">
-                <a:solidFill>
-                  <a:srgbClr val="1A1D21"/>
-                </a:solidFill>
-                <a:latin typeface="Calibri"/>
-              </a:rPr>
-              <a:t>---</a:t>
-            </a:r>
-          </a:p>
-        </p:txBody>
-      </p:sp>
-      <p:pic>
-        <p:nvPicPr>
-          <p:cNvPr id="5" name="Picture 4" descr="final_mae_by_weather.png"/>
-          <p:cNvPicPr>
-            <a:picLocks noChangeAspect="1"/>
-          </p:cNvPicPr>
-          <p:nvPr/>
-        </p:nvPicPr>
-        <p:blipFill>
-          <a:blip r:embed="rId2"/>
-          <a:stretch>
-            <a:fillRect/>
-          </a:stretch>
-        </p:blipFill>
-        <p:spPr>
-          <a:xfrm>
-            <a:off x="7132320" y="1325880"/>
-            <a:ext cx="4572000" cy="2057400"/>
-          </a:xfrm>
-          <a:prstGeom prst="rect">
-            <a:avLst/>
-          </a:prstGeom>
-        </p:spPr>
-      </p:pic>
-      <p:sp>
-        <p:nvSpPr>
-          <p:cNvPr id="6" name="TextBox 5"/>
-          <p:cNvSpPr txBox="1"/>
-          <p:nvPr/>
-        </p:nvSpPr>
-        <p:spPr>
-          <a:xfrm>
-            <a:off x="7132320" y="4983480"/>
-            <a:ext cx="4572000" cy="457200"/>
-          </a:xfrm>
-          <a:prstGeom prst="rect">
-            <a:avLst/>
-          </a:prstGeom>
-          <a:noFill/>
-        </p:spPr>
-        <p:txBody>
-          <a:bodyPr wrap="square">
-            <a:spAutoFit/>
-          </a:bodyPr>
-          <a:lstStyle/>
-          <a:p>
-            <a:pPr>
-              <a:spcAft>
-                <a:spcPts val="0"/>
-              </a:spcAft>
-            </a:pPr>
-            <a:r>
-              <a:rPr sz="900" b="0">
-                <a:solidFill>
-                  <a:srgbClr val="767D87"/>
-                </a:solidFill>
-                <a:latin typeface="Calibri"/>
-              </a:rPr>
-              <a:t>final_mae_by_weather.png</a:t>
             </a:r>
           </a:p>
         </p:txBody>
